--- a/reports/BottleNeck_CODIR.pptx
+++ b/reports/BottleNeck_CODIR.pptx
@@ -1,46 +1,146 @@
 
 <file path=ppt/presentation.xml><?xml version="1.0" encoding="utf-8"?>
-<p:presentation xmlns:p="http://schemas.openxmlformats.org/presentationml/2006/main" embedTrueTypeFonts="1" saveSubsetFonts="1">
+<p:presentation xmlns:a="http://schemas.openxmlformats.org/drawingml/2006/main" xmlns:r="http://schemas.openxmlformats.org/officeDocument/2006/relationships" xmlns:p="http://schemas.openxmlformats.org/presentationml/2006/main" embedTrueTypeFonts="1" saveSubsetFonts="1">
   <p:sldMasterIdLst>
-    <p:sldMasterId xmlns:r="http://schemas.openxmlformats.org/officeDocument/2006/relationships" id="2147483648" r:id="R1edc5a9a366646f7"/>
+    <p:sldMasterId id="2147483648" r:id="rId1"/>
   </p:sldMasterIdLst>
   <p:notesMasterIdLst>
-    <p:notesMasterId xmlns:r="http://schemas.openxmlformats.org/officeDocument/2006/relationships" r:id="R7136576f323e490a"/>
+    <p:notesMasterId r:id="rId14"/>
   </p:notesMasterIdLst>
   <p:sldIdLst>
-    <p:sldId xmlns:r="http://schemas.openxmlformats.org/officeDocument/2006/relationships" id="256" r:id="R24b0b0f851bc4209"/>
-    <p:sldId xmlns:r="http://schemas.openxmlformats.org/officeDocument/2006/relationships" id="257" r:id="R777e639cd2cf48ab"/>
-    <p:sldId xmlns:r="http://schemas.openxmlformats.org/officeDocument/2006/relationships" id="258" r:id="R0ef05dff91a248e4"/>
-    <p:sldId xmlns:r="http://schemas.openxmlformats.org/officeDocument/2006/relationships" id="259" r:id="R61761aa540754597"/>
-    <p:sldId xmlns:r="http://schemas.openxmlformats.org/officeDocument/2006/relationships" id="260" r:id="R9959202dcce141cc"/>
-    <p:sldId xmlns:r="http://schemas.openxmlformats.org/officeDocument/2006/relationships" id="261" r:id="R3b242fc6f8f94f1d"/>
-    <p:sldId xmlns:r="http://schemas.openxmlformats.org/officeDocument/2006/relationships" id="262" r:id="R09cbcc3d51a8419b"/>
-    <p:sldId xmlns:r="http://schemas.openxmlformats.org/officeDocument/2006/relationships" id="263" r:id="Rc276efb1a86c4483"/>
-    <p:sldId xmlns:r="http://schemas.openxmlformats.org/officeDocument/2006/relationships" id="264" r:id="Rd5025e60ba6347ed"/>
-    <p:sldId xmlns:r="http://schemas.openxmlformats.org/officeDocument/2006/relationships" id="265" r:id="R02f7166cc1a640dd"/>
-    <p:sldId xmlns:r="http://schemas.openxmlformats.org/officeDocument/2006/relationships" id="266" r:id="R847dea6ddd774990"/>
-    <p:sldId xmlns:r="http://schemas.openxmlformats.org/officeDocument/2006/relationships" id="267" r:id="Rdcf96355642c4392"/>
+    <p:sldId id="256" r:id="rId2"/>
+    <p:sldId id="257" r:id="rId3"/>
+    <p:sldId id="258" r:id="rId4"/>
+    <p:sldId id="259" r:id="rId5"/>
+    <p:sldId id="260" r:id="rId6"/>
+    <p:sldId id="261" r:id="rId7"/>
+    <p:sldId id="262" r:id="rId8"/>
+    <p:sldId id="263" r:id="rId9"/>
+    <p:sldId id="264" r:id="rId10"/>
+    <p:sldId id="265" r:id="rId11"/>
+    <p:sldId id="266" r:id="rId12"/>
+    <p:sldId id="267" r:id="rId13"/>
   </p:sldIdLst>
-  <p:sldSz cx="9144000" cy="5143500"/>
+  <p:sldSz cx="9144000" cy="5143500" type="screen16x9"/>
   <p:notesSz cx="6858000" cy="9144000"/>
   <p:embeddedFontLst>
     <p:embeddedFont>
-      <p:font typeface="Montserrat"/>
-      <p:regular xmlns:r="http://schemas.openxmlformats.org/officeDocument/2006/relationships" r:id="R9ec1f585aab74ac0"/>
-      <p:bold xmlns:r="http://schemas.openxmlformats.org/officeDocument/2006/relationships" r:id="R2d6b037959d440e0"/>
-      <p:italic xmlns:r="http://schemas.openxmlformats.org/officeDocument/2006/relationships" r:id="R418ee44dbef34ab0"/>
-      <p:boldItalic xmlns:r="http://schemas.openxmlformats.org/officeDocument/2006/relationships" r:id="R49bb4260123546a7"/>
+      <p:font typeface="Montserrat" panose="00000500000000000000" pitchFamily="50" charset="0"/>
+      <p:regular r:id="rId15"/>
+      <p:bold r:id="rId16"/>
+      <p:italic r:id="rId17"/>
+      <p:boldItalic r:id="rId18"/>
     </p:embeddedFont>
   </p:embeddedFontLst>
+  <p:defaultTextStyle>
+    <a:defPPr>
+      <a:defRPr lang="fr-FR"/>
+    </a:defPPr>
+    <a:lvl1pPr marL="0" algn="l" defTabSz="914400" rtl="0" eaLnBrk="1" latinLnBrk="0" hangingPunct="1">
+      <a:defRPr sz="1800" kern="1200">
+        <a:solidFill>
+          <a:schemeClr val="tx1"/>
+        </a:solidFill>
+        <a:latin typeface="+mn-lt"/>
+        <a:ea typeface="+mn-ea"/>
+        <a:cs typeface="+mn-cs"/>
+      </a:defRPr>
+    </a:lvl1pPr>
+    <a:lvl2pPr marL="457200" algn="l" defTabSz="914400" rtl="0" eaLnBrk="1" latinLnBrk="0" hangingPunct="1">
+      <a:defRPr sz="1800" kern="1200">
+        <a:solidFill>
+          <a:schemeClr val="tx1"/>
+        </a:solidFill>
+        <a:latin typeface="+mn-lt"/>
+        <a:ea typeface="+mn-ea"/>
+        <a:cs typeface="+mn-cs"/>
+      </a:defRPr>
+    </a:lvl2pPr>
+    <a:lvl3pPr marL="914400" algn="l" defTabSz="914400" rtl="0" eaLnBrk="1" latinLnBrk="0" hangingPunct="1">
+      <a:defRPr sz="1800" kern="1200">
+        <a:solidFill>
+          <a:schemeClr val="tx1"/>
+        </a:solidFill>
+        <a:latin typeface="+mn-lt"/>
+        <a:ea typeface="+mn-ea"/>
+        <a:cs typeface="+mn-cs"/>
+      </a:defRPr>
+    </a:lvl3pPr>
+    <a:lvl4pPr marL="1371600" algn="l" defTabSz="914400" rtl="0" eaLnBrk="1" latinLnBrk="0" hangingPunct="1">
+      <a:defRPr sz="1800" kern="1200">
+        <a:solidFill>
+          <a:schemeClr val="tx1"/>
+        </a:solidFill>
+        <a:latin typeface="+mn-lt"/>
+        <a:ea typeface="+mn-ea"/>
+        <a:cs typeface="+mn-cs"/>
+      </a:defRPr>
+    </a:lvl4pPr>
+    <a:lvl5pPr marL="1828800" algn="l" defTabSz="914400" rtl="0" eaLnBrk="1" latinLnBrk="0" hangingPunct="1">
+      <a:defRPr sz="1800" kern="1200">
+        <a:solidFill>
+          <a:schemeClr val="tx1"/>
+        </a:solidFill>
+        <a:latin typeface="+mn-lt"/>
+        <a:ea typeface="+mn-ea"/>
+        <a:cs typeface="+mn-cs"/>
+      </a:defRPr>
+    </a:lvl5pPr>
+    <a:lvl6pPr marL="2286000" algn="l" defTabSz="914400" rtl="0" eaLnBrk="1" latinLnBrk="0" hangingPunct="1">
+      <a:defRPr sz="1800" kern="1200">
+        <a:solidFill>
+          <a:schemeClr val="tx1"/>
+        </a:solidFill>
+        <a:latin typeface="+mn-lt"/>
+        <a:ea typeface="+mn-ea"/>
+        <a:cs typeface="+mn-cs"/>
+      </a:defRPr>
+    </a:lvl6pPr>
+    <a:lvl7pPr marL="2743200" algn="l" defTabSz="914400" rtl="0" eaLnBrk="1" latinLnBrk="0" hangingPunct="1">
+      <a:defRPr sz="1800" kern="1200">
+        <a:solidFill>
+          <a:schemeClr val="tx1"/>
+        </a:solidFill>
+        <a:latin typeface="+mn-lt"/>
+        <a:ea typeface="+mn-ea"/>
+        <a:cs typeface="+mn-cs"/>
+      </a:defRPr>
+    </a:lvl7pPr>
+    <a:lvl8pPr marL="3200400" algn="l" defTabSz="914400" rtl="0" eaLnBrk="1" latinLnBrk="0" hangingPunct="1">
+      <a:defRPr sz="1800" kern="1200">
+        <a:solidFill>
+          <a:schemeClr val="tx1"/>
+        </a:solidFill>
+        <a:latin typeface="+mn-lt"/>
+        <a:ea typeface="+mn-ea"/>
+        <a:cs typeface="+mn-cs"/>
+      </a:defRPr>
+    </a:lvl8pPr>
+    <a:lvl9pPr marL="3657600" algn="l" defTabSz="914400" rtl="0" eaLnBrk="1" latinLnBrk="0" hangingPunct="1">
+      <a:defRPr sz="1800" kern="1200">
+        <a:solidFill>
+          <a:schemeClr val="tx1"/>
+        </a:solidFill>
+        <a:latin typeface="+mn-lt"/>
+        <a:ea typeface="+mn-ea"/>
+        <a:cs typeface="+mn-cs"/>
+      </a:defRPr>
+    </a:lvl9pPr>
+  </p:defaultTextStyle>
+  <p:extLst>
+    <p:ext uri="{EFAFB233-063F-42B5-8137-9DF3F51BA10A}">
+      <p15:sldGuideLst xmlns:p15="http://schemas.microsoft.com/office/powerpoint/2012/main"/>
+    </p:ext>
+  </p:extLst>
 </p:presentation>
 </file>
 
 <file path=ppt/notesMasters/notesMaster1.xml><?xml version="1.0" encoding="utf-8"?>
-<p:notesMaster xmlns:p="http://schemas.openxmlformats.org/presentationml/2006/main">
+<p:notesMaster xmlns:a="http://schemas.openxmlformats.org/drawingml/2006/main" xmlns:r="http://schemas.openxmlformats.org/officeDocument/2006/relationships" xmlns:p="http://schemas.openxmlformats.org/presentationml/2006/main">
   <p:cSld>
     <p:bg>
       <p:bgRef idx="1001">
-        <a:schemeClr xmlns:a="http://schemas.openxmlformats.org/drawingml/2006/main" val="bg1"/>
+        <a:schemeClr val="bg1"/>
       </p:bgRef>
     </p:bg>
     <p:spTree>
@@ -50,403 +150,164 @@
         <p:nvPr/>
       </p:nvGrpSpPr>
       <p:grpSpPr>
-        <a:xfrm xmlns:a="http://schemas.openxmlformats.org/drawingml/2006/main"/>
+        <a:xfrm>
+          <a:off x="0" y="0"/>
+          <a:ext cx="0" cy="0"/>
+          <a:chOff x="0" y="0"/>
+          <a:chExt cx="0" cy="0"/>
+        </a:xfrm>
       </p:grpSpPr>
       <p:sp>
         <p:nvSpPr>
           <p:cNvPr id="2" name="Header Placeholder"/>
-          <p:cNvSpPr/>
+          <p:cNvSpPr>
+            <a:spLocks noGrp="1"/>
+          </p:cNvSpPr>
           <p:nvPr>
             <p:ph type="hdr" sz="quarter"/>
           </p:nvPr>
         </p:nvSpPr>
         <p:spPr>
-          <a:prstGeom xmlns:a="http://schemas.openxmlformats.org/drawingml/2006/main" prst="rect">
+          <a:prstGeom prst="rect">
             <a:avLst/>
           </a:prstGeom>
         </p:spPr>
         <p:txBody>
-          <a:bodyPr xmlns:a="http://schemas.openxmlformats.org/drawingml/2006/main"/>
-          <a:lstStyle xmlns:a="http://schemas.openxmlformats.org/drawingml/2006/main"/>
-          <a:p xmlns:a="http://schemas.openxmlformats.org/drawingml/2006/main"/>
+          <a:bodyPr/>
+          <a:lstStyle/>
+          <a:p>
+            <a:endParaRPr/>
+          </a:p>
         </p:txBody>
       </p:sp>
       <p:sp>
         <p:nvSpPr>
           <p:cNvPr id="3" name="Date Placeholder"/>
-          <p:cNvSpPr/>
+          <p:cNvSpPr>
+            <a:spLocks noGrp="1"/>
+          </p:cNvSpPr>
           <p:nvPr>
             <p:ph type="dt" sz="quarter" idx="1"/>
           </p:nvPr>
         </p:nvSpPr>
         <p:spPr>
-          <a:prstGeom xmlns:a="http://schemas.openxmlformats.org/drawingml/2006/main" prst="rect">
+          <a:prstGeom prst="rect">
             <a:avLst/>
           </a:prstGeom>
         </p:spPr>
         <p:txBody>
-          <a:bodyPr xmlns:a="http://schemas.openxmlformats.org/drawingml/2006/main"/>
-          <a:lstStyle xmlns:a="http://schemas.openxmlformats.org/drawingml/2006/main"/>
-          <a:p xmlns:a="http://schemas.openxmlformats.org/drawingml/2006/main"/>
+          <a:bodyPr/>
+          <a:lstStyle/>
+          <a:p>
+            <a:endParaRPr/>
+          </a:p>
         </p:txBody>
       </p:sp>
       <p:sp>
         <p:nvSpPr>
           <p:cNvPr id="4" name="Slide Image Placeholder"/>
-          <p:cNvSpPr/>
+          <p:cNvSpPr>
+            <a:spLocks noGrp="1" noRot="1" noChangeAspect="1"/>
+          </p:cNvSpPr>
           <p:nvPr>
             <p:ph type="sldImg" idx="2"/>
           </p:nvPr>
         </p:nvSpPr>
         <p:spPr>
-          <a:prstGeom xmlns:a="http://schemas.openxmlformats.org/drawingml/2006/main" prst="rect">
+          <a:prstGeom prst="rect">
             <a:avLst/>
           </a:prstGeom>
         </p:spPr>
         <p:txBody>
-          <a:bodyPr xmlns:a="http://schemas.openxmlformats.org/drawingml/2006/main"/>
-          <a:lstStyle xmlns:a="http://schemas.openxmlformats.org/drawingml/2006/main"/>
-          <a:p xmlns:a="http://schemas.openxmlformats.org/drawingml/2006/main"/>
+          <a:bodyPr/>
+          <a:lstStyle/>
+          <a:p>
+            <a:endParaRPr/>
+          </a:p>
         </p:txBody>
       </p:sp>
       <p:sp>
         <p:nvSpPr>
           <p:cNvPr id="5" name="Notes Placeholder"/>
-          <p:cNvSpPr/>
+          <p:cNvSpPr>
+            <a:spLocks noGrp="1"/>
+          </p:cNvSpPr>
           <p:nvPr>
             <p:ph type="body" sz="quarter" idx="3"/>
           </p:nvPr>
         </p:nvSpPr>
         <p:spPr>
-          <a:prstGeom xmlns:a="http://schemas.openxmlformats.org/drawingml/2006/main" prst="rect">
+          <a:prstGeom prst="rect">
             <a:avLst/>
           </a:prstGeom>
         </p:spPr>
         <p:txBody>
-          <a:bodyPr xmlns:a="http://schemas.openxmlformats.org/drawingml/2006/main"/>
-          <a:lstStyle xmlns:a="http://schemas.openxmlformats.org/drawingml/2006/main"/>
-          <a:p xmlns:a="http://schemas.openxmlformats.org/drawingml/2006/main"/>
+          <a:bodyPr/>
+          <a:lstStyle/>
+          <a:p>
+            <a:endParaRPr/>
+          </a:p>
         </p:txBody>
       </p:sp>
       <p:sp>
         <p:nvSpPr>
           <p:cNvPr id="6" name="Footer Placeholder"/>
-          <p:cNvSpPr/>
+          <p:cNvSpPr>
+            <a:spLocks noGrp="1"/>
+          </p:cNvSpPr>
           <p:nvPr>
             <p:ph type="ftr" sz="quarter" idx="4"/>
           </p:nvPr>
         </p:nvSpPr>
         <p:spPr>
-          <a:prstGeom xmlns:a="http://schemas.openxmlformats.org/drawingml/2006/main" prst="rect">
+          <a:prstGeom prst="rect">
             <a:avLst/>
           </a:prstGeom>
         </p:spPr>
         <p:txBody>
-          <a:bodyPr xmlns:a="http://schemas.openxmlformats.org/drawingml/2006/main"/>
-          <a:lstStyle xmlns:a="http://schemas.openxmlformats.org/drawingml/2006/main"/>
-          <a:p xmlns:a="http://schemas.openxmlformats.org/drawingml/2006/main"/>
+          <a:bodyPr/>
+          <a:lstStyle/>
+          <a:p>
+            <a:endParaRPr/>
+          </a:p>
         </p:txBody>
       </p:sp>
       <p:sp>
         <p:nvSpPr>
           <p:cNvPr id="7" name="Slide Number Placeholder"/>
-          <p:cNvSpPr/>
+          <p:cNvSpPr>
+            <a:spLocks noGrp="1"/>
+          </p:cNvSpPr>
           <p:nvPr>
             <p:ph type="sldNum" sz="quarter" idx="5"/>
           </p:nvPr>
         </p:nvSpPr>
         <p:spPr>
-          <a:prstGeom xmlns:a="http://schemas.openxmlformats.org/drawingml/2006/main" prst="rect">
+          <a:prstGeom prst="rect">
             <a:avLst/>
           </a:prstGeom>
         </p:spPr>
         <p:txBody>
-          <a:bodyPr xmlns:a="http://schemas.openxmlformats.org/drawingml/2006/main"/>
-          <a:lstStyle xmlns:a="http://schemas.openxmlformats.org/drawingml/2006/main"/>
-          <a:p xmlns:a="http://schemas.openxmlformats.org/drawingml/2006/main"/>
+          <a:bodyPr/>
+          <a:lstStyle/>
+          <a:p>
+            <a:endParaRPr/>
+          </a:p>
         </p:txBody>
       </p:sp>
     </p:spTree>
   </p:cSld>
   <p:clrMap bg1="lt1" tx1="dk1" bg2="dk2" tx2="lt2" accent1="accent1" accent2="accent2" accent3="accent3" accent4="accent4" accent5="accent5" accent6="accent6" hlink="hlink" folHlink="folHlink"/>
   <p:notesStyle>
-    <a:lvl1pPr xmlns:a="http://schemas.openxmlformats.org/drawingml/2006/main" marL="0" algn="l" defTabSz="914400" rtl="0" eaLnBrk="1" latinLnBrk="0" hangingPunct="1">
+    <a:lvl1pPr marL="0" algn="l" defTabSz="914400" rtl="0" eaLnBrk="1" latinLnBrk="0" hangingPunct="1">
       <a:defRPr sz="1200" kern="1200"/>
     </a:lvl1pPr>
   </p:notesStyle>
 </p:notesMaster>
 </file>
 
-<file path=ppt/notesMasters/theme/theme3.xml><?xml version="1.0" encoding="utf-8"?>
-<a:theme xmlns:a="http://schemas.openxmlformats.org/drawingml/2006/main" name="Simple Light">
-  <a:themeElements>
-    <a:clrScheme name="Simple Light">
-      <a:dk1>
-        <a:srgbClr val="000000"/>
-      </a:dk1>
-      <a:lt1>
-        <a:srgbClr val="FFFFFF"/>
-      </a:lt1>
-      <a:dk2>
-        <a:srgbClr val="595959"/>
-      </a:dk2>
-      <a:lt2>
-        <a:srgbClr val="EEEEEE"/>
-      </a:lt2>
-      <a:accent1>
-        <a:srgbClr val="4285F4"/>
-      </a:accent1>
-      <a:accent2>
-        <a:srgbClr val="212121"/>
-      </a:accent2>
-      <a:accent3>
-        <a:srgbClr val="78909C"/>
-      </a:accent3>
-      <a:accent4>
-        <a:srgbClr val="FFAB40"/>
-      </a:accent4>
-      <a:accent5>
-        <a:srgbClr val="0097A7"/>
-      </a:accent5>
-      <a:accent6>
-        <a:srgbClr val="EEFF41"/>
-      </a:accent6>
-      <a:hlink>
-        <a:srgbClr val="0097A7"/>
-      </a:hlink>
-      <a:folHlink>
-        <a:srgbClr val="0097A7"/>
-      </a:folHlink>
-    </a:clrScheme>
-    <a:fontScheme name="Office">
-      <a:majorFont>
-        <a:latin typeface="Arial"/>
-        <a:ea typeface=""/>
-        <a:cs typeface=""/>
-        <a:font script="Jpan" typeface="ＭＳ Ｐゴシック"/>
-        <a:font script="Hang" typeface="맑은 고딕"/>
-        <a:font script="Hans" typeface="宋体"/>
-        <a:font script="Hant" typeface="新細明體"/>
-        <a:font script="Arab" typeface="Times New Roman"/>
-        <a:font script="Hebr" typeface="Times New Roman"/>
-        <a:font script="Thai" typeface="Angsana New"/>
-        <a:font script="Ethi" typeface="Nyala"/>
-        <a:font script="Beng" typeface="Vrinda"/>
-        <a:font script="Gujr" typeface="Shruti"/>
-        <a:font script="Khmr" typeface="MoolBoran"/>
-        <a:font script="Knda" typeface="Tunga"/>
-        <a:font script="Guru" typeface="Raavi"/>
-        <a:font script="Cans" typeface="Euphemia"/>
-        <a:font script="Cher" typeface="Plantagenet Cherokee"/>
-        <a:font script="Yiii" typeface="Microsoft Yi Baiti"/>
-        <a:font script="Tibt" typeface="Microsoft Himalaya"/>
-        <a:font script="Thaa" typeface="MV Boli"/>
-        <a:font script="Deva" typeface="Mangal"/>
-        <a:font script="Telu" typeface="Gautami"/>
-        <a:font script="Taml" typeface="Latha"/>
-        <a:font script="Syrc" typeface="Estrangelo Edessa"/>
-        <a:font script="Orya" typeface="Kalinga"/>
-        <a:font script="Mlym" typeface="Kartika"/>
-        <a:font script="Laoo" typeface="DokChampa"/>
-        <a:font script="Sinh" typeface="Iskoola Pota"/>
-        <a:font script="Mong" typeface="Mongolian Baiti"/>
-        <a:font script="Viet" typeface="Times New Roman"/>
-        <a:font script="Uigh" typeface="Microsoft Uighur"/>
-        <a:font script="Geor" typeface="Sylfaen"/>
-      </a:majorFont>
-      <a:minorFont>
-        <a:latin typeface="Arial"/>
-        <a:ea typeface=""/>
-        <a:cs typeface=""/>
-        <a:font script="Jpan" typeface="ＭＳ Ｐゴシック"/>
-        <a:font script="Hang" typeface="맑은 고딕"/>
-        <a:font script="Hans" typeface="宋体"/>
-        <a:font script="Hant" typeface="新細明體"/>
-        <a:font script="Arab" typeface="Arial"/>
-        <a:font script="Hebr" typeface="Arial"/>
-        <a:font script="Thai" typeface="Cordia New"/>
-        <a:font script="Ethi" typeface="Nyala"/>
-        <a:font script="Beng" typeface="Vrinda"/>
-        <a:font script="Gujr" typeface="Shruti"/>
-        <a:font script="Khmr" typeface="DaunPenh"/>
-        <a:font script="Knda" typeface="Tunga"/>
-        <a:font script="Guru" typeface="Raavi"/>
-        <a:font script="Cans" typeface="Euphemia"/>
-        <a:font script="Cher" typeface="Plantagenet Cherokee"/>
-        <a:font script="Yiii" typeface="Microsoft Yi Baiti"/>
-        <a:font script="Tibt" typeface="Microsoft Himalaya"/>
-        <a:font script="Thaa" typeface="MV Boli"/>
-        <a:font script="Deva" typeface="Mangal"/>
-        <a:font script="Telu" typeface="Gautami"/>
-        <a:font script="Taml" typeface="Latha"/>
-        <a:font script="Syrc" typeface="Estrangelo Edessa"/>
-        <a:font script="Orya" typeface="Kalinga"/>
-        <a:font script="Mlym" typeface="Kartika"/>
-        <a:font script="Laoo" typeface="DokChampa"/>
-        <a:font script="Sinh" typeface="Iskoola Pota"/>
-        <a:font script="Mong" typeface="Mongolian Baiti"/>
-        <a:font script="Viet" typeface="Arial"/>
-        <a:font script="Uigh" typeface="Microsoft Uighur"/>
-        <a:font script="Geor" typeface="Sylfaen"/>
-      </a:minorFont>
-    </a:fontScheme>
-    <a:fmtScheme name="Simple Light">
-      <a:fillStyleLst>
-        <a:solidFill>
-          <a:schemeClr val="phClr"/>
-        </a:solidFill>
-        <a:gradFill rotWithShape="1">
-          <a:gsLst>
-            <a:gs pos="0">
-              <a:schemeClr val="phClr">
-                <a:tint val="50000"/>
-                <a:satMod val="300000"/>
-              </a:schemeClr>
-            </a:gs>
-            <a:gs pos="35000">
-              <a:schemeClr val="phClr">
-                <a:tint val="37000"/>
-                <a:satMod val="300000"/>
-              </a:schemeClr>
-            </a:gs>
-            <a:gs pos="100000">
-              <a:schemeClr val="phClr">
-                <a:tint val="15000"/>
-                <a:satMod val="350000"/>
-              </a:schemeClr>
-            </a:gs>
-          </a:gsLst>
-          <a:lin ang="16200000" scaled="1"/>
-        </a:gradFill>
-        <a:gradFill rotWithShape="1">
-          <a:gsLst>
-            <a:gs pos="0">
-              <a:schemeClr val="phClr">
-                <a:tint val="100000"/>
-                <a:shade val="100000"/>
-                <a:satMod val="130000"/>
-              </a:schemeClr>
-            </a:gs>
-            <a:gs pos="100000">
-              <a:schemeClr val="phClr">
-                <a:tint val="50000"/>
-                <a:shade val="100000"/>
-                <a:satMod val="350000"/>
-              </a:schemeClr>
-            </a:gs>
-          </a:gsLst>
-          <a:lin ang="16200000" scaled="0"/>
-        </a:gradFill>
-      </a:fillStyleLst>
-      <a:lnStyleLst>
-        <a:ln w="9525">
-          <a:solidFill>
-            <a:schemeClr val="phClr">
-              <a:shade val="95000"/>
-              <a:satMod val="105000"/>
-            </a:schemeClr>
-          </a:solidFill>
-          <a:prstDash val="solid"/>
-        </a:ln>
-        <a:ln w="25400">
-          <a:solidFill>
-            <a:schemeClr val="phClr"/>
-          </a:solidFill>
-          <a:prstDash val="solid"/>
-        </a:ln>
-        <a:ln w="38100">
-          <a:solidFill>
-            <a:schemeClr val="phClr"/>
-          </a:solidFill>
-          <a:prstDash val="solid"/>
-        </a:ln>
-      </a:lnStyleLst>
-      <a:effectStyleLst>
-        <a:effectStyle>
-          <a:effectLst>
-            <a:outerShdw blurRad="40000" dist="20000" dir="5400000" rotWithShape="0">
-              <a:srgbClr val="000000">
-                <a:alpha val="38000"/>
-              </a:srgbClr>
-            </a:outerShdw>
-          </a:effectLst>
-        </a:effectStyle>
-        <a:effectStyle>
-          <a:effectLst>
-            <a:outerShdw blurRad="40000" dist="23000" dir="5400000" rotWithShape="0">
-              <a:srgbClr val="000000">
-                <a:alpha val="35000"/>
-              </a:srgbClr>
-            </a:outerShdw>
-          </a:effectLst>
-        </a:effectStyle>
-        <a:effectStyle>
-          <a:effectLst>
-            <a:outerShdw blurRad="40000" dist="23000" dir="5400000" rotWithShape="0">
-              <a:srgbClr val="000000">
-                <a:alpha val="35000"/>
-              </a:srgbClr>
-            </a:outerShdw>
-          </a:effectLst>
-        </a:effectStyle>
-      </a:effectStyleLst>
-      <a:bgFillStyleLst>
-        <a:solidFill>
-          <a:schemeClr val="phClr"/>
-        </a:solidFill>
-        <a:gradFill rotWithShape="1">
-          <a:gsLst>
-            <a:gs pos="0">
-              <a:schemeClr val="phClr">
-                <a:tint val="40000"/>
-                <a:satMod val="350000"/>
-              </a:schemeClr>
-            </a:gs>
-            <a:gs pos="40000">
-              <a:schemeClr val="phClr">
-                <a:tint val="45000"/>
-                <a:shade val="99000"/>
-                <a:satMod val="350000"/>
-              </a:schemeClr>
-            </a:gs>
-            <a:gs pos="100000">
-              <a:schemeClr val="phClr">
-                <a:shade val="20000"/>
-                <a:satMod val="255000"/>
-              </a:schemeClr>
-            </a:gs>
-          </a:gsLst>
-          <a:path path="circle">
-            <a:fillToRect l="50000" t="-80000" r="50000" b="180000"/>
-          </a:path>
-        </a:gradFill>
-        <a:gradFill rotWithShape="1">
-          <a:gsLst>
-            <a:gs pos="0">
-              <a:schemeClr val="phClr">
-                <a:tint val="80000"/>
-                <a:satMod val="300000"/>
-              </a:schemeClr>
-            </a:gs>
-            <a:gs pos="100000">
-              <a:schemeClr val="phClr">
-                <a:shade val="30000"/>
-                <a:satMod val="200000"/>
-              </a:schemeClr>
-            </a:gs>
-          </a:gsLst>
-          <a:path path="circle">
-            <a:fillToRect l="50000" t="50000" r="50000" b="50000"/>
-          </a:path>
-        </a:gradFill>
-      </a:bgFillStyleLst>
-    </a:fmtScheme>
-  </a:themeElements>
-</a:theme>
-</file>
-
 <file path=ppt/notesSlides/notesSlide1.xml><?xml version="1.0" encoding="utf-8"?>
-<p:notes xmlns:p="http://schemas.openxmlformats.org/presentationml/2006/main">
+<p:notes xmlns:a="http://schemas.openxmlformats.org/drawingml/2006/main" xmlns:r="http://schemas.openxmlformats.org/officeDocument/2006/relationships" xmlns:p="http://schemas.openxmlformats.org/presentationml/2006/main">
   <p:cSld>
     <p:spTree>
       <p:nvGrpSpPr>
@@ -455,16 +316,21 @@
         <p:nvPr/>
       </p:nvGrpSpPr>
       <p:grpSpPr>
-        <a:xfrm xmlns:a="http://schemas.openxmlformats.org/drawingml/2006/main"/>
+        <a:xfrm>
+          <a:off x="0" y="0"/>
+          <a:ext cx="0" cy="0"/>
+          <a:chOff x="0" y="0"/>
+          <a:chExt cx="0" cy="0"/>
+        </a:xfrm>
       </p:grpSpPr>
       <p:sp>
         <p:nvSpPr>
           <p:cNvPr id="2" name="Slide Image Placeholder 1"/>
           <p:cNvSpPr>
-            <a:spLocks xmlns:a="http://schemas.openxmlformats.org/drawingml/2006/main" noGrp="1"/>
+            <a:spLocks noGrp="1" noRot="1" noChangeAspect="1"/>
           </p:cNvSpPr>
           <p:nvPr>
-            <p:ph type="sldImg" idx="0"/>
+            <p:ph type="sldImg"/>
           </p:nvPr>
         </p:nvSpPr>
         <p:spPr/>
@@ -473,7 +339,7 @@
         <p:nvSpPr>
           <p:cNvPr id="3" name="Notes Placeholder 2"/>
           <p:cNvSpPr>
-            <a:spLocks xmlns:a="http://schemas.openxmlformats.org/drawingml/2006/main" noGrp="1"/>
+            <a:spLocks noGrp="1"/>
           </p:cNvSpPr>
           <p:nvPr>
             <p:ph type="body" idx="1"/>
@@ -481,9 +347,9 @@
         </p:nvSpPr>
         <p:spPr/>
         <p:txBody>
-          <a:bodyPr xmlns:a="http://schemas.openxmlformats.org/drawingml/2006/main"/>
-          <a:lstStyle xmlns:a="http://schemas.openxmlformats.org/drawingml/2006/main"/>
-          <a:p xmlns:a="http://schemas.openxmlformats.org/drawingml/2006/main">
+          <a:bodyPr/>
+          <a:lstStyle/>
+          <a:p>
             <a:pPr marL="0" lvl="0" indent="0" algn="l">
               <a:lnSpc>
                 <a:spcPct val="100000"/>
@@ -500,9 +366,8 @@
             <a:r>
               <a:t>[Sources]</a:t>
             </a:r>
-            <a:endParaRPr/>
-          </a:p>
-          <a:p xmlns:a="http://schemas.openxmlformats.org/drawingml/2006/main">
+          </a:p>
+          <a:p>
             <a:pPr marL="0" lvl="0" indent="0" algn="l">
               <a:lnSpc>
                 <a:spcPct val="100000"/>
@@ -519,9 +384,8 @@
             <a:r>
               <a:t>- reports/tables/indicateurs_cles.json</a:t>
             </a:r>
-            <a:endParaRPr/>
-          </a:p>
-          <a:p xmlns:a="http://schemas.openxmlformats.org/drawingml/2006/main">
+          </a:p>
+          <a:p>
             <a:pPr marL="0" lvl="0" indent="0" algn="l">
               <a:lnSpc>
                 <a:spcPct val="100000"/>
@@ -538,7 +402,6 @@
             <a:r>
               <a:t>- docs/limites_biais.md</a:t>
             </a:r>
-            <a:endParaRPr/>
           </a:p>
         </p:txBody>
       </p:sp>
@@ -546,7 +409,7 @@
         <p:nvSpPr>
           <p:cNvPr id="4" name="Slide Number Placeholder 3"/>
           <p:cNvSpPr>
-            <a:spLocks xmlns:a="http://schemas.openxmlformats.org/drawingml/2006/main" noGrp="1"/>
+            <a:spLocks noGrp="1"/>
           </p:cNvSpPr>
           <p:nvPr>
             <p:ph type="sldNum" idx="5"/>
@@ -554,21 +417,23 @@
         </p:nvSpPr>
         <p:spPr/>
         <p:txBody>
-          <a:bodyPr xmlns:a="http://schemas.openxmlformats.org/drawingml/2006/main"/>
-          <a:lstStyle xmlns:a="http://schemas.openxmlformats.org/drawingml/2006/main"/>
-          <a:p xmlns:a="http://schemas.openxmlformats.org/drawingml/2006/main"/>
+          <a:bodyPr/>
+          <a:lstStyle/>
+          <a:p>
+            <a:endParaRPr/>
+          </a:p>
         </p:txBody>
       </p:sp>
     </p:spTree>
   </p:cSld>
   <p:clrMapOvr>
-    <a:masterClrMapping xmlns:a="http://schemas.openxmlformats.org/drawingml/2006/main"/>
+    <a:masterClrMapping/>
   </p:clrMapOvr>
 </p:notes>
 </file>
 
 <file path=ppt/notesSlides/notesSlide10.xml><?xml version="1.0" encoding="utf-8"?>
-<p:notes xmlns:p="http://schemas.openxmlformats.org/presentationml/2006/main">
+<p:notes xmlns:a="http://schemas.openxmlformats.org/drawingml/2006/main" xmlns:r="http://schemas.openxmlformats.org/officeDocument/2006/relationships" xmlns:p="http://schemas.openxmlformats.org/presentationml/2006/main">
   <p:cSld>
     <p:spTree>
       <p:nvGrpSpPr>
@@ -577,16 +442,21 @@
         <p:nvPr/>
       </p:nvGrpSpPr>
       <p:grpSpPr>
-        <a:xfrm xmlns:a="http://schemas.openxmlformats.org/drawingml/2006/main"/>
+        <a:xfrm>
+          <a:off x="0" y="0"/>
+          <a:ext cx="0" cy="0"/>
+          <a:chOff x="0" y="0"/>
+          <a:chExt cx="0" cy="0"/>
+        </a:xfrm>
       </p:grpSpPr>
       <p:sp>
         <p:nvSpPr>
           <p:cNvPr id="2" name="Slide Image Placeholder 1"/>
           <p:cNvSpPr>
-            <a:spLocks xmlns:a="http://schemas.openxmlformats.org/drawingml/2006/main" noGrp="1"/>
+            <a:spLocks noGrp="1" noRot="1" noChangeAspect="1"/>
           </p:cNvSpPr>
           <p:nvPr>
-            <p:ph type="sldImg" idx="0"/>
+            <p:ph type="sldImg"/>
           </p:nvPr>
         </p:nvSpPr>
         <p:spPr/>
@@ -595,7 +465,7 @@
         <p:nvSpPr>
           <p:cNvPr id="3" name="Notes Placeholder 2"/>
           <p:cNvSpPr>
-            <a:spLocks xmlns:a="http://schemas.openxmlformats.org/drawingml/2006/main" noGrp="1"/>
+            <a:spLocks noGrp="1"/>
           </p:cNvSpPr>
           <p:nvPr>
             <p:ph type="body" idx="1"/>
@@ -603,29 +473,29 @@
         </p:nvSpPr>
         <p:spPr/>
         <p:txBody>
-          <a:bodyPr xmlns:a="http://schemas.openxmlformats.org/drawingml/2006/main"/>
-          <a:lstStyle xmlns:a="http://schemas.openxmlformats.org/drawingml/2006/main"/>
-          <a:p xmlns:a="http://schemas.openxmlformats.org/drawingml/2006/main">
+          <a:bodyPr/>
+          <a:lstStyle/>
+          <a:p>
             <a:r>
               <a:t>[Sources]</a:t>
             </a:r>
           </a:p>
-          <a:p xmlns:a="http://schemas.openxmlformats.org/drawingml/2006/main">
+          <a:p>
             <a:r>
               <a:t>- reports/tables/indicateurs_cles.json</a:t>
             </a:r>
           </a:p>
-          <a:p xmlns:a="http://schemas.openxmlformats.org/drawingml/2006/main">
+          <a:p>
             <a:r>
               <a:t>- reports/tables/registre_qualite.csv</a:t>
             </a:r>
           </a:p>
-          <a:p xmlns:a="http://schemas.openxmlformats.org/drawingml/2006/main">
+          <a:p>
             <a:r>
               <a:t>- reports/figures/06_marge_ponderee_type.png</a:t>
             </a:r>
           </a:p>
-          <a:p xmlns:a="http://schemas.openxmlformats.org/drawingml/2006/main">
+          <a:p>
             <a:r>
               <a:t>- docs/limites_biais.md</a:t>
             </a:r>
@@ -636,7 +506,7 @@
         <p:nvSpPr>
           <p:cNvPr id="4" name="Slide Number Placeholder 3"/>
           <p:cNvSpPr>
-            <a:spLocks xmlns:a="http://schemas.openxmlformats.org/drawingml/2006/main" noGrp="1"/>
+            <a:spLocks noGrp="1"/>
           </p:cNvSpPr>
           <p:nvPr>
             <p:ph type="sldNum" idx="5"/>
@@ -644,21 +514,23 @@
         </p:nvSpPr>
         <p:spPr/>
         <p:txBody>
-          <a:bodyPr xmlns:a="http://schemas.openxmlformats.org/drawingml/2006/main"/>
-          <a:lstStyle xmlns:a="http://schemas.openxmlformats.org/drawingml/2006/main"/>
-          <a:p xmlns:a="http://schemas.openxmlformats.org/drawingml/2006/main"/>
+          <a:bodyPr/>
+          <a:lstStyle/>
+          <a:p>
+            <a:endParaRPr/>
+          </a:p>
         </p:txBody>
       </p:sp>
     </p:spTree>
   </p:cSld>
   <p:clrMapOvr>
-    <a:masterClrMapping xmlns:a="http://schemas.openxmlformats.org/drawingml/2006/main"/>
+    <a:masterClrMapping/>
   </p:clrMapOvr>
 </p:notes>
 </file>
 
 <file path=ppt/notesSlides/notesSlide11.xml><?xml version="1.0" encoding="utf-8"?>
-<p:notes xmlns:p="http://schemas.openxmlformats.org/presentationml/2006/main">
+<p:notes xmlns:a="http://schemas.openxmlformats.org/drawingml/2006/main" xmlns:r="http://schemas.openxmlformats.org/officeDocument/2006/relationships" xmlns:p="http://schemas.openxmlformats.org/presentationml/2006/main">
   <p:cSld>
     <p:spTree>
       <p:nvGrpSpPr>
@@ -667,16 +539,21 @@
         <p:nvPr/>
       </p:nvGrpSpPr>
       <p:grpSpPr>
-        <a:xfrm xmlns:a="http://schemas.openxmlformats.org/drawingml/2006/main"/>
+        <a:xfrm>
+          <a:off x="0" y="0"/>
+          <a:ext cx="0" cy="0"/>
+          <a:chOff x="0" y="0"/>
+          <a:chExt cx="0" cy="0"/>
+        </a:xfrm>
       </p:grpSpPr>
       <p:sp>
         <p:nvSpPr>
           <p:cNvPr id="2" name="Slide Image Placeholder 1"/>
           <p:cNvSpPr>
-            <a:spLocks xmlns:a="http://schemas.openxmlformats.org/drawingml/2006/main" noGrp="1"/>
+            <a:spLocks noGrp="1" noRot="1" noChangeAspect="1"/>
           </p:cNvSpPr>
           <p:nvPr>
-            <p:ph type="sldImg" idx="0"/>
+            <p:ph type="sldImg"/>
           </p:nvPr>
         </p:nvSpPr>
         <p:spPr/>
@@ -685,7 +562,7 @@
         <p:nvSpPr>
           <p:cNvPr id="3" name="Notes Placeholder 2"/>
           <p:cNvSpPr>
-            <a:spLocks xmlns:a="http://schemas.openxmlformats.org/drawingml/2006/main" noGrp="1"/>
+            <a:spLocks noGrp="1"/>
           </p:cNvSpPr>
           <p:nvPr>
             <p:ph type="body" idx="1"/>
@@ -693,24 +570,24 @@
         </p:nvSpPr>
         <p:spPr/>
         <p:txBody>
-          <a:bodyPr xmlns:a="http://schemas.openxmlformats.org/drawingml/2006/main"/>
-          <a:lstStyle xmlns:a="http://schemas.openxmlformats.org/drawingml/2006/main"/>
-          <a:p xmlns:a="http://schemas.openxmlformats.org/drawingml/2006/main">
+          <a:bodyPr/>
+          <a:lstStyle/>
+          <a:p>
             <a:r>
               <a:t>[Sources]</a:t>
             </a:r>
           </a:p>
-          <a:p xmlns:a="http://schemas.openxmlformats.org/drawingml/2006/main">
+          <a:p>
             <a:r>
               <a:t>- reports/tables/indicateurs_cles.json</a:t>
             </a:r>
           </a:p>
-          <a:p xmlns:a="http://schemas.openxmlformats.org/drawingml/2006/main">
+          <a:p>
             <a:r>
               <a:t>- reports/figures/11_prix_vs_ventes_octobre.png</a:t>
             </a:r>
           </a:p>
-          <a:p xmlns:a="http://schemas.openxmlformats.org/drawingml/2006/main">
+          <a:p>
             <a:r>
               <a:t>- docs/limites_biais.md</a:t>
             </a:r>
@@ -721,7 +598,7 @@
         <p:nvSpPr>
           <p:cNvPr id="4" name="Slide Number Placeholder 3"/>
           <p:cNvSpPr>
-            <a:spLocks xmlns:a="http://schemas.openxmlformats.org/drawingml/2006/main" noGrp="1"/>
+            <a:spLocks noGrp="1"/>
           </p:cNvSpPr>
           <p:nvPr>
             <p:ph type="sldNum" idx="5"/>
@@ -729,21 +606,23 @@
         </p:nvSpPr>
         <p:spPr/>
         <p:txBody>
-          <a:bodyPr xmlns:a="http://schemas.openxmlformats.org/drawingml/2006/main"/>
-          <a:lstStyle xmlns:a="http://schemas.openxmlformats.org/drawingml/2006/main"/>
-          <a:p xmlns:a="http://schemas.openxmlformats.org/drawingml/2006/main"/>
+          <a:bodyPr/>
+          <a:lstStyle/>
+          <a:p>
+            <a:endParaRPr/>
+          </a:p>
         </p:txBody>
       </p:sp>
     </p:spTree>
   </p:cSld>
   <p:clrMapOvr>
-    <a:masterClrMapping xmlns:a="http://schemas.openxmlformats.org/drawingml/2006/main"/>
+    <a:masterClrMapping/>
   </p:clrMapOvr>
 </p:notes>
 </file>
 
 <file path=ppt/notesSlides/notesSlide12.xml><?xml version="1.0" encoding="utf-8"?>
-<p:notes xmlns:p="http://schemas.openxmlformats.org/presentationml/2006/main">
+<p:notes xmlns:a="http://schemas.openxmlformats.org/drawingml/2006/main" xmlns:r="http://schemas.openxmlformats.org/officeDocument/2006/relationships" xmlns:p="http://schemas.openxmlformats.org/presentationml/2006/main">
   <p:cSld>
     <p:spTree>
       <p:nvGrpSpPr>
@@ -752,16 +631,21 @@
         <p:nvPr/>
       </p:nvGrpSpPr>
       <p:grpSpPr>
-        <a:xfrm xmlns:a="http://schemas.openxmlformats.org/drawingml/2006/main"/>
+        <a:xfrm>
+          <a:off x="0" y="0"/>
+          <a:ext cx="0" cy="0"/>
+          <a:chOff x="0" y="0"/>
+          <a:chExt cx="0" cy="0"/>
+        </a:xfrm>
       </p:grpSpPr>
       <p:sp>
         <p:nvSpPr>
           <p:cNvPr id="2" name="Slide Image Placeholder 1"/>
           <p:cNvSpPr>
-            <a:spLocks xmlns:a="http://schemas.openxmlformats.org/drawingml/2006/main" noGrp="1"/>
+            <a:spLocks noGrp="1" noRot="1" noChangeAspect="1"/>
           </p:cNvSpPr>
           <p:nvPr>
-            <p:ph type="sldImg" idx="0"/>
+            <p:ph type="sldImg"/>
           </p:nvPr>
         </p:nvSpPr>
         <p:spPr/>
@@ -770,7 +654,7 @@
         <p:nvSpPr>
           <p:cNvPr id="3" name="Notes Placeholder 2"/>
           <p:cNvSpPr>
-            <a:spLocks xmlns:a="http://schemas.openxmlformats.org/drawingml/2006/main" noGrp="1"/>
+            <a:spLocks noGrp="1"/>
           </p:cNvSpPr>
           <p:nvPr>
             <p:ph type="body" idx="1"/>
@@ -778,9 +662,9 @@
         </p:nvSpPr>
         <p:spPr/>
         <p:txBody>
-          <a:bodyPr xmlns:a="http://schemas.openxmlformats.org/drawingml/2006/main"/>
-          <a:lstStyle xmlns:a="http://schemas.openxmlformats.org/drawingml/2006/main"/>
-          <a:p xmlns:a="http://schemas.openxmlformats.org/drawingml/2006/main">
+          <a:bodyPr/>
+          <a:lstStyle/>
+          <a:p>
             <a:pPr marL="0" lvl="0" indent="0" algn="l">
               <a:lnSpc>
                 <a:spcPct val="100000"/>
@@ -797,9 +681,8 @@
             <a:r>
               <a:t>[Sources]</a:t>
             </a:r>
-            <a:endParaRPr/>
-          </a:p>
-          <a:p xmlns:a="http://schemas.openxmlformats.org/drawingml/2006/main">
+          </a:p>
+          <a:p>
             <a:pPr marL="0" lvl="0" indent="0" algn="l">
               <a:lnSpc>
                 <a:spcPct val="100000"/>
@@ -816,9 +699,8 @@
             <a:r>
               <a:t>- docs/synthese_codir.md</a:t>
             </a:r>
-            <a:endParaRPr/>
-          </a:p>
-          <a:p xmlns:a="http://schemas.openxmlformats.org/drawingml/2006/main">
+          </a:p>
+          <a:p>
             <a:pPr marL="0" lvl="0" indent="0" algn="l">
               <a:lnSpc>
                 <a:spcPct val="100000"/>
@@ -835,9 +717,8 @@
             <a:r>
               <a:t>- docs/backlog_planning_risques.md</a:t>
             </a:r>
-            <a:endParaRPr/>
-          </a:p>
-          <a:p xmlns:a="http://schemas.openxmlformats.org/drawingml/2006/main">
+          </a:p>
+          <a:p>
             <a:pPr marL="0" lvl="0" indent="0" algn="l">
               <a:lnSpc>
                 <a:spcPct val="100000"/>
@@ -854,7 +735,6 @@
             <a:r>
               <a:t>- reports/tables/registre_qualite.csv</a:t>
             </a:r>
-            <a:endParaRPr/>
           </a:p>
         </p:txBody>
       </p:sp>
@@ -862,7 +742,7 @@
         <p:nvSpPr>
           <p:cNvPr id="4" name="Slide Number Placeholder 3"/>
           <p:cNvSpPr>
-            <a:spLocks xmlns:a="http://schemas.openxmlformats.org/drawingml/2006/main" noGrp="1"/>
+            <a:spLocks noGrp="1"/>
           </p:cNvSpPr>
           <p:nvPr>
             <p:ph type="sldNum" idx="5"/>
@@ -870,21 +750,23 @@
         </p:nvSpPr>
         <p:spPr/>
         <p:txBody>
-          <a:bodyPr xmlns:a="http://schemas.openxmlformats.org/drawingml/2006/main"/>
-          <a:lstStyle xmlns:a="http://schemas.openxmlformats.org/drawingml/2006/main"/>
-          <a:p xmlns:a="http://schemas.openxmlformats.org/drawingml/2006/main"/>
+          <a:bodyPr/>
+          <a:lstStyle/>
+          <a:p>
+            <a:endParaRPr/>
+          </a:p>
         </p:txBody>
       </p:sp>
     </p:spTree>
   </p:cSld>
   <p:clrMapOvr>
-    <a:masterClrMapping xmlns:a="http://schemas.openxmlformats.org/drawingml/2006/main"/>
+    <a:masterClrMapping/>
   </p:clrMapOvr>
 </p:notes>
 </file>
 
 <file path=ppt/notesSlides/notesSlide2.xml><?xml version="1.0" encoding="utf-8"?>
-<p:notes xmlns:p="http://schemas.openxmlformats.org/presentationml/2006/main">
+<p:notes xmlns:a="http://schemas.openxmlformats.org/drawingml/2006/main" xmlns:r="http://schemas.openxmlformats.org/officeDocument/2006/relationships" xmlns:p="http://schemas.openxmlformats.org/presentationml/2006/main">
   <p:cSld>
     <p:spTree>
       <p:nvGrpSpPr>
@@ -893,16 +775,21 @@
         <p:nvPr/>
       </p:nvGrpSpPr>
       <p:grpSpPr>
-        <a:xfrm xmlns:a="http://schemas.openxmlformats.org/drawingml/2006/main"/>
+        <a:xfrm>
+          <a:off x="0" y="0"/>
+          <a:ext cx="0" cy="0"/>
+          <a:chOff x="0" y="0"/>
+          <a:chExt cx="0" cy="0"/>
+        </a:xfrm>
       </p:grpSpPr>
       <p:sp>
         <p:nvSpPr>
           <p:cNvPr id="2" name="Slide Image Placeholder 1"/>
           <p:cNvSpPr>
-            <a:spLocks xmlns:a="http://schemas.openxmlformats.org/drawingml/2006/main" noGrp="1"/>
+            <a:spLocks noGrp="1" noRot="1" noChangeAspect="1"/>
           </p:cNvSpPr>
           <p:nvPr>
-            <p:ph type="sldImg" idx="0"/>
+            <p:ph type="sldImg"/>
           </p:nvPr>
         </p:nvSpPr>
         <p:spPr/>
@@ -911,7 +798,7 @@
         <p:nvSpPr>
           <p:cNvPr id="3" name="Notes Placeholder 2"/>
           <p:cNvSpPr>
-            <a:spLocks xmlns:a="http://schemas.openxmlformats.org/drawingml/2006/main" noGrp="1"/>
+            <a:spLocks noGrp="1"/>
           </p:cNvSpPr>
           <p:nvPr>
             <p:ph type="body" idx="1"/>
@@ -919,9 +806,9 @@
         </p:nvSpPr>
         <p:spPr/>
         <p:txBody>
-          <a:bodyPr xmlns:a="http://schemas.openxmlformats.org/drawingml/2006/main"/>
-          <a:lstStyle xmlns:a="http://schemas.openxmlformats.org/drawingml/2006/main"/>
-          <a:p xmlns:a="http://schemas.openxmlformats.org/drawingml/2006/main">
+          <a:bodyPr/>
+          <a:lstStyle/>
+          <a:p>
             <a:pPr marL="0" lvl="0" indent="0" algn="l">
               <a:lnSpc>
                 <a:spcPct val="100000"/>
@@ -938,9 +825,8 @@
             <a:r>
               <a:t>[Sources]</a:t>
             </a:r>
-            <a:endParaRPr/>
-          </a:p>
-          <a:p xmlns:a="http://schemas.openxmlformats.org/drawingml/2006/main">
+          </a:p>
+          <a:p>
             <a:pPr marL="0" lvl="0" indent="0" algn="l">
               <a:lnSpc>
                 <a:spcPct val="100000"/>
@@ -957,9 +843,8 @@
             <a:r>
               <a:t>- reports/tables/indicateurs_cles.json</a:t>
             </a:r>
-            <a:endParaRPr/>
-          </a:p>
-          <a:p xmlns:a="http://schemas.openxmlformats.org/drawingml/2006/main">
+          </a:p>
+          <a:p>
             <a:pPr marL="0" lvl="0" indent="0" algn="l">
               <a:lnSpc>
                 <a:spcPct val="100000"/>
@@ -976,9 +861,8 @@
             <a:r>
               <a:t>- reports/tables/registre_qualite.csv</a:t>
             </a:r>
-            <a:endParaRPr/>
-          </a:p>
-          <a:p xmlns:a="http://schemas.openxmlformats.org/drawingml/2006/main">
+          </a:p>
+          <a:p>
             <a:pPr marL="0" lvl="0" indent="0" algn="l">
               <a:lnSpc>
                 <a:spcPct val="100000"/>
@@ -995,7 +879,6 @@
             <a:r>
               <a:t>- docs/synthese_codir.md</a:t>
             </a:r>
-            <a:endParaRPr/>
           </a:p>
         </p:txBody>
       </p:sp>
@@ -1003,7 +886,7 @@
         <p:nvSpPr>
           <p:cNvPr id="4" name="Slide Number Placeholder 3"/>
           <p:cNvSpPr>
-            <a:spLocks xmlns:a="http://schemas.openxmlformats.org/drawingml/2006/main" noGrp="1"/>
+            <a:spLocks noGrp="1"/>
           </p:cNvSpPr>
           <p:nvPr>
             <p:ph type="sldNum" idx="5"/>
@@ -1011,21 +894,23 @@
         </p:nvSpPr>
         <p:spPr/>
         <p:txBody>
-          <a:bodyPr xmlns:a="http://schemas.openxmlformats.org/drawingml/2006/main"/>
-          <a:lstStyle xmlns:a="http://schemas.openxmlformats.org/drawingml/2006/main"/>
-          <a:p xmlns:a="http://schemas.openxmlformats.org/drawingml/2006/main"/>
+          <a:bodyPr/>
+          <a:lstStyle/>
+          <a:p>
+            <a:endParaRPr/>
+          </a:p>
         </p:txBody>
       </p:sp>
     </p:spTree>
   </p:cSld>
   <p:clrMapOvr>
-    <a:masterClrMapping xmlns:a="http://schemas.openxmlformats.org/drawingml/2006/main"/>
+    <a:masterClrMapping/>
   </p:clrMapOvr>
 </p:notes>
 </file>
 
 <file path=ppt/notesSlides/notesSlide3.xml><?xml version="1.0" encoding="utf-8"?>
-<p:notes xmlns:p="http://schemas.openxmlformats.org/presentationml/2006/main">
+<p:notes xmlns:a="http://schemas.openxmlformats.org/drawingml/2006/main" xmlns:r="http://schemas.openxmlformats.org/officeDocument/2006/relationships" xmlns:p="http://schemas.openxmlformats.org/presentationml/2006/main">
   <p:cSld>
     <p:spTree>
       <p:nvGrpSpPr>
@@ -1034,16 +919,21 @@
         <p:nvPr/>
       </p:nvGrpSpPr>
       <p:grpSpPr>
-        <a:xfrm xmlns:a="http://schemas.openxmlformats.org/drawingml/2006/main"/>
+        <a:xfrm>
+          <a:off x="0" y="0"/>
+          <a:ext cx="0" cy="0"/>
+          <a:chOff x="0" y="0"/>
+          <a:chExt cx="0" cy="0"/>
+        </a:xfrm>
       </p:grpSpPr>
       <p:sp>
         <p:nvSpPr>
           <p:cNvPr id="2" name="Slide Image Placeholder 1"/>
           <p:cNvSpPr>
-            <a:spLocks xmlns:a="http://schemas.openxmlformats.org/drawingml/2006/main" noGrp="1"/>
+            <a:spLocks noGrp="1" noRot="1" noChangeAspect="1"/>
           </p:cNvSpPr>
           <p:nvPr>
-            <p:ph type="sldImg" idx="0"/>
+            <p:ph type="sldImg"/>
           </p:nvPr>
         </p:nvSpPr>
         <p:spPr/>
@@ -1052,7 +942,7 @@
         <p:nvSpPr>
           <p:cNvPr id="3" name="Notes Placeholder 2"/>
           <p:cNvSpPr>
-            <a:spLocks xmlns:a="http://schemas.openxmlformats.org/drawingml/2006/main" noGrp="1"/>
+            <a:spLocks noGrp="1"/>
           </p:cNvSpPr>
           <p:nvPr>
             <p:ph type="body" idx="1"/>
@@ -1060,24 +950,24 @@
         </p:nvSpPr>
         <p:spPr/>
         <p:txBody>
-          <a:bodyPr xmlns:a="http://schemas.openxmlformats.org/drawingml/2006/main"/>
-          <a:lstStyle xmlns:a="http://schemas.openxmlformats.org/drawingml/2006/main"/>
-          <a:p xmlns:a="http://schemas.openxmlformats.org/drawingml/2006/main">
+          <a:bodyPr/>
+          <a:lstStyle/>
+          <a:p>
             <a:r>
               <a:t>[Sources]</a:t>
             </a:r>
           </a:p>
-          <a:p xmlns:a="http://schemas.openxmlformats.org/drawingml/2006/main">
+          <a:p>
             <a:r>
               <a:t>- reports/tables/audit_jointures.csv</a:t>
             </a:r>
           </a:p>
-          <a:p xmlns:a="http://schemas.openxmlformats.org/drawingml/2006/main">
+          <a:p>
             <a:r>
               <a:t>- reports/figures/01_rapprochement_sources.png</a:t>
             </a:r>
           </a:p>
-          <a:p xmlns:a="http://schemas.openxmlformats.org/drawingml/2006/main">
+          <a:p>
             <a:r>
               <a:t>- docs/limites_biais.md</a:t>
             </a:r>
@@ -1088,7 +978,7 @@
         <p:nvSpPr>
           <p:cNvPr id="4" name="Slide Number Placeholder 3"/>
           <p:cNvSpPr>
-            <a:spLocks xmlns:a="http://schemas.openxmlformats.org/drawingml/2006/main" noGrp="1"/>
+            <a:spLocks noGrp="1"/>
           </p:cNvSpPr>
           <p:nvPr>
             <p:ph type="sldNum" idx="5"/>
@@ -1096,21 +986,23 @@
         </p:nvSpPr>
         <p:spPr/>
         <p:txBody>
-          <a:bodyPr xmlns:a="http://schemas.openxmlformats.org/drawingml/2006/main"/>
-          <a:lstStyle xmlns:a="http://schemas.openxmlformats.org/drawingml/2006/main"/>
-          <a:p xmlns:a="http://schemas.openxmlformats.org/drawingml/2006/main"/>
+          <a:bodyPr/>
+          <a:lstStyle/>
+          <a:p>
+            <a:endParaRPr/>
+          </a:p>
         </p:txBody>
       </p:sp>
     </p:spTree>
   </p:cSld>
   <p:clrMapOvr>
-    <a:masterClrMapping xmlns:a="http://schemas.openxmlformats.org/drawingml/2006/main"/>
+    <a:masterClrMapping/>
   </p:clrMapOvr>
 </p:notes>
 </file>
 
 <file path=ppt/notesSlides/notesSlide4.xml><?xml version="1.0" encoding="utf-8"?>
-<p:notes xmlns:p="http://schemas.openxmlformats.org/presentationml/2006/main">
+<p:notes xmlns:a="http://schemas.openxmlformats.org/drawingml/2006/main" xmlns:r="http://schemas.openxmlformats.org/officeDocument/2006/relationships" xmlns:p="http://schemas.openxmlformats.org/presentationml/2006/main">
   <p:cSld>
     <p:spTree>
       <p:nvGrpSpPr>
@@ -1119,16 +1011,21 @@
         <p:nvPr/>
       </p:nvGrpSpPr>
       <p:grpSpPr>
-        <a:xfrm xmlns:a="http://schemas.openxmlformats.org/drawingml/2006/main"/>
+        <a:xfrm>
+          <a:off x="0" y="0"/>
+          <a:ext cx="0" cy="0"/>
+          <a:chOff x="0" y="0"/>
+          <a:chExt cx="0" cy="0"/>
+        </a:xfrm>
       </p:grpSpPr>
       <p:sp>
         <p:nvSpPr>
           <p:cNvPr id="2" name="Slide Image Placeholder 1"/>
           <p:cNvSpPr>
-            <a:spLocks xmlns:a="http://schemas.openxmlformats.org/drawingml/2006/main" noGrp="1"/>
+            <a:spLocks noGrp="1" noRot="1" noChangeAspect="1"/>
           </p:cNvSpPr>
           <p:nvPr>
-            <p:ph type="sldImg" idx="0"/>
+            <p:ph type="sldImg"/>
           </p:nvPr>
         </p:nvSpPr>
         <p:spPr/>
@@ -1137,7 +1034,7 @@
         <p:nvSpPr>
           <p:cNvPr id="3" name="Notes Placeholder 2"/>
           <p:cNvSpPr>
-            <a:spLocks xmlns:a="http://schemas.openxmlformats.org/drawingml/2006/main" noGrp="1"/>
+            <a:spLocks noGrp="1"/>
           </p:cNvSpPr>
           <p:nvPr>
             <p:ph type="body" idx="1"/>
@@ -1145,19 +1042,19 @@
         </p:nvSpPr>
         <p:spPr/>
         <p:txBody>
-          <a:bodyPr xmlns:a="http://schemas.openxmlformats.org/drawingml/2006/main"/>
-          <a:lstStyle xmlns:a="http://schemas.openxmlformats.org/drawingml/2006/main"/>
-          <a:p xmlns:a="http://schemas.openxmlformats.org/drawingml/2006/main">
+          <a:bodyPr/>
+          <a:lstStyle/>
+          <a:p>
             <a:r>
               <a:t>[Sources]</a:t>
             </a:r>
           </a:p>
-          <a:p xmlns:a="http://schemas.openxmlformats.org/drawingml/2006/main">
+          <a:p>
             <a:r>
               <a:t>- reports/tables/indicateurs_cles.json</a:t>
             </a:r>
           </a:p>
-          <a:p xmlns:a="http://schemas.openxmlformats.org/drawingml/2006/main">
+          <a:p>
             <a:r>
               <a:t>- docs/limites_biais.md</a:t>
             </a:r>
@@ -1168,7 +1065,7 @@
         <p:nvSpPr>
           <p:cNvPr id="4" name="Slide Number Placeholder 3"/>
           <p:cNvSpPr>
-            <a:spLocks xmlns:a="http://schemas.openxmlformats.org/drawingml/2006/main" noGrp="1"/>
+            <a:spLocks noGrp="1"/>
           </p:cNvSpPr>
           <p:nvPr>
             <p:ph type="sldNum" idx="5"/>
@@ -1176,21 +1073,23 @@
         </p:nvSpPr>
         <p:spPr/>
         <p:txBody>
-          <a:bodyPr xmlns:a="http://schemas.openxmlformats.org/drawingml/2006/main"/>
-          <a:lstStyle xmlns:a="http://schemas.openxmlformats.org/drawingml/2006/main"/>
-          <a:p xmlns:a="http://schemas.openxmlformats.org/drawingml/2006/main"/>
+          <a:bodyPr/>
+          <a:lstStyle/>
+          <a:p>
+            <a:endParaRPr/>
+          </a:p>
         </p:txBody>
       </p:sp>
     </p:spTree>
   </p:cSld>
   <p:clrMapOvr>
-    <a:masterClrMapping xmlns:a="http://schemas.openxmlformats.org/drawingml/2006/main"/>
+    <a:masterClrMapping/>
   </p:clrMapOvr>
 </p:notes>
 </file>
 
 <file path=ppt/notesSlides/notesSlide5.xml><?xml version="1.0" encoding="utf-8"?>
-<p:notes xmlns:p="http://schemas.openxmlformats.org/presentationml/2006/main">
+<p:notes xmlns:a="http://schemas.openxmlformats.org/drawingml/2006/main" xmlns:r="http://schemas.openxmlformats.org/officeDocument/2006/relationships" xmlns:p="http://schemas.openxmlformats.org/presentationml/2006/main">
   <p:cSld>
     <p:spTree>
       <p:nvGrpSpPr>
@@ -1199,16 +1098,21 @@
         <p:nvPr/>
       </p:nvGrpSpPr>
       <p:grpSpPr>
-        <a:xfrm xmlns:a="http://schemas.openxmlformats.org/drawingml/2006/main"/>
+        <a:xfrm>
+          <a:off x="0" y="0"/>
+          <a:ext cx="0" cy="0"/>
+          <a:chOff x="0" y="0"/>
+          <a:chExt cx="0" cy="0"/>
+        </a:xfrm>
       </p:grpSpPr>
       <p:sp>
         <p:nvSpPr>
           <p:cNvPr id="2" name="Slide Image Placeholder 1"/>
           <p:cNvSpPr>
-            <a:spLocks xmlns:a="http://schemas.openxmlformats.org/drawingml/2006/main" noGrp="1"/>
+            <a:spLocks noGrp="1" noRot="1" noChangeAspect="1"/>
           </p:cNvSpPr>
           <p:nvPr>
-            <p:ph type="sldImg" idx="0"/>
+            <p:ph type="sldImg"/>
           </p:nvPr>
         </p:nvSpPr>
         <p:spPr/>
@@ -1217,7 +1121,7 @@
         <p:nvSpPr>
           <p:cNvPr id="3" name="Notes Placeholder 2"/>
           <p:cNvSpPr>
-            <a:spLocks xmlns:a="http://schemas.openxmlformats.org/drawingml/2006/main" noGrp="1"/>
+            <a:spLocks noGrp="1"/>
           </p:cNvSpPr>
           <p:nvPr>
             <p:ph type="body" idx="1"/>
@@ -1225,24 +1129,24 @@
         </p:nvSpPr>
         <p:spPr/>
         <p:txBody>
-          <a:bodyPr xmlns:a="http://schemas.openxmlformats.org/drawingml/2006/main"/>
-          <a:lstStyle xmlns:a="http://schemas.openxmlformats.org/drawingml/2006/main"/>
-          <a:p xmlns:a="http://schemas.openxmlformats.org/drawingml/2006/main">
+          <a:bodyPr/>
+          <a:lstStyle/>
+          <a:p>
             <a:r>
               <a:t>[Sources]</a:t>
             </a:r>
           </a:p>
-          <a:p xmlns:a="http://schemas.openxmlformats.org/drawingml/2006/main">
+          <a:p>
             <a:r>
               <a:t>- reports/tables/indicateurs_cles.json</a:t>
             </a:r>
           </a:p>
-          <a:p xmlns:a="http://schemas.openxmlformats.org/drawingml/2006/main">
+          <a:p>
             <a:r>
               <a:t>- reports/tables/top20_ca_octobre.csv</a:t>
             </a:r>
           </a:p>
-          <a:p xmlns:a="http://schemas.openxmlformats.org/drawingml/2006/main">
+          <a:p>
             <a:r>
               <a:t>- reports/figures/02_top10_ca_octobre.png</a:t>
             </a:r>
@@ -1253,7 +1157,7 @@
         <p:nvSpPr>
           <p:cNvPr id="4" name="Slide Number Placeholder 3"/>
           <p:cNvSpPr>
-            <a:spLocks xmlns:a="http://schemas.openxmlformats.org/drawingml/2006/main" noGrp="1"/>
+            <a:spLocks noGrp="1"/>
           </p:cNvSpPr>
           <p:nvPr>
             <p:ph type="sldNum" idx="5"/>
@@ -1261,21 +1165,23 @@
         </p:nvSpPr>
         <p:spPr/>
         <p:txBody>
-          <a:bodyPr xmlns:a="http://schemas.openxmlformats.org/drawingml/2006/main"/>
-          <a:lstStyle xmlns:a="http://schemas.openxmlformats.org/drawingml/2006/main"/>
-          <a:p xmlns:a="http://schemas.openxmlformats.org/drawingml/2006/main"/>
+          <a:bodyPr/>
+          <a:lstStyle/>
+          <a:p>
+            <a:endParaRPr/>
+          </a:p>
         </p:txBody>
       </p:sp>
     </p:spTree>
   </p:cSld>
   <p:clrMapOvr>
-    <a:masterClrMapping xmlns:a="http://schemas.openxmlformats.org/drawingml/2006/main"/>
+    <a:masterClrMapping/>
   </p:clrMapOvr>
 </p:notes>
 </file>
 
 <file path=ppt/notesSlides/notesSlide6.xml><?xml version="1.0" encoding="utf-8"?>
-<p:notes xmlns:p="http://schemas.openxmlformats.org/presentationml/2006/main">
+<p:notes xmlns:a="http://schemas.openxmlformats.org/drawingml/2006/main" xmlns:r="http://schemas.openxmlformats.org/officeDocument/2006/relationships" xmlns:p="http://schemas.openxmlformats.org/presentationml/2006/main">
   <p:cSld>
     <p:spTree>
       <p:nvGrpSpPr>
@@ -1284,16 +1190,21 @@
         <p:nvPr/>
       </p:nvGrpSpPr>
       <p:grpSpPr>
-        <a:xfrm xmlns:a="http://schemas.openxmlformats.org/drawingml/2006/main"/>
+        <a:xfrm>
+          <a:off x="0" y="0"/>
+          <a:ext cx="0" cy="0"/>
+          <a:chOff x="0" y="0"/>
+          <a:chExt cx="0" cy="0"/>
+        </a:xfrm>
       </p:grpSpPr>
       <p:sp>
         <p:nvSpPr>
           <p:cNvPr id="2" name="Slide Image Placeholder 1"/>
           <p:cNvSpPr>
-            <a:spLocks xmlns:a="http://schemas.openxmlformats.org/drawingml/2006/main" noGrp="1"/>
+            <a:spLocks noGrp="1" noRot="1" noChangeAspect="1"/>
           </p:cNvSpPr>
           <p:nvPr>
-            <p:ph type="sldImg" idx="0"/>
+            <p:ph type="sldImg"/>
           </p:nvPr>
         </p:nvSpPr>
         <p:spPr/>
@@ -1302,7 +1213,7 @@
         <p:nvSpPr>
           <p:cNvPr id="3" name="Notes Placeholder 2"/>
           <p:cNvSpPr>
-            <a:spLocks xmlns:a="http://schemas.openxmlformats.org/drawingml/2006/main" noGrp="1"/>
+            <a:spLocks noGrp="1"/>
           </p:cNvSpPr>
           <p:nvPr>
             <p:ph type="body" idx="1"/>
@@ -1310,19 +1221,19 @@
         </p:nvSpPr>
         <p:spPr/>
         <p:txBody>
-          <a:bodyPr xmlns:a="http://schemas.openxmlformats.org/drawingml/2006/main"/>
-          <a:lstStyle xmlns:a="http://schemas.openxmlformats.org/drawingml/2006/main"/>
-          <a:p xmlns:a="http://schemas.openxmlformats.org/drawingml/2006/main">
+          <a:bodyPr/>
+          <a:lstStyle/>
+          <a:p>
             <a:r>
               <a:t>[Sources]</a:t>
             </a:r>
           </a:p>
-          <a:p xmlns:a="http://schemas.openxmlformats.org/drawingml/2006/main">
+          <a:p>
             <a:r>
               <a:t>- reports/tables/indicateurs_cles.json</a:t>
             </a:r>
           </a:p>
-          <a:p xmlns:a="http://schemas.openxmlformats.org/drawingml/2006/main">
+          <a:p>
             <a:r>
               <a:t>- reports/figures/03_pareto_ca_octobre.png</a:t>
             </a:r>
@@ -1333,7 +1244,7 @@
         <p:nvSpPr>
           <p:cNvPr id="4" name="Slide Number Placeholder 3"/>
           <p:cNvSpPr>
-            <a:spLocks xmlns:a="http://schemas.openxmlformats.org/drawingml/2006/main" noGrp="1"/>
+            <a:spLocks noGrp="1"/>
           </p:cNvSpPr>
           <p:nvPr>
             <p:ph type="sldNum" idx="5"/>
@@ -1341,21 +1252,23 @@
         </p:nvSpPr>
         <p:spPr/>
         <p:txBody>
-          <a:bodyPr xmlns:a="http://schemas.openxmlformats.org/drawingml/2006/main"/>
-          <a:lstStyle xmlns:a="http://schemas.openxmlformats.org/drawingml/2006/main"/>
-          <a:p xmlns:a="http://schemas.openxmlformats.org/drawingml/2006/main"/>
+          <a:bodyPr/>
+          <a:lstStyle/>
+          <a:p>
+            <a:endParaRPr/>
+          </a:p>
         </p:txBody>
       </p:sp>
     </p:spTree>
   </p:cSld>
   <p:clrMapOvr>
-    <a:masterClrMapping xmlns:a="http://schemas.openxmlformats.org/drawingml/2006/main"/>
+    <a:masterClrMapping/>
   </p:clrMapOvr>
 </p:notes>
 </file>
 
 <file path=ppt/notesSlides/notesSlide7.xml><?xml version="1.0" encoding="utf-8"?>
-<p:notes xmlns:p="http://schemas.openxmlformats.org/presentationml/2006/main">
+<p:notes xmlns:a="http://schemas.openxmlformats.org/drawingml/2006/main" xmlns:r="http://schemas.openxmlformats.org/officeDocument/2006/relationships" xmlns:p="http://schemas.openxmlformats.org/presentationml/2006/main">
   <p:cSld>
     <p:spTree>
       <p:nvGrpSpPr>
@@ -1364,16 +1277,21 @@
         <p:nvPr/>
       </p:nvGrpSpPr>
       <p:grpSpPr>
-        <a:xfrm xmlns:a="http://schemas.openxmlformats.org/drawingml/2006/main"/>
+        <a:xfrm>
+          <a:off x="0" y="0"/>
+          <a:ext cx="0" cy="0"/>
+          <a:chOff x="0" y="0"/>
+          <a:chExt cx="0" cy="0"/>
+        </a:xfrm>
       </p:grpSpPr>
       <p:sp>
         <p:nvSpPr>
           <p:cNvPr id="2" name="Slide Image Placeholder 1"/>
           <p:cNvSpPr>
-            <a:spLocks xmlns:a="http://schemas.openxmlformats.org/drawingml/2006/main" noGrp="1"/>
+            <a:spLocks noGrp="1" noRot="1" noChangeAspect="1"/>
           </p:cNvSpPr>
           <p:nvPr>
-            <p:ph type="sldImg" idx="0"/>
+            <p:ph type="sldImg"/>
           </p:nvPr>
         </p:nvSpPr>
         <p:spPr/>
@@ -1382,7 +1300,7 @@
         <p:nvSpPr>
           <p:cNvPr id="3" name="Notes Placeholder 2"/>
           <p:cNvSpPr>
-            <a:spLocks xmlns:a="http://schemas.openxmlformats.org/drawingml/2006/main" noGrp="1"/>
+            <a:spLocks noGrp="1"/>
           </p:cNvSpPr>
           <p:nvPr>
             <p:ph type="body" idx="1"/>
@@ -1390,24 +1308,24 @@
         </p:nvSpPr>
         <p:spPr/>
         <p:txBody>
-          <a:bodyPr xmlns:a="http://schemas.openxmlformats.org/drawingml/2006/main"/>
-          <a:lstStyle xmlns:a="http://schemas.openxmlformats.org/drawingml/2006/main"/>
-          <a:p xmlns:a="http://schemas.openxmlformats.org/drawingml/2006/main">
+          <a:bodyPr/>
+          <a:lstStyle/>
+          <a:p>
             <a:r>
               <a:t>[Sources]</a:t>
             </a:r>
           </a:p>
-          <a:p xmlns:a="http://schemas.openxmlformats.org/drawingml/2006/main">
+          <a:p>
             <a:r>
               <a:t>- reports/tables/comparaison_methodes_outliers.csv</a:t>
             </a:r>
           </a:p>
-          <a:p xmlns:a="http://schemas.openxmlformats.org/drawingml/2006/main">
+          <a:p>
             <a:r>
               <a:t>- reports/tables/registre_qualite.csv</a:t>
             </a:r>
           </a:p>
-          <a:p xmlns:a="http://schemas.openxmlformats.org/drawingml/2006/main">
+          <a:p>
             <a:r>
               <a:t>- https://www.itl.nist.gov/div898/handbook/eda/section3/eda35h.htm</a:t>
             </a:r>
@@ -1418,7 +1336,7 @@
         <p:nvSpPr>
           <p:cNvPr id="4" name="Slide Number Placeholder 3"/>
           <p:cNvSpPr>
-            <a:spLocks xmlns:a="http://schemas.openxmlformats.org/drawingml/2006/main" noGrp="1"/>
+            <a:spLocks noGrp="1"/>
           </p:cNvSpPr>
           <p:nvPr>
             <p:ph type="sldNum" idx="5"/>
@@ -1426,21 +1344,23 @@
         </p:nvSpPr>
         <p:spPr/>
         <p:txBody>
-          <a:bodyPr xmlns:a="http://schemas.openxmlformats.org/drawingml/2006/main"/>
-          <a:lstStyle xmlns:a="http://schemas.openxmlformats.org/drawingml/2006/main"/>
-          <a:p xmlns:a="http://schemas.openxmlformats.org/drawingml/2006/main"/>
+          <a:bodyPr/>
+          <a:lstStyle/>
+          <a:p>
+            <a:endParaRPr/>
+          </a:p>
         </p:txBody>
       </p:sp>
     </p:spTree>
   </p:cSld>
   <p:clrMapOvr>
-    <a:masterClrMapping xmlns:a="http://schemas.openxmlformats.org/drawingml/2006/main"/>
+    <a:masterClrMapping/>
   </p:clrMapOvr>
 </p:notes>
 </file>
 
 <file path=ppt/notesSlides/notesSlide8.xml><?xml version="1.0" encoding="utf-8"?>
-<p:notes xmlns:p="http://schemas.openxmlformats.org/presentationml/2006/main">
+<p:notes xmlns:a="http://schemas.openxmlformats.org/drawingml/2006/main" xmlns:r="http://schemas.openxmlformats.org/officeDocument/2006/relationships" xmlns:p="http://schemas.openxmlformats.org/presentationml/2006/main">
   <p:cSld>
     <p:spTree>
       <p:nvGrpSpPr>
@@ -1449,16 +1369,21 @@
         <p:nvPr/>
       </p:nvGrpSpPr>
       <p:grpSpPr>
-        <a:xfrm xmlns:a="http://schemas.openxmlformats.org/drawingml/2006/main"/>
+        <a:xfrm>
+          <a:off x="0" y="0"/>
+          <a:ext cx="0" cy="0"/>
+          <a:chOff x="0" y="0"/>
+          <a:chExt cx="0" cy="0"/>
+        </a:xfrm>
       </p:grpSpPr>
       <p:sp>
         <p:nvSpPr>
           <p:cNvPr id="2" name="Slide Image Placeholder 1"/>
           <p:cNvSpPr>
-            <a:spLocks xmlns:a="http://schemas.openxmlformats.org/drawingml/2006/main" noGrp="1"/>
+            <a:spLocks noGrp="1" noRot="1" noChangeAspect="1"/>
           </p:cNvSpPr>
           <p:nvPr>
-            <p:ph type="sldImg" idx="0"/>
+            <p:ph type="sldImg"/>
           </p:nvPr>
         </p:nvSpPr>
         <p:spPr/>
@@ -1467,7 +1392,7 @@
         <p:nvSpPr>
           <p:cNvPr id="3" name="Notes Placeholder 2"/>
           <p:cNvSpPr>
-            <a:spLocks xmlns:a="http://schemas.openxmlformats.org/drawingml/2006/main" noGrp="1"/>
+            <a:spLocks noGrp="1"/>
           </p:cNvSpPr>
           <p:nvPr>
             <p:ph type="body" idx="1"/>
@@ -1475,29 +1400,29 @@
         </p:nvSpPr>
         <p:spPr/>
         <p:txBody>
-          <a:bodyPr xmlns:a="http://schemas.openxmlformats.org/drawingml/2006/main"/>
-          <a:lstStyle xmlns:a="http://schemas.openxmlformats.org/drawingml/2006/main"/>
-          <a:p xmlns:a="http://schemas.openxmlformats.org/drawingml/2006/main">
+          <a:bodyPr/>
+          <a:lstStyle/>
+          <a:p>
             <a:r>
               <a:t>[Sources]</a:t>
             </a:r>
           </a:p>
-          <a:p xmlns:a="http://schemas.openxmlformats.org/drawingml/2006/main">
+          <a:p>
             <a:r>
               <a:t>- reports/tables/indicateurs_cles.json</a:t>
             </a:r>
           </a:p>
-          <a:p xmlns:a="http://schemas.openxmlformats.org/drawingml/2006/main">
+          <a:p>
             <a:r>
               <a:t>- reports/tables/priorites_stock.csv</a:t>
             </a:r>
           </a:p>
-          <a:p xmlns:a="http://schemas.openxmlformats.org/drawingml/2006/main">
+          <a:p>
             <a:r>
               <a:t>- reports/figures/05_segments_stock.png</a:t>
             </a:r>
           </a:p>
-          <a:p xmlns:a="http://schemas.openxmlformats.org/drawingml/2006/main">
+          <a:p>
             <a:r>
               <a:t>- docs/limites_biais.md</a:t>
             </a:r>
@@ -1508,7 +1433,7 @@
         <p:nvSpPr>
           <p:cNvPr id="4" name="Slide Number Placeholder 3"/>
           <p:cNvSpPr>
-            <a:spLocks xmlns:a="http://schemas.openxmlformats.org/drawingml/2006/main" noGrp="1"/>
+            <a:spLocks noGrp="1"/>
           </p:cNvSpPr>
           <p:nvPr>
             <p:ph type="sldNum" idx="5"/>
@@ -1516,21 +1441,23 @@
         </p:nvSpPr>
         <p:spPr/>
         <p:txBody>
-          <a:bodyPr xmlns:a="http://schemas.openxmlformats.org/drawingml/2006/main"/>
-          <a:lstStyle xmlns:a="http://schemas.openxmlformats.org/drawingml/2006/main"/>
-          <a:p xmlns:a="http://schemas.openxmlformats.org/drawingml/2006/main"/>
+          <a:bodyPr/>
+          <a:lstStyle/>
+          <a:p>
+            <a:endParaRPr/>
+          </a:p>
         </p:txBody>
       </p:sp>
     </p:spTree>
   </p:cSld>
   <p:clrMapOvr>
-    <a:masterClrMapping xmlns:a="http://schemas.openxmlformats.org/drawingml/2006/main"/>
+    <a:masterClrMapping/>
   </p:clrMapOvr>
 </p:notes>
 </file>
 
 <file path=ppt/notesSlides/notesSlide9.xml><?xml version="1.0" encoding="utf-8"?>
-<p:notes xmlns:p="http://schemas.openxmlformats.org/presentationml/2006/main">
+<p:notes xmlns:a="http://schemas.openxmlformats.org/drawingml/2006/main" xmlns:r="http://schemas.openxmlformats.org/officeDocument/2006/relationships" xmlns:p="http://schemas.openxmlformats.org/presentationml/2006/main">
   <p:cSld>
     <p:spTree>
       <p:nvGrpSpPr>
@@ -1539,16 +1466,21 @@
         <p:nvPr/>
       </p:nvGrpSpPr>
       <p:grpSpPr>
-        <a:xfrm xmlns:a="http://schemas.openxmlformats.org/drawingml/2006/main"/>
+        <a:xfrm>
+          <a:off x="0" y="0"/>
+          <a:ext cx="0" cy="0"/>
+          <a:chOff x="0" y="0"/>
+          <a:chExt cx="0" cy="0"/>
+        </a:xfrm>
       </p:grpSpPr>
       <p:sp>
         <p:nvSpPr>
           <p:cNvPr id="2" name="Slide Image Placeholder 1"/>
           <p:cNvSpPr>
-            <a:spLocks xmlns:a="http://schemas.openxmlformats.org/drawingml/2006/main" noGrp="1"/>
+            <a:spLocks noGrp="1" noRot="1" noChangeAspect="1"/>
           </p:cNvSpPr>
           <p:nvPr>
-            <p:ph type="sldImg" idx="0"/>
+            <p:ph type="sldImg"/>
           </p:nvPr>
         </p:nvSpPr>
         <p:spPr/>
@@ -1557,7 +1489,7 @@
         <p:nvSpPr>
           <p:cNvPr id="3" name="Notes Placeholder 2"/>
           <p:cNvSpPr>
-            <a:spLocks xmlns:a="http://schemas.openxmlformats.org/drawingml/2006/main" noGrp="1"/>
+            <a:spLocks noGrp="1"/>
           </p:cNvSpPr>
           <p:nvPr>
             <p:ph type="body" idx="1"/>
@@ -1565,24 +1497,24 @@
         </p:nvSpPr>
         <p:spPr/>
         <p:txBody>
-          <a:bodyPr xmlns:a="http://schemas.openxmlformats.org/drawingml/2006/main"/>
-          <a:lstStyle xmlns:a="http://schemas.openxmlformats.org/drawingml/2006/main"/>
-          <a:p xmlns:a="http://schemas.openxmlformats.org/drawingml/2006/main">
+          <a:bodyPr/>
+          <a:lstStyle/>
+          <a:p>
             <a:r>
               <a:t>[Sources]</a:t>
             </a:r>
           </a:p>
-          <a:p xmlns:a="http://schemas.openxmlformats.org/drawingml/2006/main">
+          <a:p>
             <a:r>
               <a:t>- reports/tables/priorites_stock.csv</a:t>
             </a:r>
           </a:p>
-          <a:p xmlns:a="http://schemas.openxmlformats.org/drawingml/2006/main">
+          <a:p>
             <a:r>
               <a:t>- reports/figures/09_stock_sans_vente_octobre.png</a:t>
             </a:r>
           </a:p>
-          <a:p xmlns:a="http://schemas.openxmlformats.org/drawingml/2006/main">
+          <a:p>
             <a:r>
               <a:t>- docs/limites_biais.md</a:t>
             </a:r>
@@ -1593,7 +1525,7 @@
         <p:nvSpPr>
           <p:cNvPr id="4" name="Slide Number Placeholder 3"/>
           <p:cNvSpPr>
-            <a:spLocks xmlns:a="http://schemas.openxmlformats.org/drawingml/2006/main" noGrp="1"/>
+            <a:spLocks noGrp="1"/>
           </p:cNvSpPr>
           <p:nvPr>
             <p:ph type="sldNum" idx="5"/>
@@ -1601,21 +1533,23 @@
         </p:nvSpPr>
         <p:spPr/>
         <p:txBody>
-          <a:bodyPr xmlns:a="http://schemas.openxmlformats.org/drawingml/2006/main"/>
-          <a:lstStyle xmlns:a="http://schemas.openxmlformats.org/drawingml/2006/main"/>
-          <a:p xmlns:a="http://schemas.openxmlformats.org/drawingml/2006/main"/>
+          <a:bodyPr/>
+          <a:lstStyle/>
+          <a:p>
+            <a:endParaRPr/>
+          </a:p>
         </p:txBody>
       </p:sp>
     </p:spTree>
   </p:cSld>
   <p:clrMapOvr>
-    <a:masterClrMapping xmlns:a="http://schemas.openxmlformats.org/drawingml/2006/main"/>
+    <a:masterClrMapping/>
   </p:clrMapOvr>
 </p:notes>
 </file>
 
 <file path=ppt/slideLayouts/slideLayout1.xml><?xml version="1.0" encoding="utf-8"?>
-<p:sldLayout xmlns:p="http://schemas.openxmlformats.org/presentationml/2006/main" matchingName="Title slide" type="title">
+<p:sldLayout xmlns:a="http://schemas.openxmlformats.org/drawingml/2006/main" xmlns:r="http://schemas.openxmlformats.org/officeDocument/2006/relationships" xmlns:p="http://schemas.openxmlformats.org/presentationml/2006/main" matchingName="Title slide" type="title">
   <p:cSld name="TITLE">
     <p:spTree>
       <p:nvGrpSpPr>
@@ -1624,42 +1558,47 @@
         <p:nvPr/>
       </p:nvGrpSpPr>
       <p:grpSpPr>
-        <a:xfrm xmlns:a="http://schemas.openxmlformats.org/drawingml/2006/main"/>
+        <a:xfrm>
+          <a:off x="0" y="0"/>
+          <a:ext cx="0" cy="0"/>
+          <a:chOff x="0" y="0"/>
+          <a:chExt cx="0" cy="0"/>
+        </a:xfrm>
       </p:grpSpPr>
       <p:sp>
         <p:nvSpPr>
           <p:cNvPr id="10" name="Google Shape;10;p10">
-            <a:extLst xmlns:a="http://schemas.openxmlformats.org/drawingml/2006/main">
+            <a:extLst>
               <a:ext uri="{FF2B5EF4-FFF2-40B4-BE49-F238E27FC236}">
                 <a16:creationId xmlns:a16="http://schemas.microsoft.com/office/drawing/2014/main" id="{2525F0DA-FDB8-4967-AAD1-C03E1BE0FEF6}"/>
               </a:ext>
             </a:extLst>
           </p:cNvPr>
           <p:cNvSpPr>
-            <a:spLocks xmlns:a="http://schemas.openxmlformats.org/drawingml/2006/main" noGrp="1"/>
+            <a:spLocks noGrp="1"/>
           </p:cNvSpPr>
           <p:nvPr>
-            <p:ph type="ctrTitle" idx="0"/>
+            <p:ph type="ctrTitle"/>
           </p:nvPr>
         </p:nvSpPr>
         <p:spPr>
-          <a:xfrm xmlns:a="http://schemas.openxmlformats.org/drawingml/2006/main">
+          <a:xfrm>
             <a:off x="311708" y="744575"/>
             <a:ext cx="8520600" cy="2052600"/>
           </a:xfrm>
-          <a:prstGeom xmlns:a="http://schemas.openxmlformats.org/drawingml/2006/main" prst="rect">
+          <a:prstGeom prst="rect">
             <a:avLst/>
           </a:prstGeom>
-          <a:noFill xmlns:a="http://schemas.openxmlformats.org/drawingml/2006/main"/>
-          <a:ln xmlns:a="http://schemas.openxmlformats.org/drawingml/2006/main">
+          <a:noFill/>
+          <a:ln>
             <a:noFill/>
           </a:ln>
         </p:spPr>
         <p:txBody>
-          <a:bodyPr xmlns:a="http://schemas.openxmlformats.org/drawingml/2006/main" spcFirstLastPara="1" wrap="square" lIns="91425" tIns="91425" rIns="91425" bIns="91425" anchor="b">
+          <a:bodyPr spcFirstLastPara="1" wrap="square" lIns="91425" tIns="91425" rIns="91425" bIns="91425" anchor="b">
             <a:normAutofit/>
           </a:bodyPr>
-          <a:lstStyle xmlns:a="http://schemas.openxmlformats.org/drawingml/2006/main">
+          <a:lstStyle>
             <a:lvl1pPr algn="ctr">
               <a:lnSpc>
                 <a:spcPct val="100000"/>
@@ -1787,7 +1726,7 @@
               <a:defRPr sz="5200"/>
             </a:lvl9pPr>
           </a:lstStyle>
-          <a:p xmlns:a="http://schemas.openxmlformats.org/drawingml/2006/main">
+          <a:p>
             <a:endParaRPr/>
           </a:p>
         </p:txBody>
@@ -1795,37 +1734,37 @@
       <p:sp>
         <p:nvSpPr>
           <p:cNvPr id="11" name="Google Shape;11;p10">
-            <a:extLst xmlns:a="http://schemas.openxmlformats.org/drawingml/2006/main">
+            <a:extLst>
               <a:ext uri="{FF2B5EF4-FFF2-40B4-BE49-F238E27FC236}">
                 <a16:creationId xmlns:a16="http://schemas.microsoft.com/office/drawing/2014/main" id="{F6791C34-B520-4432-AF9C-D55FAAB4B169}"/>
               </a:ext>
             </a:extLst>
           </p:cNvPr>
           <p:cNvSpPr>
-            <a:spLocks xmlns:a="http://schemas.openxmlformats.org/drawingml/2006/main" noGrp="1"/>
+            <a:spLocks noGrp="1"/>
           </p:cNvSpPr>
           <p:nvPr>
             <p:ph type="subTitle" idx="1"/>
           </p:nvPr>
         </p:nvSpPr>
         <p:spPr>
-          <a:xfrm xmlns:a="http://schemas.openxmlformats.org/drawingml/2006/main">
+          <a:xfrm>
             <a:off x="311700" y="2834125"/>
             <a:ext cx="8520600" cy="792600"/>
           </a:xfrm>
-          <a:prstGeom xmlns:a="http://schemas.openxmlformats.org/drawingml/2006/main" prst="rect">
+          <a:prstGeom prst="rect">
             <a:avLst/>
           </a:prstGeom>
-          <a:noFill xmlns:a="http://schemas.openxmlformats.org/drawingml/2006/main"/>
-          <a:ln xmlns:a="http://schemas.openxmlformats.org/drawingml/2006/main">
+          <a:noFill/>
+          <a:ln>
             <a:noFill/>
           </a:ln>
         </p:spPr>
         <p:txBody>
-          <a:bodyPr xmlns:a="http://schemas.openxmlformats.org/drawingml/2006/main" spcFirstLastPara="1" wrap="square" lIns="91425" tIns="91425" rIns="91425" bIns="91425" anchor="t">
+          <a:bodyPr spcFirstLastPara="1" wrap="square" lIns="91425" tIns="91425" rIns="91425" bIns="91425" anchor="t">
             <a:normAutofit/>
           </a:bodyPr>
-          <a:lstStyle xmlns:a="http://schemas.openxmlformats.org/drawingml/2006/main">
+          <a:lstStyle>
             <a:lvl1pPr algn="ctr">
               <a:lnSpc>
                 <a:spcPct val="100000"/>
@@ -1953,7 +1892,7 @@
               <a:defRPr sz="2800"/>
             </a:lvl9pPr>
           </a:lstStyle>
-          <a:p xmlns:a="http://schemas.openxmlformats.org/drawingml/2006/main">
+          <a:p>
             <a:endParaRPr/>
           </a:p>
         </p:txBody>
@@ -1961,37 +1900,37 @@
       <p:sp>
         <p:nvSpPr>
           <p:cNvPr id="12" name="Google Shape;12;p10">
-            <a:extLst xmlns:a="http://schemas.openxmlformats.org/drawingml/2006/main">
+            <a:extLst>
               <a:ext uri="{FF2B5EF4-FFF2-40B4-BE49-F238E27FC236}">
                 <a16:creationId xmlns:a16="http://schemas.microsoft.com/office/drawing/2014/main" id="{9D10DD95-F16A-4A77-8B0A-57AE045D0E71}"/>
               </a:ext>
             </a:extLst>
           </p:cNvPr>
           <p:cNvSpPr>
-            <a:spLocks xmlns:a="http://schemas.openxmlformats.org/drawingml/2006/main" noGrp="1"/>
+            <a:spLocks noGrp="1"/>
           </p:cNvSpPr>
           <p:nvPr>
             <p:ph type="sldNum" idx="12"/>
           </p:nvPr>
         </p:nvSpPr>
         <p:spPr>
-          <a:xfrm xmlns:a="http://schemas.openxmlformats.org/drawingml/2006/main">
+          <a:xfrm>
             <a:off x="8472458" y="4663217"/>
             <a:ext cx="548700" cy="393600"/>
           </a:xfrm>
-          <a:prstGeom xmlns:a="http://schemas.openxmlformats.org/drawingml/2006/main" prst="rect">
+          <a:prstGeom prst="rect">
             <a:avLst/>
           </a:prstGeom>
-          <a:noFill xmlns:a="http://schemas.openxmlformats.org/drawingml/2006/main"/>
-          <a:ln xmlns:a="http://schemas.openxmlformats.org/drawingml/2006/main">
+          <a:noFill/>
+          <a:ln>
             <a:noFill/>
           </a:ln>
         </p:spPr>
         <p:txBody>
-          <a:bodyPr xmlns:a="http://schemas.openxmlformats.org/drawingml/2006/main" spcFirstLastPara="1" wrap="square" lIns="91425" tIns="91425" rIns="91425" bIns="91425" anchor="ctr">
+          <a:bodyPr spcFirstLastPara="1" wrap="square" lIns="91425" tIns="91425" rIns="91425" bIns="91425" anchor="ctr">
             <a:normAutofit/>
           </a:bodyPr>
-          <a:lstStyle xmlns:a="http://schemas.openxmlformats.org/drawingml/2006/main">
+          <a:lstStyle>
             <a:lvl1pPr marL="0" marR="0" indent="0" algn="r">
               <a:lnSpc>
                 <a:spcPct val="100000"/>
@@ -2218,7 +2157,7 @@
               </a:defRPr>
             </a:lvl9pPr>
           </a:lstStyle>
-          <a:p xmlns:a="http://schemas.openxmlformats.org/drawingml/2006/main">
+          <a:p>
             <a:pPr marL="0" lvl="0" indent="0" algn="r">
               <a:spcBef>
                 <a:spcPts val="0"/>
@@ -2237,11 +2176,14 @@
       </p:sp>
     </p:spTree>
   </p:cSld>
+  <p:clrMapOvr>
+    <a:masterClrMapping/>
+  </p:clrMapOvr>
 </p:sldLayout>
 </file>
 
 <file path=ppt/slideLayouts/slideLayout10.xml><?xml version="1.0" encoding="utf-8"?>
-<p:sldLayout xmlns:p="http://schemas.openxmlformats.org/presentationml/2006/main" matchingName="Big number">
+<p:sldLayout xmlns:a="http://schemas.openxmlformats.org/drawingml/2006/main" xmlns:r="http://schemas.openxmlformats.org/officeDocument/2006/relationships" xmlns:p="http://schemas.openxmlformats.org/presentationml/2006/main" matchingName="Big number">
   <p:cSld name="BIG_NUMBER">
     <p:spTree>
       <p:nvGrpSpPr>
@@ -2250,42 +2192,47 @@
         <p:nvPr/>
       </p:nvGrpSpPr>
       <p:grpSpPr>
-        <a:xfrm xmlns:a="http://schemas.openxmlformats.org/drawingml/2006/main"/>
+        <a:xfrm>
+          <a:off x="0" y="0"/>
+          <a:ext cx="0" cy="0"/>
+          <a:chOff x="0" y="0"/>
+          <a:chExt cx="0" cy="0"/>
+        </a:xfrm>
       </p:grpSpPr>
       <p:sp>
         <p:nvSpPr>
           <p:cNvPr id="45" name="Google Shape;45;p19">
-            <a:extLst xmlns:a="http://schemas.openxmlformats.org/drawingml/2006/main">
+            <a:extLst>
               <a:ext uri="{FF2B5EF4-FFF2-40B4-BE49-F238E27FC236}">
                 <a16:creationId xmlns:a16="http://schemas.microsoft.com/office/drawing/2014/main" id="{D24D561C-84ED-4BAC-B9AD-5121ADCCC293}"/>
               </a:ext>
             </a:extLst>
           </p:cNvPr>
           <p:cNvSpPr>
-            <a:spLocks xmlns:a="http://schemas.openxmlformats.org/drawingml/2006/main" noGrp="1"/>
+            <a:spLocks noGrp="1"/>
           </p:cNvSpPr>
           <p:nvPr>
-            <p:ph type="title" idx="0" hasCustomPrompt="1"/>
+            <p:ph type="title" hasCustomPrompt="1"/>
           </p:nvPr>
         </p:nvSpPr>
         <p:spPr>
-          <a:xfrm xmlns:a="http://schemas.openxmlformats.org/drawingml/2006/main">
+          <a:xfrm>
             <a:off x="311700" y="1106125"/>
             <a:ext cx="8520600" cy="1963500"/>
           </a:xfrm>
-          <a:prstGeom xmlns:a="http://schemas.openxmlformats.org/drawingml/2006/main" prst="rect">
+          <a:prstGeom prst="rect">
             <a:avLst/>
           </a:prstGeom>
-          <a:noFill xmlns:a="http://schemas.openxmlformats.org/drawingml/2006/main"/>
-          <a:ln xmlns:a="http://schemas.openxmlformats.org/drawingml/2006/main">
+          <a:noFill/>
+          <a:ln>
             <a:noFill/>
           </a:ln>
         </p:spPr>
         <p:txBody>
-          <a:bodyPr xmlns:a="http://schemas.openxmlformats.org/drawingml/2006/main" spcFirstLastPara="1" wrap="square" lIns="91425" tIns="91425" rIns="91425" bIns="91425" anchor="b">
+          <a:bodyPr spcFirstLastPara="1" wrap="square" lIns="91425" tIns="91425" rIns="91425" bIns="91425" anchor="b">
             <a:normAutofit/>
           </a:bodyPr>
-          <a:lstStyle xmlns:a="http://schemas.openxmlformats.org/drawingml/2006/main">
+          <a:lstStyle>
             <a:lvl1pPr algn="ctr">
               <a:lnSpc>
                 <a:spcPct val="100000"/>
@@ -2413,7 +2360,7 @@
               <a:defRPr sz="12000"/>
             </a:lvl9pPr>
           </a:lstStyle>
-          <a:p xmlns:a="http://schemas.openxmlformats.org/drawingml/2006/main">
+          <a:p>
             <a:r>
               <a:t>xx%</a:t>
             </a:r>
@@ -2423,37 +2370,37 @@
       <p:sp>
         <p:nvSpPr>
           <p:cNvPr id="46" name="Google Shape;46;p19">
-            <a:extLst xmlns:a="http://schemas.openxmlformats.org/drawingml/2006/main">
+            <a:extLst>
               <a:ext uri="{FF2B5EF4-FFF2-40B4-BE49-F238E27FC236}">
                 <a16:creationId xmlns:a16="http://schemas.microsoft.com/office/drawing/2014/main" id="{80D61C70-4DD6-4FF1-BC53-0DDFE9EAF5C0}"/>
               </a:ext>
             </a:extLst>
           </p:cNvPr>
           <p:cNvSpPr>
-            <a:spLocks xmlns:a="http://schemas.openxmlformats.org/drawingml/2006/main" noGrp="1"/>
+            <a:spLocks noGrp="1"/>
           </p:cNvSpPr>
           <p:nvPr>
             <p:ph type="body" idx="1"/>
           </p:nvPr>
         </p:nvSpPr>
         <p:spPr>
-          <a:xfrm xmlns:a="http://schemas.openxmlformats.org/drawingml/2006/main">
+          <a:xfrm>
             <a:off x="311700" y="3152225"/>
             <a:ext cx="8520600" cy="1300800"/>
           </a:xfrm>
-          <a:prstGeom xmlns:a="http://schemas.openxmlformats.org/drawingml/2006/main" prst="rect">
+          <a:prstGeom prst="rect">
             <a:avLst/>
           </a:prstGeom>
-          <a:noFill xmlns:a="http://schemas.openxmlformats.org/drawingml/2006/main"/>
-          <a:ln xmlns:a="http://schemas.openxmlformats.org/drawingml/2006/main">
+          <a:noFill/>
+          <a:ln>
             <a:noFill/>
           </a:ln>
         </p:spPr>
         <p:txBody>
-          <a:bodyPr xmlns:a="http://schemas.openxmlformats.org/drawingml/2006/main" spcFirstLastPara="1" wrap="square" lIns="91425" tIns="91425" rIns="91425" bIns="91425" anchor="t">
+          <a:bodyPr spcFirstLastPara="1" wrap="square" lIns="91425" tIns="91425" rIns="91425" bIns="91425" anchor="t">
             <a:normAutofit/>
           </a:bodyPr>
-          <a:lstStyle xmlns:a="http://schemas.openxmlformats.org/drawingml/2006/main">
+          <a:lstStyle>
             <a:lvl1pPr marL="457200" indent="-342900" algn="ctr">
               <a:lnSpc>
                 <a:spcPct val="115000"/>
@@ -2581,7 +2528,7 @@
               <a:defRPr/>
             </a:lvl9pPr>
           </a:lstStyle>
-          <a:p xmlns:a="http://schemas.openxmlformats.org/drawingml/2006/main">
+          <a:p>
             <a:endParaRPr/>
           </a:p>
         </p:txBody>
@@ -2589,37 +2536,37 @@
       <p:sp>
         <p:nvSpPr>
           <p:cNvPr id="47" name="Google Shape;47;p19">
-            <a:extLst xmlns:a="http://schemas.openxmlformats.org/drawingml/2006/main">
+            <a:extLst>
               <a:ext uri="{FF2B5EF4-FFF2-40B4-BE49-F238E27FC236}">
                 <a16:creationId xmlns:a16="http://schemas.microsoft.com/office/drawing/2014/main" id="{77409EF9-0AC5-407C-9F41-54272F5D45DD}"/>
               </a:ext>
             </a:extLst>
           </p:cNvPr>
           <p:cNvSpPr>
-            <a:spLocks xmlns:a="http://schemas.openxmlformats.org/drawingml/2006/main" noGrp="1"/>
+            <a:spLocks noGrp="1"/>
           </p:cNvSpPr>
           <p:nvPr>
             <p:ph type="sldNum" idx="12"/>
           </p:nvPr>
         </p:nvSpPr>
         <p:spPr>
-          <a:xfrm xmlns:a="http://schemas.openxmlformats.org/drawingml/2006/main">
+          <a:xfrm>
             <a:off x="8472458" y="4663217"/>
             <a:ext cx="548700" cy="393600"/>
           </a:xfrm>
-          <a:prstGeom xmlns:a="http://schemas.openxmlformats.org/drawingml/2006/main" prst="rect">
+          <a:prstGeom prst="rect">
             <a:avLst/>
           </a:prstGeom>
-          <a:noFill xmlns:a="http://schemas.openxmlformats.org/drawingml/2006/main"/>
-          <a:ln xmlns:a="http://schemas.openxmlformats.org/drawingml/2006/main">
+          <a:noFill/>
+          <a:ln>
             <a:noFill/>
           </a:ln>
         </p:spPr>
         <p:txBody>
-          <a:bodyPr xmlns:a="http://schemas.openxmlformats.org/drawingml/2006/main" spcFirstLastPara="1" wrap="square" lIns="91425" tIns="91425" rIns="91425" bIns="91425" anchor="ctr">
+          <a:bodyPr spcFirstLastPara="1" wrap="square" lIns="91425" tIns="91425" rIns="91425" bIns="91425" anchor="ctr">
             <a:normAutofit/>
           </a:bodyPr>
-          <a:lstStyle xmlns:a="http://schemas.openxmlformats.org/drawingml/2006/main">
+          <a:lstStyle>
             <a:lvl1pPr marL="0" marR="0" indent="0" algn="r">
               <a:lnSpc>
                 <a:spcPct val="100000"/>
@@ -2846,7 +2793,7 @@
               </a:defRPr>
             </a:lvl9pPr>
           </a:lstStyle>
-          <a:p xmlns:a="http://schemas.openxmlformats.org/drawingml/2006/main">
+          <a:p>
             <a:pPr marL="0" lvl="0" indent="0" algn="r">
               <a:spcBef>
                 <a:spcPts val="0"/>
@@ -2865,11 +2812,14 @@
       </p:sp>
     </p:spTree>
   </p:cSld>
+  <p:clrMapOvr>
+    <a:masterClrMapping/>
+  </p:clrMapOvr>
 </p:sldLayout>
 </file>
 
 <file path=ppt/slideLayouts/slideLayout11.xml><?xml version="1.0" encoding="utf-8"?>
-<p:sldLayout xmlns:p="http://schemas.openxmlformats.org/presentationml/2006/main" matchingName="Blank" type="blank">
+<p:sldLayout xmlns:a="http://schemas.openxmlformats.org/drawingml/2006/main" xmlns:r="http://schemas.openxmlformats.org/officeDocument/2006/relationships" xmlns:p="http://schemas.openxmlformats.org/presentationml/2006/main" matchingName="Blank" type="blank">
   <p:cSld name="BLANK">
     <p:spTree>
       <p:nvGrpSpPr>
@@ -2878,42 +2828,47 @@
         <p:nvPr/>
       </p:nvGrpSpPr>
       <p:grpSpPr>
-        <a:xfrm xmlns:a="http://schemas.openxmlformats.org/drawingml/2006/main"/>
+        <a:xfrm>
+          <a:off x="0" y="0"/>
+          <a:ext cx="0" cy="0"/>
+          <a:chOff x="0" y="0"/>
+          <a:chExt cx="0" cy="0"/>
+        </a:xfrm>
       </p:grpSpPr>
       <p:sp>
         <p:nvSpPr>
           <p:cNvPr id="49" name="Google Shape;49;p20">
-            <a:extLst xmlns:a="http://schemas.openxmlformats.org/drawingml/2006/main">
+            <a:extLst>
               <a:ext uri="{FF2B5EF4-FFF2-40B4-BE49-F238E27FC236}">
                 <a16:creationId xmlns:a16="http://schemas.microsoft.com/office/drawing/2014/main" id="{787ADD87-F8A3-412A-B374-F62EF45F68B3}"/>
               </a:ext>
             </a:extLst>
           </p:cNvPr>
           <p:cNvSpPr>
-            <a:spLocks xmlns:a="http://schemas.openxmlformats.org/drawingml/2006/main" noGrp="1"/>
+            <a:spLocks noGrp="1"/>
           </p:cNvSpPr>
           <p:nvPr>
             <p:ph type="sldNum" idx="12"/>
           </p:nvPr>
         </p:nvSpPr>
         <p:spPr>
-          <a:xfrm xmlns:a="http://schemas.openxmlformats.org/drawingml/2006/main">
+          <a:xfrm>
             <a:off x="8472458" y="4663217"/>
             <a:ext cx="548700" cy="393600"/>
           </a:xfrm>
-          <a:prstGeom xmlns:a="http://schemas.openxmlformats.org/drawingml/2006/main" prst="rect">
+          <a:prstGeom prst="rect">
             <a:avLst/>
           </a:prstGeom>
-          <a:noFill xmlns:a="http://schemas.openxmlformats.org/drawingml/2006/main"/>
-          <a:ln xmlns:a="http://schemas.openxmlformats.org/drawingml/2006/main">
+          <a:noFill/>
+          <a:ln>
             <a:noFill/>
           </a:ln>
         </p:spPr>
         <p:txBody>
-          <a:bodyPr xmlns:a="http://schemas.openxmlformats.org/drawingml/2006/main" spcFirstLastPara="1" wrap="square" lIns="91425" tIns="91425" rIns="91425" bIns="91425" anchor="ctr">
+          <a:bodyPr spcFirstLastPara="1" wrap="square" lIns="91425" tIns="91425" rIns="91425" bIns="91425" anchor="ctr">
             <a:normAutofit/>
           </a:bodyPr>
-          <a:lstStyle xmlns:a="http://schemas.openxmlformats.org/drawingml/2006/main">
+          <a:lstStyle>
             <a:lvl1pPr marL="0" marR="0" indent="0" algn="r">
               <a:lnSpc>
                 <a:spcPct val="100000"/>
@@ -3140,7 +3095,7 @@
               </a:defRPr>
             </a:lvl9pPr>
           </a:lstStyle>
-          <a:p xmlns:a="http://schemas.openxmlformats.org/drawingml/2006/main">
+          <a:p>
             <a:pPr marL="0" lvl="0" indent="0" algn="r">
               <a:spcBef>
                 <a:spcPts val="0"/>
@@ -3159,11 +3114,14 @@
       </p:sp>
     </p:spTree>
   </p:cSld>
+  <p:clrMapOvr>
+    <a:masterClrMapping/>
+  </p:clrMapOvr>
 </p:sldLayout>
 </file>
 
 <file path=ppt/slideLayouts/slideLayout2.xml><?xml version="1.0" encoding="utf-8"?>
-<p:sldLayout xmlns:p="http://schemas.openxmlformats.org/presentationml/2006/main" matchingName="Title and body">
+<p:sldLayout xmlns:a="http://schemas.openxmlformats.org/drawingml/2006/main" xmlns:r="http://schemas.openxmlformats.org/officeDocument/2006/relationships" xmlns:p="http://schemas.openxmlformats.org/presentationml/2006/main" matchingName="Title and body">
   <p:cSld name="TITLE_AND_BODY">
     <p:spTree>
       <p:nvGrpSpPr>
@@ -3172,42 +3130,47 @@
         <p:nvPr/>
       </p:nvGrpSpPr>
       <p:grpSpPr>
-        <a:xfrm xmlns:a="http://schemas.openxmlformats.org/drawingml/2006/main"/>
+        <a:xfrm>
+          <a:off x="0" y="0"/>
+          <a:ext cx="0" cy="0"/>
+          <a:chOff x="0" y="0"/>
+          <a:chExt cx="0" cy="0"/>
+        </a:xfrm>
       </p:grpSpPr>
       <p:sp>
         <p:nvSpPr>
           <p:cNvPr id="14" name="Google Shape;14;p11">
-            <a:extLst xmlns:a="http://schemas.openxmlformats.org/drawingml/2006/main">
+            <a:extLst>
               <a:ext uri="{FF2B5EF4-FFF2-40B4-BE49-F238E27FC236}">
                 <a16:creationId xmlns:a16="http://schemas.microsoft.com/office/drawing/2014/main" id="{353981F4-FC85-4BFF-AEE3-74708186CA44}"/>
               </a:ext>
             </a:extLst>
           </p:cNvPr>
           <p:cNvSpPr>
-            <a:spLocks xmlns:a="http://schemas.openxmlformats.org/drawingml/2006/main" noGrp="1"/>
+            <a:spLocks noGrp="1"/>
           </p:cNvSpPr>
           <p:nvPr>
-            <p:ph type="title" idx="0"/>
+            <p:ph type="title"/>
           </p:nvPr>
         </p:nvSpPr>
         <p:spPr>
-          <a:xfrm xmlns:a="http://schemas.openxmlformats.org/drawingml/2006/main">
+          <a:xfrm>
             <a:off x="311700" y="445025"/>
             <a:ext cx="8520600" cy="572700"/>
           </a:xfrm>
-          <a:prstGeom xmlns:a="http://schemas.openxmlformats.org/drawingml/2006/main" prst="rect">
+          <a:prstGeom prst="rect">
             <a:avLst/>
           </a:prstGeom>
-          <a:noFill xmlns:a="http://schemas.openxmlformats.org/drawingml/2006/main"/>
-          <a:ln xmlns:a="http://schemas.openxmlformats.org/drawingml/2006/main">
+          <a:noFill/>
+          <a:ln>
             <a:noFill/>
           </a:ln>
         </p:spPr>
         <p:txBody>
-          <a:bodyPr xmlns:a="http://schemas.openxmlformats.org/drawingml/2006/main" spcFirstLastPara="1" wrap="square" lIns="91425" tIns="91425" rIns="91425" bIns="91425" anchor="t">
+          <a:bodyPr spcFirstLastPara="1" wrap="square" lIns="91425" tIns="91425" rIns="91425" bIns="91425" anchor="t">
             <a:normAutofit/>
           </a:bodyPr>
-          <a:lstStyle xmlns:a="http://schemas.openxmlformats.org/drawingml/2006/main">
+          <a:lstStyle>
             <a:lvl1pPr algn="l">
               <a:lnSpc>
                 <a:spcPct val="100000"/>
@@ -3335,7 +3298,7 @@
               <a:defRPr/>
             </a:lvl9pPr>
           </a:lstStyle>
-          <a:p xmlns:a="http://schemas.openxmlformats.org/drawingml/2006/main">
+          <a:p>
             <a:endParaRPr/>
           </a:p>
         </p:txBody>
@@ -3343,37 +3306,37 @@
       <p:sp>
         <p:nvSpPr>
           <p:cNvPr id="15" name="Google Shape;15;p11">
-            <a:extLst xmlns:a="http://schemas.openxmlformats.org/drawingml/2006/main">
+            <a:extLst>
               <a:ext uri="{FF2B5EF4-FFF2-40B4-BE49-F238E27FC236}">
                 <a16:creationId xmlns:a16="http://schemas.microsoft.com/office/drawing/2014/main" id="{A23D9DBF-AAF2-49FE-BE80-9FC55659601E}"/>
               </a:ext>
             </a:extLst>
           </p:cNvPr>
           <p:cNvSpPr>
-            <a:spLocks xmlns:a="http://schemas.openxmlformats.org/drawingml/2006/main" noGrp="1"/>
+            <a:spLocks noGrp="1"/>
           </p:cNvSpPr>
           <p:nvPr>
             <p:ph type="body" idx="1"/>
           </p:nvPr>
         </p:nvSpPr>
         <p:spPr>
-          <a:xfrm xmlns:a="http://schemas.openxmlformats.org/drawingml/2006/main">
+          <a:xfrm>
             <a:off x="311700" y="1152475"/>
             <a:ext cx="8520600" cy="3416400"/>
           </a:xfrm>
-          <a:prstGeom xmlns:a="http://schemas.openxmlformats.org/drawingml/2006/main" prst="rect">
+          <a:prstGeom prst="rect">
             <a:avLst/>
           </a:prstGeom>
-          <a:noFill xmlns:a="http://schemas.openxmlformats.org/drawingml/2006/main"/>
-          <a:ln xmlns:a="http://schemas.openxmlformats.org/drawingml/2006/main">
+          <a:noFill/>
+          <a:ln>
             <a:noFill/>
           </a:ln>
         </p:spPr>
         <p:txBody>
-          <a:bodyPr xmlns:a="http://schemas.openxmlformats.org/drawingml/2006/main" spcFirstLastPara="1" wrap="square" lIns="91425" tIns="91425" rIns="91425" bIns="91425" anchor="t">
+          <a:bodyPr spcFirstLastPara="1" wrap="square" lIns="91425" tIns="91425" rIns="91425" bIns="91425" anchor="t">
             <a:normAutofit/>
           </a:bodyPr>
-          <a:lstStyle xmlns:a="http://schemas.openxmlformats.org/drawingml/2006/main">
+          <a:lstStyle>
             <a:lvl1pPr marL="457200" indent="-342900" algn="l">
               <a:lnSpc>
                 <a:spcPct val="115000"/>
@@ -3501,7 +3464,7 @@
               <a:defRPr/>
             </a:lvl9pPr>
           </a:lstStyle>
-          <a:p xmlns:a="http://schemas.openxmlformats.org/drawingml/2006/main">
+          <a:p>
             <a:endParaRPr/>
           </a:p>
         </p:txBody>
@@ -3509,37 +3472,37 @@
       <p:sp>
         <p:nvSpPr>
           <p:cNvPr id="16" name="Google Shape;16;p11">
-            <a:extLst xmlns:a="http://schemas.openxmlformats.org/drawingml/2006/main">
+            <a:extLst>
               <a:ext uri="{FF2B5EF4-FFF2-40B4-BE49-F238E27FC236}">
                 <a16:creationId xmlns:a16="http://schemas.microsoft.com/office/drawing/2014/main" id="{C54FBF37-328A-4E56-AFF0-EBDFAF1FF67F}"/>
               </a:ext>
             </a:extLst>
           </p:cNvPr>
           <p:cNvSpPr>
-            <a:spLocks xmlns:a="http://schemas.openxmlformats.org/drawingml/2006/main" noGrp="1"/>
+            <a:spLocks noGrp="1"/>
           </p:cNvSpPr>
           <p:nvPr>
             <p:ph type="sldNum" idx="12"/>
           </p:nvPr>
         </p:nvSpPr>
         <p:spPr>
-          <a:xfrm xmlns:a="http://schemas.openxmlformats.org/drawingml/2006/main">
+          <a:xfrm>
             <a:off x="8472458" y="4663217"/>
             <a:ext cx="548700" cy="393600"/>
           </a:xfrm>
-          <a:prstGeom xmlns:a="http://schemas.openxmlformats.org/drawingml/2006/main" prst="rect">
+          <a:prstGeom prst="rect">
             <a:avLst/>
           </a:prstGeom>
-          <a:noFill xmlns:a="http://schemas.openxmlformats.org/drawingml/2006/main"/>
-          <a:ln xmlns:a="http://schemas.openxmlformats.org/drawingml/2006/main">
+          <a:noFill/>
+          <a:ln>
             <a:noFill/>
           </a:ln>
         </p:spPr>
         <p:txBody>
-          <a:bodyPr xmlns:a="http://schemas.openxmlformats.org/drawingml/2006/main" spcFirstLastPara="1" wrap="square" lIns="91425" tIns="91425" rIns="91425" bIns="91425" anchor="ctr">
+          <a:bodyPr spcFirstLastPara="1" wrap="square" lIns="91425" tIns="91425" rIns="91425" bIns="91425" anchor="ctr">
             <a:normAutofit/>
           </a:bodyPr>
-          <a:lstStyle xmlns:a="http://schemas.openxmlformats.org/drawingml/2006/main">
+          <a:lstStyle>
             <a:lvl1pPr marL="0" marR="0" indent="0" algn="r">
               <a:lnSpc>
                 <a:spcPct val="100000"/>
@@ -3766,7 +3729,7 @@
               </a:defRPr>
             </a:lvl9pPr>
           </a:lstStyle>
-          <a:p xmlns:a="http://schemas.openxmlformats.org/drawingml/2006/main">
+          <a:p>
             <a:pPr marL="0" lvl="0" indent="0" algn="r">
               <a:spcBef>
                 <a:spcPts val="0"/>
@@ -3785,11 +3748,14 @@
       </p:sp>
     </p:spTree>
   </p:cSld>
+  <p:clrMapOvr>
+    <a:masterClrMapping/>
+  </p:clrMapOvr>
 </p:sldLayout>
 </file>
 
 <file path=ppt/slideLayouts/slideLayout3.xml><?xml version="1.0" encoding="utf-8"?>
-<p:sldLayout xmlns:p="http://schemas.openxmlformats.org/presentationml/2006/main" matchingName="Section header" type="secHead">
+<p:sldLayout xmlns:a="http://schemas.openxmlformats.org/drawingml/2006/main" xmlns:r="http://schemas.openxmlformats.org/officeDocument/2006/relationships" xmlns:p="http://schemas.openxmlformats.org/presentationml/2006/main" matchingName="Section header" type="secHead">
   <p:cSld name="SECTION_HEADER">
     <p:spTree>
       <p:nvGrpSpPr>
@@ -3798,42 +3764,47 @@
         <p:nvPr/>
       </p:nvGrpSpPr>
       <p:grpSpPr>
-        <a:xfrm xmlns:a="http://schemas.openxmlformats.org/drawingml/2006/main"/>
+        <a:xfrm>
+          <a:off x="0" y="0"/>
+          <a:ext cx="0" cy="0"/>
+          <a:chOff x="0" y="0"/>
+          <a:chExt cx="0" cy="0"/>
+        </a:xfrm>
       </p:grpSpPr>
       <p:sp>
         <p:nvSpPr>
           <p:cNvPr id="18" name="Google Shape;18;p12">
-            <a:extLst xmlns:a="http://schemas.openxmlformats.org/drawingml/2006/main">
+            <a:extLst>
               <a:ext uri="{FF2B5EF4-FFF2-40B4-BE49-F238E27FC236}">
                 <a16:creationId xmlns:a16="http://schemas.microsoft.com/office/drawing/2014/main" id="{9394D7E7-22D6-4FBE-883E-26C2B346512A}"/>
               </a:ext>
             </a:extLst>
           </p:cNvPr>
           <p:cNvSpPr>
-            <a:spLocks xmlns:a="http://schemas.openxmlformats.org/drawingml/2006/main" noGrp="1"/>
+            <a:spLocks noGrp="1"/>
           </p:cNvSpPr>
           <p:nvPr>
-            <p:ph type="title" idx="0"/>
+            <p:ph type="title"/>
           </p:nvPr>
         </p:nvSpPr>
         <p:spPr>
-          <a:xfrm xmlns:a="http://schemas.openxmlformats.org/drawingml/2006/main">
+          <a:xfrm>
             <a:off x="311700" y="2150850"/>
             <a:ext cx="8520600" cy="841800"/>
           </a:xfrm>
-          <a:prstGeom xmlns:a="http://schemas.openxmlformats.org/drawingml/2006/main" prst="rect">
+          <a:prstGeom prst="rect">
             <a:avLst/>
           </a:prstGeom>
-          <a:noFill xmlns:a="http://schemas.openxmlformats.org/drawingml/2006/main"/>
-          <a:ln xmlns:a="http://schemas.openxmlformats.org/drawingml/2006/main">
+          <a:noFill/>
+          <a:ln>
             <a:noFill/>
           </a:ln>
         </p:spPr>
         <p:txBody>
-          <a:bodyPr xmlns:a="http://schemas.openxmlformats.org/drawingml/2006/main" spcFirstLastPara="1" wrap="square" lIns="91425" tIns="91425" rIns="91425" bIns="91425" anchor="ctr">
+          <a:bodyPr spcFirstLastPara="1" wrap="square" lIns="91425" tIns="91425" rIns="91425" bIns="91425" anchor="ctr">
             <a:normAutofit/>
           </a:bodyPr>
-          <a:lstStyle xmlns:a="http://schemas.openxmlformats.org/drawingml/2006/main">
+          <a:lstStyle>
             <a:lvl1pPr algn="ctr">
               <a:lnSpc>
                 <a:spcPct val="100000"/>
@@ -3961,7 +3932,7 @@
               <a:defRPr sz="3600"/>
             </a:lvl9pPr>
           </a:lstStyle>
-          <a:p xmlns:a="http://schemas.openxmlformats.org/drawingml/2006/main">
+          <a:p>
             <a:endParaRPr/>
           </a:p>
         </p:txBody>
@@ -3969,37 +3940,37 @@
       <p:sp>
         <p:nvSpPr>
           <p:cNvPr id="19" name="Google Shape;19;p12">
-            <a:extLst xmlns:a="http://schemas.openxmlformats.org/drawingml/2006/main">
+            <a:extLst>
               <a:ext uri="{FF2B5EF4-FFF2-40B4-BE49-F238E27FC236}">
                 <a16:creationId xmlns:a16="http://schemas.microsoft.com/office/drawing/2014/main" id="{5AA39D46-8B9C-4DC8-866A-F24D176F96B9}"/>
               </a:ext>
             </a:extLst>
           </p:cNvPr>
           <p:cNvSpPr>
-            <a:spLocks xmlns:a="http://schemas.openxmlformats.org/drawingml/2006/main" noGrp="1"/>
+            <a:spLocks noGrp="1"/>
           </p:cNvSpPr>
           <p:nvPr>
             <p:ph type="sldNum" idx="12"/>
           </p:nvPr>
         </p:nvSpPr>
         <p:spPr>
-          <a:xfrm xmlns:a="http://schemas.openxmlformats.org/drawingml/2006/main">
+          <a:xfrm>
             <a:off x="8472458" y="4663217"/>
             <a:ext cx="548700" cy="393600"/>
           </a:xfrm>
-          <a:prstGeom xmlns:a="http://schemas.openxmlformats.org/drawingml/2006/main" prst="rect">
+          <a:prstGeom prst="rect">
             <a:avLst/>
           </a:prstGeom>
-          <a:noFill xmlns:a="http://schemas.openxmlformats.org/drawingml/2006/main"/>
-          <a:ln xmlns:a="http://schemas.openxmlformats.org/drawingml/2006/main">
+          <a:noFill/>
+          <a:ln>
             <a:noFill/>
           </a:ln>
         </p:spPr>
         <p:txBody>
-          <a:bodyPr xmlns:a="http://schemas.openxmlformats.org/drawingml/2006/main" spcFirstLastPara="1" wrap="square" lIns="91425" tIns="91425" rIns="91425" bIns="91425" anchor="ctr">
+          <a:bodyPr spcFirstLastPara="1" wrap="square" lIns="91425" tIns="91425" rIns="91425" bIns="91425" anchor="ctr">
             <a:normAutofit/>
           </a:bodyPr>
-          <a:lstStyle xmlns:a="http://schemas.openxmlformats.org/drawingml/2006/main">
+          <a:lstStyle>
             <a:lvl1pPr marL="0" marR="0" indent="0" algn="r">
               <a:lnSpc>
                 <a:spcPct val="100000"/>
@@ -4226,7 +4197,7 @@
               </a:defRPr>
             </a:lvl9pPr>
           </a:lstStyle>
-          <a:p xmlns:a="http://schemas.openxmlformats.org/drawingml/2006/main">
+          <a:p>
             <a:pPr marL="0" lvl="0" indent="0" algn="r">
               <a:spcBef>
                 <a:spcPts val="0"/>
@@ -4245,11 +4216,14 @@
       </p:sp>
     </p:spTree>
   </p:cSld>
+  <p:clrMapOvr>
+    <a:masterClrMapping/>
+  </p:clrMapOvr>
 </p:sldLayout>
 </file>
 
 <file path=ppt/slideLayouts/slideLayout4.xml><?xml version="1.0" encoding="utf-8"?>
-<p:sldLayout xmlns:p="http://schemas.openxmlformats.org/presentationml/2006/main" matchingName="Title and two columns">
+<p:sldLayout xmlns:a="http://schemas.openxmlformats.org/drawingml/2006/main" xmlns:r="http://schemas.openxmlformats.org/officeDocument/2006/relationships" xmlns:p="http://schemas.openxmlformats.org/presentationml/2006/main" matchingName="Title and two columns">
   <p:cSld name="TITLE_AND_TWO_COLUMNS">
     <p:spTree>
       <p:nvGrpSpPr>
@@ -4258,42 +4232,47 @@
         <p:nvPr/>
       </p:nvGrpSpPr>
       <p:grpSpPr>
-        <a:xfrm xmlns:a="http://schemas.openxmlformats.org/drawingml/2006/main"/>
+        <a:xfrm>
+          <a:off x="0" y="0"/>
+          <a:ext cx="0" cy="0"/>
+          <a:chOff x="0" y="0"/>
+          <a:chExt cx="0" cy="0"/>
+        </a:xfrm>
       </p:grpSpPr>
       <p:sp>
         <p:nvSpPr>
           <p:cNvPr id="21" name="Google Shape;21;p13">
-            <a:extLst xmlns:a="http://schemas.openxmlformats.org/drawingml/2006/main">
+            <a:extLst>
               <a:ext uri="{FF2B5EF4-FFF2-40B4-BE49-F238E27FC236}">
                 <a16:creationId xmlns:a16="http://schemas.microsoft.com/office/drawing/2014/main" id="{9F160331-1D4C-4BE1-8282-0514AC5B6440}"/>
               </a:ext>
             </a:extLst>
           </p:cNvPr>
           <p:cNvSpPr>
-            <a:spLocks xmlns:a="http://schemas.openxmlformats.org/drawingml/2006/main" noGrp="1"/>
+            <a:spLocks noGrp="1"/>
           </p:cNvSpPr>
           <p:nvPr>
-            <p:ph type="title" idx="0"/>
+            <p:ph type="title"/>
           </p:nvPr>
         </p:nvSpPr>
         <p:spPr>
-          <a:xfrm xmlns:a="http://schemas.openxmlformats.org/drawingml/2006/main">
+          <a:xfrm>
             <a:off x="311700" y="445025"/>
             <a:ext cx="8520600" cy="572700"/>
           </a:xfrm>
-          <a:prstGeom xmlns:a="http://schemas.openxmlformats.org/drawingml/2006/main" prst="rect">
+          <a:prstGeom prst="rect">
             <a:avLst/>
           </a:prstGeom>
-          <a:noFill xmlns:a="http://schemas.openxmlformats.org/drawingml/2006/main"/>
-          <a:ln xmlns:a="http://schemas.openxmlformats.org/drawingml/2006/main">
+          <a:noFill/>
+          <a:ln>
             <a:noFill/>
           </a:ln>
         </p:spPr>
         <p:txBody>
-          <a:bodyPr xmlns:a="http://schemas.openxmlformats.org/drawingml/2006/main" spcFirstLastPara="1" wrap="square" lIns="91425" tIns="91425" rIns="91425" bIns="91425" anchor="t">
+          <a:bodyPr spcFirstLastPara="1" wrap="square" lIns="91425" tIns="91425" rIns="91425" bIns="91425" anchor="t">
             <a:normAutofit/>
           </a:bodyPr>
-          <a:lstStyle xmlns:a="http://schemas.openxmlformats.org/drawingml/2006/main">
+          <a:lstStyle>
             <a:lvl1pPr algn="l">
               <a:lnSpc>
                 <a:spcPct val="100000"/>
@@ -4421,7 +4400,7 @@
               <a:defRPr/>
             </a:lvl9pPr>
           </a:lstStyle>
-          <a:p xmlns:a="http://schemas.openxmlformats.org/drawingml/2006/main">
+          <a:p>
             <a:endParaRPr/>
           </a:p>
         </p:txBody>
@@ -4429,37 +4408,37 @@
       <p:sp>
         <p:nvSpPr>
           <p:cNvPr id="22" name="Google Shape;22;p13">
-            <a:extLst xmlns:a="http://schemas.openxmlformats.org/drawingml/2006/main">
+            <a:extLst>
               <a:ext uri="{FF2B5EF4-FFF2-40B4-BE49-F238E27FC236}">
                 <a16:creationId xmlns:a16="http://schemas.microsoft.com/office/drawing/2014/main" id="{27B96E0D-434C-4F4A-9AD1-28903D44BEE3}"/>
               </a:ext>
             </a:extLst>
           </p:cNvPr>
           <p:cNvSpPr>
-            <a:spLocks xmlns:a="http://schemas.openxmlformats.org/drawingml/2006/main" noGrp="1"/>
+            <a:spLocks noGrp="1"/>
           </p:cNvSpPr>
           <p:nvPr>
             <p:ph type="body" idx="1"/>
           </p:nvPr>
         </p:nvSpPr>
         <p:spPr>
-          <a:xfrm xmlns:a="http://schemas.openxmlformats.org/drawingml/2006/main">
+          <a:xfrm>
             <a:off x="311700" y="1152475"/>
             <a:ext cx="3999900" cy="3416400"/>
           </a:xfrm>
-          <a:prstGeom xmlns:a="http://schemas.openxmlformats.org/drawingml/2006/main" prst="rect">
+          <a:prstGeom prst="rect">
             <a:avLst/>
           </a:prstGeom>
-          <a:noFill xmlns:a="http://schemas.openxmlformats.org/drawingml/2006/main"/>
-          <a:ln xmlns:a="http://schemas.openxmlformats.org/drawingml/2006/main">
+          <a:noFill/>
+          <a:ln>
             <a:noFill/>
           </a:ln>
         </p:spPr>
         <p:txBody>
-          <a:bodyPr xmlns:a="http://schemas.openxmlformats.org/drawingml/2006/main" spcFirstLastPara="1" wrap="square" lIns="91425" tIns="91425" rIns="91425" bIns="91425" anchor="t">
+          <a:bodyPr spcFirstLastPara="1" wrap="square" lIns="91425" tIns="91425" rIns="91425" bIns="91425" anchor="t">
             <a:normAutofit/>
           </a:bodyPr>
-          <a:lstStyle xmlns:a="http://schemas.openxmlformats.org/drawingml/2006/main">
+          <a:lstStyle>
             <a:lvl1pPr marL="457200" indent="-317500" algn="l">
               <a:lnSpc>
                 <a:spcPct val="115000"/>
@@ -4587,7 +4566,7 @@
               <a:defRPr sz="1200"/>
             </a:lvl9pPr>
           </a:lstStyle>
-          <a:p xmlns:a="http://schemas.openxmlformats.org/drawingml/2006/main">
+          <a:p>
             <a:endParaRPr/>
           </a:p>
         </p:txBody>
@@ -4595,37 +4574,37 @@
       <p:sp>
         <p:nvSpPr>
           <p:cNvPr id="23" name="Google Shape;23;p13">
-            <a:extLst xmlns:a="http://schemas.openxmlformats.org/drawingml/2006/main">
+            <a:extLst>
               <a:ext uri="{FF2B5EF4-FFF2-40B4-BE49-F238E27FC236}">
                 <a16:creationId xmlns:a16="http://schemas.microsoft.com/office/drawing/2014/main" id="{8F575496-953A-4EA4-BCC0-4F9E627C0FB7}"/>
               </a:ext>
             </a:extLst>
           </p:cNvPr>
           <p:cNvSpPr>
-            <a:spLocks xmlns:a="http://schemas.openxmlformats.org/drawingml/2006/main" noGrp="1"/>
+            <a:spLocks noGrp="1"/>
           </p:cNvSpPr>
           <p:nvPr>
             <p:ph type="body" idx="2"/>
           </p:nvPr>
         </p:nvSpPr>
         <p:spPr>
-          <a:xfrm xmlns:a="http://schemas.openxmlformats.org/drawingml/2006/main">
+          <a:xfrm>
             <a:off x="4832400" y="1152475"/>
             <a:ext cx="3999900" cy="3416400"/>
           </a:xfrm>
-          <a:prstGeom xmlns:a="http://schemas.openxmlformats.org/drawingml/2006/main" prst="rect">
+          <a:prstGeom prst="rect">
             <a:avLst/>
           </a:prstGeom>
-          <a:noFill xmlns:a="http://schemas.openxmlformats.org/drawingml/2006/main"/>
-          <a:ln xmlns:a="http://schemas.openxmlformats.org/drawingml/2006/main">
+          <a:noFill/>
+          <a:ln>
             <a:noFill/>
           </a:ln>
         </p:spPr>
         <p:txBody>
-          <a:bodyPr xmlns:a="http://schemas.openxmlformats.org/drawingml/2006/main" spcFirstLastPara="1" wrap="square" lIns="91425" tIns="91425" rIns="91425" bIns="91425" anchor="t">
+          <a:bodyPr spcFirstLastPara="1" wrap="square" lIns="91425" tIns="91425" rIns="91425" bIns="91425" anchor="t">
             <a:normAutofit/>
           </a:bodyPr>
-          <a:lstStyle xmlns:a="http://schemas.openxmlformats.org/drawingml/2006/main">
+          <a:lstStyle>
             <a:lvl1pPr marL="457200" indent="-317500" algn="l">
               <a:lnSpc>
                 <a:spcPct val="115000"/>
@@ -4753,7 +4732,7 @@
               <a:defRPr sz="1200"/>
             </a:lvl9pPr>
           </a:lstStyle>
-          <a:p xmlns:a="http://schemas.openxmlformats.org/drawingml/2006/main">
+          <a:p>
             <a:endParaRPr/>
           </a:p>
         </p:txBody>
@@ -4761,37 +4740,37 @@
       <p:sp>
         <p:nvSpPr>
           <p:cNvPr id="24" name="Google Shape;24;p13">
-            <a:extLst xmlns:a="http://schemas.openxmlformats.org/drawingml/2006/main">
+            <a:extLst>
               <a:ext uri="{FF2B5EF4-FFF2-40B4-BE49-F238E27FC236}">
                 <a16:creationId xmlns:a16="http://schemas.microsoft.com/office/drawing/2014/main" id="{7DE46B7F-B3BE-463D-8DBF-024DB544B514}"/>
               </a:ext>
             </a:extLst>
           </p:cNvPr>
           <p:cNvSpPr>
-            <a:spLocks xmlns:a="http://schemas.openxmlformats.org/drawingml/2006/main" noGrp="1"/>
+            <a:spLocks noGrp="1"/>
           </p:cNvSpPr>
           <p:nvPr>
             <p:ph type="sldNum" idx="12"/>
           </p:nvPr>
         </p:nvSpPr>
         <p:spPr>
-          <a:xfrm xmlns:a="http://schemas.openxmlformats.org/drawingml/2006/main">
+          <a:xfrm>
             <a:off x="8472458" y="4663217"/>
             <a:ext cx="548700" cy="393600"/>
           </a:xfrm>
-          <a:prstGeom xmlns:a="http://schemas.openxmlformats.org/drawingml/2006/main" prst="rect">
+          <a:prstGeom prst="rect">
             <a:avLst/>
           </a:prstGeom>
-          <a:noFill xmlns:a="http://schemas.openxmlformats.org/drawingml/2006/main"/>
-          <a:ln xmlns:a="http://schemas.openxmlformats.org/drawingml/2006/main">
+          <a:noFill/>
+          <a:ln>
             <a:noFill/>
           </a:ln>
         </p:spPr>
         <p:txBody>
-          <a:bodyPr xmlns:a="http://schemas.openxmlformats.org/drawingml/2006/main" spcFirstLastPara="1" wrap="square" lIns="91425" tIns="91425" rIns="91425" bIns="91425" anchor="ctr">
+          <a:bodyPr spcFirstLastPara="1" wrap="square" lIns="91425" tIns="91425" rIns="91425" bIns="91425" anchor="ctr">
             <a:normAutofit/>
           </a:bodyPr>
-          <a:lstStyle xmlns:a="http://schemas.openxmlformats.org/drawingml/2006/main">
+          <a:lstStyle>
             <a:lvl1pPr marL="0" marR="0" indent="0" algn="r">
               <a:lnSpc>
                 <a:spcPct val="100000"/>
@@ -5018,7 +4997,7 @@
               </a:defRPr>
             </a:lvl9pPr>
           </a:lstStyle>
-          <a:p xmlns:a="http://schemas.openxmlformats.org/drawingml/2006/main">
+          <a:p>
             <a:pPr marL="0" lvl="0" indent="0" algn="r">
               <a:spcBef>
                 <a:spcPts val="0"/>
@@ -5037,11 +5016,14 @@
       </p:sp>
     </p:spTree>
   </p:cSld>
+  <p:clrMapOvr>
+    <a:masterClrMapping/>
+  </p:clrMapOvr>
 </p:sldLayout>
 </file>
 
 <file path=ppt/slideLayouts/slideLayout5.xml><?xml version="1.0" encoding="utf-8"?>
-<p:sldLayout xmlns:p="http://schemas.openxmlformats.org/presentationml/2006/main" matchingName="Title only" type="titleOnly">
+<p:sldLayout xmlns:a="http://schemas.openxmlformats.org/drawingml/2006/main" xmlns:r="http://schemas.openxmlformats.org/officeDocument/2006/relationships" xmlns:p="http://schemas.openxmlformats.org/presentationml/2006/main" matchingName="Title only" type="titleOnly">
   <p:cSld name="TITLE_ONLY">
     <p:spTree>
       <p:nvGrpSpPr>
@@ -5050,42 +5032,47 @@
         <p:nvPr/>
       </p:nvGrpSpPr>
       <p:grpSpPr>
-        <a:xfrm xmlns:a="http://schemas.openxmlformats.org/drawingml/2006/main"/>
+        <a:xfrm>
+          <a:off x="0" y="0"/>
+          <a:ext cx="0" cy="0"/>
+          <a:chOff x="0" y="0"/>
+          <a:chExt cx="0" cy="0"/>
+        </a:xfrm>
       </p:grpSpPr>
       <p:sp>
         <p:nvSpPr>
           <p:cNvPr id="26" name="Google Shape;26;p14">
-            <a:extLst xmlns:a="http://schemas.openxmlformats.org/drawingml/2006/main">
+            <a:extLst>
               <a:ext uri="{FF2B5EF4-FFF2-40B4-BE49-F238E27FC236}">
                 <a16:creationId xmlns:a16="http://schemas.microsoft.com/office/drawing/2014/main" id="{C27B3BE8-5E08-4860-AB87-6ABC367EC710}"/>
               </a:ext>
             </a:extLst>
           </p:cNvPr>
           <p:cNvSpPr>
-            <a:spLocks xmlns:a="http://schemas.openxmlformats.org/drawingml/2006/main" noGrp="1"/>
+            <a:spLocks noGrp="1"/>
           </p:cNvSpPr>
           <p:nvPr>
-            <p:ph type="title" idx="0"/>
+            <p:ph type="title"/>
           </p:nvPr>
         </p:nvSpPr>
         <p:spPr>
-          <a:xfrm xmlns:a="http://schemas.openxmlformats.org/drawingml/2006/main">
+          <a:xfrm>
             <a:off x="311700" y="445025"/>
             <a:ext cx="8520600" cy="572700"/>
           </a:xfrm>
-          <a:prstGeom xmlns:a="http://schemas.openxmlformats.org/drawingml/2006/main" prst="rect">
+          <a:prstGeom prst="rect">
             <a:avLst/>
           </a:prstGeom>
-          <a:noFill xmlns:a="http://schemas.openxmlformats.org/drawingml/2006/main"/>
-          <a:ln xmlns:a="http://schemas.openxmlformats.org/drawingml/2006/main">
+          <a:noFill/>
+          <a:ln>
             <a:noFill/>
           </a:ln>
         </p:spPr>
         <p:txBody>
-          <a:bodyPr xmlns:a="http://schemas.openxmlformats.org/drawingml/2006/main" spcFirstLastPara="1" wrap="square" lIns="91425" tIns="91425" rIns="91425" bIns="91425" anchor="t">
+          <a:bodyPr spcFirstLastPara="1" wrap="square" lIns="91425" tIns="91425" rIns="91425" bIns="91425" anchor="t">
             <a:normAutofit/>
           </a:bodyPr>
-          <a:lstStyle xmlns:a="http://schemas.openxmlformats.org/drawingml/2006/main">
+          <a:lstStyle>
             <a:lvl1pPr algn="l">
               <a:lnSpc>
                 <a:spcPct val="100000"/>
@@ -5213,7 +5200,7 @@
               <a:defRPr/>
             </a:lvl9pPr>
           </a:lstStyle>
-          <a:p xmlns:a="http://schemas.openxmlformats.org/drawingml/2006/main">
+          <a:p>
             <a:endParaRPr/>
           </a:p>
         </p:txBody>
@@ -5221,37 +5208,37 @@
       <p:sp>
         <p:nvSpPr>
           <p:cNvPr id="27" name="Google Shape;27;p14">
-            <a:extLst xmlns:a="http://schemas.openxmlformats.org/drawingml/2006/main">
+            <a:extLst>
               <a:ext uri="{FF2B5EF4-FFF2-40B4-BE49-F238E27FC236}">
                 <a16:creationId xmlns:a16="http://schemas.microsoft.com/office/drawing/2014/main" id="{CE6D016B-6B02-44A7-80F4-92989AD927A0}"/>
               </a:ext>
             </a:extLst>
           </p:cNvPr>
           <p:cNvSpPr>
-            <a:spLocks xmlns:a="http://schemas.openxmlformats.org/drawingml/2006/main" noGrp="1"/>
+            <a:spLocks noGrp="1"/>
           </p:cNvSpPr>
           <p:nvPr>
             <p:ph type="sldNum" idx="12"/>
           </p:nvPr>
         </p:nvSpPr>
         <p:spPr>
-          <a:xfrm xmlns:a="http://schemas.openxmlformats.org/drawingml/2006/main">
+          <a:xfrm>
             <a:off x="8472458" y="4663217"/>
             <a:ext cx="548700" cy="393600"/>
           </a:xfrm>
-          <a:prstGeom xmlns:a="http://schemas.openxmlformats.org/drawingml/2006/main" prst="rect">
+          <a:prstGeom prst="rect">
             <a:avLst/>
           </a:prstGeom>
-          <a:noFill xmlns:a="http://schemas.openxmlformats.org/drawingml/2006/main"/>
-          <a:ln xmlns:a="http://schemas.openxmlformats.org/drawingml/2006/main">
+          <a:noFill/>
+          <a:ln>
             <a:noFill/>
           </a:ln>
         </p:spPr>
         <p:txBody>
-          <a:bodyPr xmlns:a="http://schemas.openxmlformats.org/drawingml/2006/main" spcFirstLastPara="1" wrap="square" lIns="91425" tIns="91425" rIns="91425" bIns="91425" anchor="ctr">
+          <a:bodyPr spcFirstLastPara="1" wrap="square" lIns="91425" tIns="91425" rIns="91425" bIns="91425" anchor="ctr">
             <a:normAutofit/>
           </a:bodyPr>
-          <a:lstStyle xmlns:a="http://schemas.openxmlformats.org/drawingml/2006/main">
+          <a:lstStyle>
             <a:lvl1pPr marL="0" marR="0" indent="0" algn="r">
               <a:lnSpc>
                 <a:spcPct val="100000"/>
@@ -5478,7 +5465,7 @@
               </a:defRPr>
             </a:lvl9pPr>
           </a:lstStyle>
-          <a:p xmlns:a="http://schemas.openxmlformats.org/drawingml/2006/main">
+          <a:p>
             <a:pPr marL="0" lvl="0" indent="0" algn="r">
               <a:spcBef>
                 <a:spcPts val="0"/>
@@ -5497,11 +5484,14 @@
       </p:sp>
     </p:spTree>
   </p:cSld>
+  <p:clrMapOvr>
+    <a:masterClrMapping/>
+  </p:clrMapOvr>
 </p:sldLayout>
 </file>
 
 <file path=ppt/slideLayouts/slideLayout6.xml><?xml version="1.0" encoding="utf-8"?>
-<p:sldLayout xmlns:p="http://schemas.openxmlformats.org/presentationml/2006/main" matchingName="One column text">
+<p:sldLayout xmlns:a="http://schemas.openxmlformats.org/drawingml/2006/main" xmlns:r="http://schemas.openxmlformats.org/officeDocument/2006/relationships" xmlns:p="http://schemas.openxmlformats.org/presentationml/2006/main" matchingName="One column text">
   <p:cSld name="ONE_COLUMN_TEXT">
     <p:spTree>
       <p:nvGrpSpPr>
@@ -5510,42 +5500,47 @@
         <p:nvPr/>
       </p:nvGrpSpPr>
       <p:grpSpPr>
-        <a:xfrm xmlns:a="http://schemas.openxmlformats.org/drawingml/2006/main"/>
+        <a:xfrm>
+          <a:off x="0" y="0"/>
+          <a:ext cx="0" cy="0"/>
+          <a:chOff x="0" y="0"/>
+          <a:chExt cx="0" cy="0"/>
+        </a:xfrm>
       </p:grpSpPr>
       <p:sp>
         <p:nvSpPr>
           <p:cNvPr id="29" name="Google Shape;29;p15">
-            <a:extLst xmlns:a="http://schemas.openxmlformats.org/drawingml/2006/main">
+            <a:extLst>
               <a:ext uri="{FF2B5EF4-FFF2-40B4-BE49-F238E27FC236}">
                 <a16:creationId xmlns:a16="http://schemas.microsoft.com/office/drawing/2014/main" id="{64A4B75D-9A72-4427-B97D-F4E6FE72A834}"/>
               </a:ext>
             </a:extLst>
           </p:cNvPr>
           <p:cNvSpPr>
-            <a:spLocks xmlns:a="http://schemas.openxmlformats.org/drawingml/2006/main" noGrp="1"/>
+            <a:spLocks noGrp="1"/>
           </p:cNvSpPr>
           <p:nvPr>
-            <p:ph type="title" idx="0"/>
+            <p:ph type="title"/>
           </p:nvPr>
         </p:nvSpPr>
         <p:spPr>
-          <a:xfrm xmlns:a="http://schemas.openxmlformats.org/drawingml/2006/main">
+          <a:xfrm>
             <a:off x="311700" y="555600"/>
             <a:ext cx="2808000" cy="755700"/>
           </a:xfrm>
-          <a:prstGeom xmlns:a="http://schemas.openxmlformats.org/drawingml/2006/main" prst="rect">
+          <a:prstGeom prst="rect">
             <a:avLst/>
           </a:prstGeom>
-          <a:noFill xmlns:a="http://schemas.openxmlformats.org/drawingml/2006/main"/>
-          <a:ln xmlns:a="http://schemas.openxmlformats.org/drawingml/2006/main">
+          <a:noFill/>
+          <a:ln>
             <a:noFill/>
           </a:ln>
         </p:spPr>
         <p:txBody>
-          <a:bodyPr xmlns:a="http://schemas.openxmlformats.org/drawingml/2006/main" spcFirstLastPara="1" wrap="square" lIns="91425" tIns="91425" rIns="91425" bIns="91425" anchor="b">
+          <a:bodyPr spcFirstLastPara="1" wrap="square" lIns="91425" tIns="91425" rIns="91425" bIns="91425" anchor="b">
             <a:normAutofit/>
           </a:bodyPr>
-          <a:lstStyle xmlns:a="http://schemas.openxmlformats.org/drawingml/2006/main">
+          <a:lstStyle>
             <a:lvl1pPr algn="l">
               <a:lnSpc>
                 <a:spcPct val="100000"/>
@@ -5673,7 +5668,7 @@
               <a:defRPr sz="2400"/>
             </a:lvl9pPr>
           </a:lstStyle>
-          <a:p xmlns:a="http://schemas.openxmlformats.org/drawingml/2006/main">
+          <a:p>
             <a:endParaRPr/>
           </a:p>
         </p:txBody>
@@ -5681,37 +5676,37 @@
       <p:sp>
         <p:nvSpPr>
           <p:cNvPr id="30" name="Google Shape;30;p15">
-            <a:extLst xmlns:a="http://schemas.openxmlformats.org/drawingml/2006/main">
+            <a:extLst>
               <a:ext uri="{FF2B5EF4-FFF2-40B4-BE49-F238E27FC236}">
                 <a16:creationId xmlns:a16="http://schemas.microsoft.com/office/drawing/2014/main" id="{597605C6-66D0-435E-AEC6-14B9CB842898}"/>
               </a:ext>
             </a:extLst>
           </p:cNvPr>
           <p:cNvSpPr>
-            <a:spLocks xmlns:a="http://schemas.openxmlformats.org/drawingml/2006/main" noGrp="1"/>
+            <a:spLocks noGrp="1"/>
           </p:cNvSpPr>
           <p:nvPr>
             <p:ph type="body" idx="1"/>
           </p:nvPr>
         </p:nvSpPr>
         <p:spPr>
-          <a:xfrm xmlns:a="http://schemas.openxmlformats.org/drawingml/2006/main">
+          <a:xfrm>
             <a:off x="311700" y="1389600"/>
             <a:ext cx="2808000" cy="3179400"/>
           </a:xfrm>
-          <a:prstGeom xmlns:a="http://schemas.openxmlformats.org/drawingml/2006/main" prst="rect">
+          <a:prstGeom prst="rect">
             <a:avLst/>
           </a:prstGeom>
-          <a:noFill xmlns:a="http://schemas.openxmlformats.org/drawingml/2006/main"/>
-          <a:ln xmlns:a="http://schemas.openxmlformats.org/drawingml/2006/main">
+          <a:noFill/>
+          <a:ln>
             <a:noFill/>
           </a:ln>
         </p:spPr>
         <p:txBody>
-          <a:bodyPr xmlns:a="http://schemas.openxmlformats.org/drawingml/2006/main" spcFirstLastPara="1" wrap="square" lIns="91425" tIns="91425" rIns="91425" bIns="91425" anchor="t">
+          <a:bodyPr spcFirstLastPara="1" wrap="square" lIns="91425" tIns="91425" rIns="91425" bIns="91425" anchor="t">
             <a:normAutofit/>
           </a:bodyPr>
-          <a:lstStyle xmlns:a="http://schemas.openxmlformats.org/drawingml/2006/main">
+          <a:lstStyle>
             <a:lvl1pPr marL="457200" indent="-304800" algn="l">
               <a:lnSpc>
                 <a:spcPct val="115000"/>
@@ -5839,7 +5834,7 @@
               <a:defRPr sz="1200"/>
             </a:lvl9pPr>
           </a:lstStyle>
-          <a:p xmlns:a="http://schemas.openxmlformats.org/drawingml/2006/main">
+          <a:p>
             <a:endParaRPr/>
           </a:p>
         </p:txBody>
@@ -5847,37 +5842,37 @@
       <p:sp>
         <p:nvSpPr>
           <p:cNvPr id="31" name="Google Shape;31;p15">
-            <a:extLst xmlns:a="http://schemas.openxmlformats.org/drawingml/2006/main">
+            <a:extLst>
               <a:ext uri="{FF2B5EF4-FFF2-40B4-BE49-F238E27FC236}">
                 <a16:creationId xmlns:a16="http://schemas.microsoft.com/office/drawing/2014/main" id="{4B9C2FF3-5993-4AE5-9540-CA52252620DC}"/>
               </a:ext>
             </a:extLst>
           </p:cNvPr>
           <p:cNvSpPr>
-            <a:spLocks xmlns:a="http://schemas.openxmlformats.org/drawingml/2006/main" noGrp="1"/>
+            <a:spLocks noGrp="1"/>
           </p:cNvSpPr>
           <p:nvPr>
             <p:ph type="sldNum" idx="12"/>
           </p:nvPr>
         </p:nvSpPr>
         <p:spPr>
-          <a:xfrm xmlns:a="http://schemas.openxmlformats.org/drawingml/2006/main">
+          <a:xfrm>
             <a:off x="8472458" y="4663217"/>
             <a:ext cx="548700" cy="393600"/>
           </a:xfrm>
-          <a:prstGeom xmlns:a="http://schemas.openxmlformats.org/drawingml/2006/main" prst="rect">
+          <a:prstGeom prst="rect">
             <a:avLst/>
           </a:prstGeom>
-          <a:noFill xmlns:a="http://schemas.openxmlformats.org/drawingml/2006/main"/>
-          <a:ln xmlns:a="http://schemas.openxmlformats.org/drawingml/2006/main">
+          <a:noFill/>
+          <a:ln>
             <a:noFill/>
           </a:ln>
         </p:spPr>
         <p:txBody>
-          <a:bodyPr xmlns:a="http://schemas.openxmlformats.org/drawingml/2006/main" spcFirstLastPara="1" wrap="square" lIns="91425" tIns="91425" rIns="91425" bIns="91425" anchor="ctr">
+          <a:bodyPr spcFirstLastPara="1" wrap="square" lIns="91425" tIns="91425" rIns="91425" bIns="91425" anchor="ctr">
             <a:normAutofit/>
           </a:bodyPr>
-          <a:lstStyle xmlns:a="http://schemas.openxmlformats.org/drawingml/2006/main">
+          <a:lstStyle>
             <a:lvl1pPr marL="0" marR="0" indent="0" algn="r">
               <a:lnSpc>
                 <a:spcPct val="100000"/>
@@ -6104,7 +6099,7 @@
               </a:defRPr>
             </a:lvl9pPr>
           </a:lstStyle>
-          <a:p xmlns:a="http://schemas.openxmlformats.org/drawingml/2006/main">
+          <a:p>
             <a:pPr marL="0" lvl="0" indent="0" algn="r">
               <a:spcBef>
                 <a:spcPts val="0"/>
@@ -6123,11 +6118,14 @@
       </p:sp>
     </p:spTree>
   </p:cSld>
+  <p:clrMapOvr>
+    <a:masterClrMapping/>
+  </p:clrMapOvr>
 </p:sldLayout>
 </file>
 
 <file path=ppt/slideLayouts/slideLayout7.xml><?xml version="1.0" encoding="utf-8"?>
-<p:sldLayout xmlns:p="http://schemas.openxmlformats.org/presentationml/2006/main" matchingName="Main point">
+<p:sldLayout xmlns:a="http://schemas.openxmlformats.org/drawingml/2006/main" xmlns:r="http://schemas.openxmlformats.org/officeDocument/2006/relationships" xmlns:p="http://schemas.openxmlformats.org/presentationml/2006/main" matchingName="Main point">
   <p:cSld name="MAIN_POINT">
     <p:spTree>
       <p:nvGrpSpPr>
@@ -6136,42 +6134,47 @@
         <p:nvPr/>
       </p:nvGrpSpPr>
       <p:grpSpPr>
-        <a:xfrm xmlns:a="http://schemas.openxmlformats.org/drawingml/2006/main"/>
+        <a:xfrm>
+          <a:off x="0" y="0"/>
+          <a:ext cx="0" cy="0"/>
+          <a:chOff x="0" y="0"/>
+          <a:chExt cx="0" cy="0"/>
+        </a:xfrm>
       </p:grpSpPr>
       <p:sp>
         <p:nvSpPr>
           <p:cNvPr id="33" name="Google Shape;33;p16">
-            <a:extLst xmlns:a="http://schemas.openxmlformats.org/drawingml/2006/main">
+            <a:extLst>
               <a:ext uri="{FF2B5EF4-FFF2-40B4-BE49-F238E27FC236}">
                 <a16:creationId xmlns:a16="http://schemas.microsoft.com/office/drawing/2014/main" id="{F851C2B4-A231-4267-86A8-366062D7B42D}"/>
               </a:ext>
             </a:extLst>
           </p:cNvPr>
           <p:cNvSpPr>
-            <a:spLocks xmlns:a="http://schemas.openxmlformats.org/drawingml/2006/main" noGrp="1"/>
+            <a:spLocks noGrp="1"/>
           </p:cNvSpPr>
           <p:nvPr>
-            <p:ph type="title" idx="0"/>
+            <p:ph type="title"/>
           </p:nvPr>
         </p:nvSpPr>
         <p:spPr>
-          <a:xfrm xmlns:a="http://schemas.openxmlformats.org/drawingml/2006/main">
+          <a:xfrm>
             <a:off x="490250" y="450150"/>
             <a:ext cx="6367800" cy="4090800"/>
           </a:xfrm>
-          <a:prstGeom xmlns:a="http://schemas.openxmlformats.org/drawingml/2006/main" prst="rect">
+          <a:prstGeom prst="rect">
             <a:avLst/>
           </a:prstGeom>
-          <a:noFill xmlns:a="http://schemas.openxmlformats.org/drawingml/2006/main"/>
-          <a:ln xmlns:a="http://schemas.openxmlformats.org/drawingml/2006/main">
+          <a:noFill/>
+          <a:ln>
             <a:noFill/>
           </a:ln>
         </p:spPr>
         <p:txBody>
-          <a:bodyPr xmlns:a="http://schemas.openxmlformats.org/drawingml/2006/main" spcFirstLastPara="1" wrap="square" lIns="91425" tIns="91425" rIns="91425" bIns="91425" anchor="ctr">
+          <a:bodyPr spcFirstLastPara="1" wrap="square" lIns="91425" tIns="91425" rIns="91425" bIns="91425" anchor="ctr">
             <a:normAutofit/>
           </a:bodyPr>
-          <a:lstStyle xmlns:a="http://schemas.openxmlformats.org/drawingml/2006/main">
+          <a:lstStyle>
             <a:lvl1pPr algn="l">
               <a:lnSpc>
                 <a:spcPct val="100000"/>
@@ -6299,7 +6302,7 @@
               <a:defRPr sz="4800"/>
             </a:lvl9pPr>
           </a:lstStyle>
-          <a:p xmlns:a="http://schemas.openxmlformats.org/drawingml/2006/main">
+          <a:p>
             <a:endParaRPr/>
           </a:p>
         </p:txBody>
@@ -6307,37 +6310,37 @@
       <p:sp>
         <p:nvSpPr>
           <p:cNvPr id="34" name="Google Shape;34;p16">
-            <a:extLst xmlns:a="http://schemas.openxmlformats.org/drawingml/2006/main">
+            <a:extLst>
               <a:ext uri="{FF2B5EF4-FFF2-40B4-BE49-F238E27FC236}">
                 <a16:creationId xmlns:a16="http://schemas.microsoft.com/office/drawing/2014/main" id="{19C5E40F-FC11-4DFD-894B-86941C3A0F5E}"/>
               </a:ext>
             </a:extLst>
           </p:cNvPr>
           <p:cNvSpPr>
-            <a:spLocks xmlns:a="http://schemas.openxmlformats.org/drawingml/2006/main" noGrp="1"/>
+            <a:spLocks noGrp="1"/>
           </p:cNvSpPr>
           <p:nvPr>
             <p:ph type="sldNum" idx="12"/>
           </p:nvPr>
         </p:nvSpPr>
         <p:spPr>
-          <a:xfrm xmlns:a="http://schemas.openxmlformats.org/drawingml/2006/main">
+          <a:xfrm>
             <a:off x="8472458" y="4663217"/>
             <a:ext cx="548700" cy="393600"/>
           </a:xfrm>
-          <a:prstGeom xmlns:a="http://schemas.openxmlformats.org/drawingml/2006/main" prst="rect">
+          <a:prstGeom prst="rect">
             <a:avLst/>
           </a:prstGeom>
-          <a:noFill xmlns:a="http://schemas.openxmlformats.org/drawingml/2006/main"/>
-          <a:ln xmlns:a="http://schemas.openxmlformats.org/drawingml/2006/main">
+          <a:noFill/>
+          <a:ln>
             <a:noFill/>
           </a:ln>
         </p:spPr>
         <p:txBody>
-          <a:bodyPr xmlns:a="http://schemas.openxmlformats.org/drawingml/2006/main" spcFirstLastPara="1" wrap="square" lIns="91425" tIns="91425" rIns="91425" bIns="91425" anchor="ctr">
+          <a:bodyPr spcFirstLastPara="1" wrap="square" lIns="91425" tIns="91425" rIns="91425" bIns="91425" anchor="ctr">
             <a:normAutofit/>
           </a:bodyPr>
-          <a:lstStyle xmlns:a="http://schemas.openxmlformats.org/drawingml/2006/main">
+          <a:lstStyle>
             <a:lvl1pPr marL="0" marR="0" indent="0" algn="r">
               <a:lnSpc>
                 <a:spcPct val="100000"/>
@@ -6564,7 +6567,7 @@
               </a:defRPr>
             </a:lvl9pPr>
           </a:lstStyle>
-          <a:p xmlns:a="http://schemas.openxmlformats.org/drawingml/2006/main">
+          <a:p>
             <a:pPr marL="0" lvl="0" indent="0" algn="r">
               <a:spcBef>
                 <a:spcPts val="0"/>
@@ -6583,11 +6586,14 @@
       </p:sp>
     </p:spTree>
   </p:cSld>
+  <p:clrMapOvr>
+    <a:masterClrMapping/>
+  </p:clrMapOvr>
 </p:sldLayout>
 </file>
 
 <file path=ppt/slideLayouts/slideLayout8.xml><?xml version="1.0" encoding="utf-8"?>
-<p:sldLayout xmlns:p="http://schemas.openxmlformats.org/presentationml/2006/main" matchingName="Section title and description">
+<p:sldLayout xmlns:a="http://schemas.openxmlformats.org/drawingml/2006/main" xmlns:r="http://schemas.openxmlformats.org/officeDocument/2006/relationships" xmlns:p="http://schemas.openxmlformats.org/presentationml/2006/main" matchingName="Section title and description">
   <p:cSld name="SECTION_TITLE_AND_DESCRIPTION">
     <p:spTree>
       <p:nvGrpSpPr>
@@ -6596,43 +6602,48 @@
         <p:nvPr/>
       </p:nvGrpSpPr>
       <p:grpSpPr>
-        <a:xfrm xmlns:a="http://schemas.openxmlformats.org/drawingml/2006/main"/>
+        <a:xfrm>
+          <a:off x="0" y="0"/>
+          <a:ext cx="0" cy="0"/>
+          <a:chOff x="0" y="0"/>
+          <a:chExt cx="0" cy="0"/>
+        </a:xfrm>
       </p:grpSpPr>
       <p:sp>
         <p:nvSpPr>
           <p:cNvPr id="36" name="Google Shape;36;p17">
-            <a:extLst xmlns:a="http://schemas.openxmlformats.org/drawingml/2006/main">
+            <a:extLst>
               <a:ext uri="{FF2B5EF4-FFF2-40B4-BE49-F238E27FC236}">
                 <a16:creationId xmlns:a16="http://schemas.microsoft.com/office/drawing/2014/main" id="{F8427F1D-D40A-488E-8069-85A1657B906A}"/>
               </a:ext>
             </a:extLst>
           </p:cNvPr>
           <p:cNvSpPr>
-            <a:spLocks xmlns:a="http://schemas.openxmlformats.org/drawingml/2006/main" noGrp="1"/>
+            <a:spLocks noGrp="1"/>
           </p:cNvSpPr>
           <p:nvPr/>
         </p:nvSpPr>
         <p:spPr>
-          <a:xfrm xmlns:a="http://schemas.openxmlformats.org/drawingml/2006/main">
+          <a:xfrm>
             <a:off x="4572000" y="-125"/>
             <a:ext cx="4572000" cy="5143500"/>
           </a:xfrm>
-          <a:prstGeom xmlns:a="http://schemas.openxmlformats.org/drawingml/2006/main" prst="rect">
+          <a:prstGeom prst="rect">
             <a:avLst/>
           </a:prstGeom>
-          <a:solidFill xmlns:a="http://schemas.openxmlformats.org/drawingml/2006/main">
+          <a:solidFill>
             <a:schemeClr val="lt2"/>
           </a:solidFill>
-          <a:ln xmlns:a="http://schemas.openxmlformats.org/drawingml/2006/main">
+          <a:ln>
             <a:noFill/>
           </a:ln>
         </p:spPr>
         <p:txBody>
-          <a:bodyPr xmlns:a="http://schemas.openxmlformats.org/drawingml/2006/main" spcFirstLastPara="1" wrap="square" lIns="91425" tIns="91425" rIns="91425" bIns="91425" anchor="ctr">
+          <a:bodyPr spcFirstLastPara="1" wrap="square" lIns="91425" tIns="91425" rIns="91425" bIns="91425" anchor="ctr">
             <a:noAutofit/>
           </a:bodyPr>
-          <a:lstStyle xmlns:a="http://schemas.openxmlformats.org/drawingml/2006/main"/>
-          <a:p xmlns:a="http://schemas.openxmlformats.org/drawingml/2006/main">
+          <a:lstStyle/>
+          <a:p>
             <a:pPr marL="0" marR="0" lvl="0" indent="0" algn="l">
               <a:lnSpc>
                 <a:spcPct val="100000"/>
@@ -6664,37 +6675,37 @@
       <p:sp>
         <p:nvSpPr>
           <p:cNvPr id="37" name="Google Shape;37;p17">
-            <a:extLst xmlns:a="http://schemas.openxmlformats.org/drawingml/2006/main">
+            <a:extLst>
               <a:ext uri="{FF2B5EF4-FFF2-40B4-BE49-F238E27FC236}">
                 <a16:creationId xmlns:a16="http://schemas.microsoft.com/office/drawing/2014/main" id="{B72AB706-BB25-443F-8549-E092F5B46B71}"/>
               </a:ext>
             </a:extLst>
           </p:cNvPr>
           <p:cNvSpPr>
-            <a:spLocks xmlns:a="http://schemas.openxmlformats.org/drawingml/2006/main" noGrp="1"/>
+            <a:spLocks noGrp="1"/>
           </p:cNvSpPr>
           <p:nvPr>
-            <p:ph type="title" idx="0"/>
+            <p:ph type="title"/>
           </p:nvPr>
         </p:nvSpPr>
         <p:spPr>
-          <a:xfrm xmlns:a="http://schemas.openxmlformats.org/drawingml/2006/main">
+          <a:xfrm>
             <a:off x="265500" y="1233175"/>
             <a:ext cx="4045200" cy="1482300"/>
           </a:xfrm>
-          <a:prstGeom xmlns:a="http://schemas.openxmlformats.org/drawingml/2006/main" prst="rect">
+          <a:prstGeom prst="rect">
             <a:avLst/>
           </a:prstGeom>
-          <a:noFill xmlns:a="http://schemas.openxmlformats.org/drawingml/2006/main"/>
-          <a:ln xmlns:a="http://schemas.openxmlformats.org/drawingml/2006/main">
+          <a:noFill/>
+          <a:ln>
             <a:noFill/>
           </a:ln>
         </p:spPr>
         <p:txBody>
-          <a:bodyPr xmlns:a="http://schemas.openxmlformats.org/drawingml/2006/main" spcFirstLastPara="1" wrap="square" lIns="91425" tIns="91425" rIns="91425" bIns="91425" anchor="b">
+          <a:bodyPr spcFirstLastPara="1" wrap="square" lIns="91425" tIns="91425" rIns="91425" bIns="91425" anchor="b">
             <a:normAutofit/>
           </a:bodyPr>
-          <a:lstStyle xmlns:a="http://schemas.openxmlformats.org/drawingml/2006/main">
+          <a:lstStyle>
             <a:lvl1pPr algn="ctr">
               <a:lnSpc>
                 <a:spcPct val="100000"/>
@@ -6822,7 +6833,7 @@
               <a:defRPr sz="4200"/>
             </a:lvl9pPr>
           </a:lstStyle>
-          <a:p xmlns:a="http://schemas.openxmlformats.org/drawingml/2006/main">
+          <a:p>
             <a:endParaRPr/>
           </a:p>
         </p:txBody>
@@ -6830,37 +6841,37 @@
       <p:sp>
         <p:nvSpPr>
           <p:cNvPr id="38" name="Google Shape;38;p17">
-            <a:extLst xmlns:a="http://schemas.openxmlformats.org/drawingml/2006/main">
+            <a:extLst>
               <a:ext uri="{FF2B5EF4-FFF2-40B4-BE49-F238E27FC236}">
                 <a16:creationId xmlns:a16="http://schemas.microsoft.com/office/drawing/2014/main" id="{F6220DEB-C086-4B2F-9682-C73608A87FCE}"/>
               </a:ext>
             </a:extLst>
           </p:cNvPr>
           <p:cNvSpPr>
-            <a:spLocks xmlns:a="http://schemas.openxmlformats.org/drawingml/2006/main" noGrp="1"/>
+            <a:spLocks noGrp="1"/>
           </p:cNvSpPr>
           <p:nvPr>
             <p:ph type="subTitle" idx="1"/>
           </p:nvPr>
         </p:nvSpPr>
         <p:spPr>
-          <a:xfrm xmlns:a="http://schemas.openxmlformats.org/drawingml/2006/main">
+          <a:xfrm>
             <a:off x="265500" y="2803075"/>
             <a:ext cx="4045200" cy="1235100"/>
           </a:xfrm>
-          <a:prstGeom xmlns:a="http://schemas.openxmlformats.org/drawingml/2006/main" prst="rect">
+          <a:prstGeom prst="rect">
             <a:avLst/>
           </a:prstGeom>
-          <a:noFill xmlns:a="http://schemas.openxmlformats.org/drawingml/2006/main"/>
-          <a:ln xmlns:a="http://schemas.openxmlformats.org/drawingml/2006/main">
+          <a:noFill/>
+          <a:ln>
             <a:noFill/>
           </a:ln>
         </p:spPr>
         <p:txBody>
-          <a:bodyPr xmlns:a="http://schemas.openxmlformats.org/drawingml/2006/main" spcFirstLastPara="1" wrap="square" lIns="91425" tIns="91425" rIns="91425" bIns="91425" anchor="t">
+          <a:bodyPr spcFirstLastPara="1" wrap="square" lIns="91425" tIns="91425" rIns="91425" bIns="91425" anchor="t">
             <a:normAutofit/>
           </a:bodyPr>
-          <a:lstStyle xmlns:a="http://schemas.openxmlformats.org/drawingml/2006/main">
+          <a:lstStyle>
             <a:lvl1pPr algn="ctr">
               <a:lnSpc>
                 <a:spcPct val="100000"/>
@@ -6988,7 +6999,7 @@
               <a:defRPr sz="2100"/>
             </a:lvl9pPr>
           </a:lstStyle>
-          <a:p xmlns:a="http://schemas.openxmlformats.org/drawingml/2006/main">
+          <a:p>
             <a:endParaRPr/>
           </a:p>
         </p:txBody>
@@ -6996,37 +7007,37 @@
       <p:sp>
         <p:nvSpPr>
           <p:cNvPr id="39" name="Google Shape;39;p17">
-            <a:extLst xmlns:a="http://schemas.openxmlformats.org/drawingml/2006/main">
+            <a:extLst>
               <a:ext uri="{FF2B5EF4-FFF2-40B4-BE49-F238E27FC236}">
                 <a16:creationId xmlns:a16="http://schemas.microsoft.com/office/drawing/2014/main" id="{F055EF66-3D4E-4132-8FC9-CB37A1D81A54}"/>
               </a:ext>
             </a:extLst>
           </p:cNvPr>
           <p:cNvSpPr>
-            <a:spLocks xmlns:a="http://schemas.openxmlformats.org/drawingml/2006/main" noGrp="1"/>
+            <a:spLocks noGrp="1"/>
           </p:cNvSpPr>
           <p:nvPr>
             <p:ph type="body" idx="2"/>
           </p:nvPr>
         </p:nvSpPr>
         <p:spPr>
-          <a:xfrm xmlns:a="http://schemas.openxmlformats.org/drawingml/2006/main">
+          <a:xfrm>
             <a:off x="4939500" y="724075"/>
             <a:ext cx="3837000" cy="3695100"/>
           </a:xfrm>
-          <a:prstGeom xmlns:a="http://schemas.openxmlformats.org/drawingml/2006/main" prst="rect">
+          <a:prstGeom prst="rect">
             <a:avLst/>
           </a:prstGeom>
-          <a:noFill xmlns:a="http://schemas.openxmlformats.org/drawingml/2006/main"/>
-          <a:ln xmlns:a="http://schemas.openxmlformats.org/drawingml/2006/main">
+          <a:noFill/>
+          <a:ln>
             <a:noFill/>
           </a:ln>
         </p:spPr>
         <p:txBody>
-          <a:bodyPr xmlns:a="http://schemas.openxmlformats.org/drawingml/2006/main" spcFirstLastPara="1" wrap="square" lIns="91425" tIns="91425" rIns="91425" bIns="91425" anchor="ctr">
+          <a:bodyPr spcFirstLastPara="1" wrap="square" lIns="91425" tIns="91425" rIns="91425" bIns="91425" anchor="ctr">
             <a:normAutofit/>
           </a:bodyPr>
-          <a:lstStyle xmlns:a="http://schemas.openxmlformats.org/drawingml/2006/main">
+          <a:lstStyle>
             <a:lvl1pPr marL="457200" indent="-342900" algn="l">
               <a:lnSpc>
                 <a:spcPct val="115000"/>
@@ -7154,7 +7165,7 @@
               <a:defRPr/>
             </a:lvl9pPr>
           </a:lstStyle>
-          <a:p xmlns:a="http://schemas.openxmlformats.org/drawingml/2006/main">
+          <a:p>
             <a:endParaRPr/>
           </a:p>
         </p:txBody>
@@ -7162,37 +7173,37 @@
       <p:sp>
         <p:nvSpPr>
           <p:cNvPr id="40" name="Google Shape;40;p17">
-            <a:extLst xmlns:a="http://schemas.openxmlformats.org/drawingml/2006/main">
+            <a:extLst>
               <a:ext uri="{FF2B5EF4-FFF2-40B4-BE49-F238E27FC236}">
                 <a16:creationId xmlns:a16="http://schemas.microsoft.com/office/drawing/2014/main" id="{0AD6DE3B-5841-4382-B527-35B059297A09}"/>
               </a:ext>
             </a:extLst>
           </p:cNvPr>
           <p:cNvSpPr>
-            <a:spLocks xmlns:a="http://schemas.openxmlformats.org/drawingml/2006/main" noGrp="1"/>
+            <a:spLocks noGrp="1"/>
           </p:cNvSpPr>
           <p:nvPr>
             <p:ph type="sldNum" idx="12"/>
           </p:nvPr>
         </p:nvSpPr>
         <p:spPr>
-          <a:xfrm xmlns:a="http://schemas.openxmlformats.org/drawingml/2006/main">
+          <a:xfrm>
             <a:off x="8472458" y="4663217"/>
             <a:ext cx="548700" cy="393600"/>
           </a:xfrm>
-          <a:prstGeom xmlns:a="http://schemas.openxmlformats.org/drawingml/2006/main" prst="rect">
+          <a:prstGeom prst="rect">
             <a:avLst/>
           </a:prstGeom>
-          <a:noFill xmlns:a="http://schemas.openxmlformats.org/drawingml/2006/main"/>
-          <a:ln xmlns:a="http://schemas.openxmlformats.org/drawingml/2006/main">
+          <a:noFill/>
+          <a:ln>
             <a:noFill/>
           </a:ln>
         </p:spPr>
         <p:txBody>
-          <a:bodyPr xmlns:a="http://schemas.openxmlformats.org/drawingml/2006/main" spcFirstLastPara="1" wrap="square" lIns="91425" tIns="91425" rIns="91425" bIns="91425" anchor="ctr">
+          <a:bodyPr spcFirstLastPara="1" wrap="square" lIns="91425" tIns="91425" rIns="91425" bIns="91425" anchor="ctr">
             <a:normAutofit/>
           </a:bodyPr>
-          <a:lstStyle xmlns:a="http://schemas.openxmlformats.org/drawingml/2006/main">
+          <a:lstStyle>
             <a:lvl1pPr marL="0" marR="0" indent="0" algn="r">
               <a:lnSpc>
                 <a:spcPct val="100000"/>
@@ -7419,7 +7430,7 @@
               </a:defRPr>
             </a:lvl9pPr>
           </a:lstStyle>
-          <a:p xmlns:a="http://schemas.openxmlformats.org/drawingml/2006/main">
+          <a:p>
             <a:pPr marL="0" lvl="0" indent="0" algn="r">
               <a:spcBef>
                 <a:spcPts val="0"/>
@@ -7438,11 +7449,14 @@
       </p:sp>
     </p:spTree>
   </p:cSld>
+  <p:clrMapOvr>
+    <a:masterClrMapping/>
+  </p:clrMapOvr>
 </p:sldLayout>
 </file>
 
 <file path=ppt/slideLayouts/slideLayout9.xml><?xml version="1.0" encoding="utf-8"?>
-<p:sldLayout xmlns:p="http://schemas.openxmlformats.org/presentationml/2006/main" matchingName="Caption">
+<p:sldLayout xmlns:a="http://schemas.openxmlformats.org/drawingml/2006/main" xmlns:r="http://schemas.openxmlformats.org/officeDocument/2006/relationships" xmlns:p="http://schemas.openxmlformats.org/presentationml/2006/main" matchingName="Caption">
   <p:cSld name="CAPTION_ONLY">
     <p:spTree>
       <p:nvGrpSpPr>
@@ -7451,42 +7465,47 @@
         <p:nvPr/>
       </p:nvGrpSpPr>
       <p:grpSpPr>
-        <a:xfrm xmlns:a="http://schemas.openxmlformats.org/drawingml/2006/main"/>
+        <a:xfrm>
+          <a:off x="0" y="0"/>
+          <a:ext cx="0" cy="0"/>
+          <a:chOff x="0" y="0"/>
+          <a:chExt cx="0" cy="0"/>
+        </a:xfrm>
       </p:grpSpPr>
       <p:sp>
         <p:nvSpPr>
           <p:cNvPr id="42" name="Google Shape;42;p18">
-            <a:extLst xmlns:a="http://schemas.openxmlformats.org/drawingml/2006/main">
+            <a:extLst>
               <a:ext uri="{FF2B5EF4-FFF2-40B4-BE49-F238E27FC236}">
                 <a16:creationId xmlns:a16="http://schemas.microsoft.com/office/drawing/2014/main" id="{C67B4AA0-DDB3-4A1D-854C-FF975F580633}"/>
               </a:ext>
             </a:extLst>
           </p:cNvPr>
           <p:cNvSpPr>
-            <a:spLocks xmlns:a="http://schemas.openxmlformats.org/drawingml/2006/main" noGrp="1"/>
+            <a:spLocks noGrp="1"/>
           </p:cNvSpPr>
           <p:nvPr>
             <p:ph type="body" idx="1"/>
           </p:nvPr>
         </p:nvSpPr>
         <p:spPr>
-          <a:xfrm xmlns:a="http://schemas.openxmlformats.org/drawingml/2006/main">
+          <a:xfrm>
             <a:off x="311700" y="4230575"/>
             <a:ext cx="5998800" cy="605100"/>
           </a:xfrm>
-          <a:prstGeom xmlns:a="http://schemas.openxmlformats.org/drawingml/2006/main" prst="rect">
+          <a:prstGeom prst="rect">
             <a:avLst/>
           </a:prstGeom>
-          <a:noFill xmlns:a="http://schemas.openxmlformats.org/drawingml/2006/main"/>
-          <a:ln xmlns:a="http://schemas.openxmlformats.org/drawingml/2006/main">
+          <a:noFill/>
+          <a:ln>
             <a:noFill/>
           </a:ln>
         </p:spPr>
         <p:txBody>
-          <a:bodyPr xmlns:a="http://schemas.openxmlformats.org/drawingml/2006/main" spcFirstLastPara="1" wrap="square" lIns="91425" tIns="91425" rIns="91425" bIns="91425" anchor="ctr">
+          <a:bodyPr spcFirstLastPara="1" wrap="square" lIns="91425" tIns="91425" rIns="91425" bIns="91425" anchor="ctr">
             <a:normAutofit/>
           </a:bodyPr>
-          <a:lstStyle xmlns:a="http://schemas.openxmlformats.org/drawingml/2006/main">
+          <a:lstStyle>
             <a:lvl1pPr marL="457200" indent="-228600" algn="l">
               <a:lnSpc>
                 <a:spcPct val="100000"/>
@@ -7502,7 +7521,7 @@
               <a:defRPr/>
             </a:lvl1pPr>
           </a:lstStyle>
-          <a:p xmlns:a="http://schemas.openxmlformats.org/drawingml/2006/main">
+          <a:p>
             <a:endParaRPr/>
           </a:p>
         </p:txBody>
@@ -7510,37 +7529,37 @@
       <p:sp>
         <p:nvSpPr>
           <p:cNvPr id="43" name="Google Shape;43;p18">
-            <a:extLst xmlns:a="http://schemas.openxmlformats.org/drawingml/2006/main">
+            <a:extLst>
               <a:ext uri="{FF2B5EF4-FFF2-40B4-BE49-F238E27FC236}">
                 <a16:creationId xmlns:a16="http://schemas.microsoft.com/office/drawing/2014/main" id="{A0E4E66F-2569-45C5-A6CC-DA83B4356109}"/>
               </a:ext>
             </a:extLst>
           </p:cNvPr>
           <p:cNvSpPr>
-            <a:spLocks xmlns:a="http://schemas.openxmlformats.org/drawingml/2006/main" noGrp="1"/>
+            <a:spLocks noGrp="1"/>
           </p:cNvSpPr>
           <p:nvPr>
             <p:ph type="sldNum" idx="12"/>
           </p:nvPr>
         </p:nvSpPr>
         <p:spPr>
-          <a:xfrm xmlns:a="http://schemas.openxmlformats.org/drawingml/2006/main">
+          <a:xfrm>
             <a:off x="8472458" y="4663217"/>
             <a:ext cx="548700" cy="393600"/>
           </a:xfrm>
-          <a:prstGeom xmlns:a="http://schemas.openxmlformats.org/drawingml/2006/main" prst="rect">
+          <a:prstGeom prst="rect">
             <a:avLst/>
           </a:prstGeom>
-          <a:noFill xmlns:a="http://schemas.openxmlformats.org/drawingml/2006/main"/>
-          <a:ln xmlns:a="http://schemas.openxmlformats.org/drawingml/2006/main">
+          <a:noFill/>
+          <a:ln>
             <a:noFill/>
           </a:ln>
         </p:spPr>
         <p:txBody>
-          <a:bodyPr xmlns:a="http://schemas.openxmlformats.org/drawingml/2006/main" spcFirstLastPara="1" wrap="square" lIns="91425" tIns="91425" rIns="91425" bIns="91425" anchor="ctr">
+          <a:bodyPr spcFirstLastPara="1" wrap="square" lIns="91425" tIns="91425" rIns="91425" bIns="91425" anchor="ctr">
             <a:normAutofit/>
           </a:bodyPr>
-          <a:lstStyle xmlns:a="http://schemas.openxmlformats.org/drawingml/2006/main">
+          <a:lstStyle>
             <a:lvl1pPr marL="0" marR="0" indent="0" algn="r">
               <a:lnSpc>
                 <a:spcPct val="100000"/>
@@ -7767,7 +7786,7 @@
               </a:defRPr>
             </a:lvl9pPr>
           </a:lstStyle>
-          <a:p xmlns:a="http://schemas.openxmlformats.org/drawingml/2006/main">
+          <a:p>
             <a:pPr marL="0" lvl="0" indent="0" algn="r">
               <a:spcBef>
                 <a:spcPts val="0"/>
@@ -7786,17 +7805,21 @@
       </p:sp>
     </p:spTree>
   </p:cSld>
+  <p:clrMapOvr>
+    <a:masterClrMapping/>
+  </p:clrMapOvr>
 </p:sldLayout>
 </file>
 
 <file path=ppt/slideMasters/slideMaster1.xml><?xml version="1.0" encoding="utf-8"?>
-<p:sldMaster xmlns:p="http://schemas.openxmlformats.org/presentationml/2006/main">
+<p:sldMaster xmlns:a="http://schemas.openxmlformats.org/drawingml/2006/main" xmlns:r="http://schemas.openxmlformats.org/officeDocument/2006/relationships" xmlns:p="http://schemas.openxmlformats.org/presentationml/2006/main">
   <p:cSld name="simple-light-2">
     <p:bg>
       <p:bgPr>
-        <a:solidFill xmlns:a="http://schemas.openxmlformats.org/drawingml/2006/main">
+        <a:solidFill>
           <a:schemeClr val="lt1"/>
         </a:solidFill>
+        <a:effectLst/>
       </p:bgPr>
     </p:bg>
     <p:spTree>
@@ -7806,42 +7829,47 @@
         <p:nvPr/>
       </p:nvGrpSpPr>
       <p:grpSpPr>
-        <a:xfrm xmlns:a="http://schemas.openxmlformats.org/drawingml/2006/main"/>
+        <a:xfrm>
+          <a:off x="0" y="0"/>
+          <a:ext cx="0" cy="0"/>
+          <a:chOff x="0" y="0"/>
+          <a:chExt cx="0" cy="0"/>
+        </a:xfrm>
       </p:grpSpPr>
       <p:sp>
         <p:nvSpPr>
           <p:cNvPr id="6" name="Google Shape;6;p9">
-            <a:extLst xmlns:a="http://schemas.openxmlformats.org/drawingml/2006/main">
+            <a:extLst>
               <a:ext uri="{FF2B5EF4-FFF2-40B4-BE49-F238E27FC236}">
                 <a16:creationId xmlns:a16="http://schemas.microsoft.com/office/drawing/2014/main" id="{A516FE85-40E6-4988-BA0D-602BBAA34DD1}"/>
               </a:ext>
             </a:extLst>
           </p:cNvPr>
           <p:cNvSpPr>
-            <a:spLocks xmlns:a="http://schemas.openxmlformats.org/drawingml/2006/main" noGrp="1"/>
+            <a:spLocks noGrp="1"/>
           </p:cNvSpPr>
           <p:nvPr>
-            <p:ph type="title" idx="0"/>
+            <p:ph type="title"/>
           </p:nvPr>
         </p:nvSpPr>
         <p:spPr>
-          <a:xfrm xmlns:a="http://schemas.openxmlformats.org/drawingml/2006/main">
+          <a:xfrm>
             <a:off x="311700" y="445025"/>
             <a:ext cx="8520600" cy="572700"/>
           </a:xfrm>
-          <a:prstGeom xmlns:a="http://schemas.openxmlformats.org/drawingml/2006/main" prst="rect">
+          <a:prstGeom prst="rect">
             <a:avLst/>
           </a:prstGeom>
-          <a:noFill xmlns:a="http://schemas.openxmlformats.org/drawingml/2006/main"/>
-          <a:ln xmlns:a="http://schemas.openxmlformats.org/drawingml/2006/main">
+          <a:noFill/>
+          <a:ln>
             <a:noFill/>
           </a:ln>
         </p:spPr>
         <p:txBody>
-          <a:bodyPr xmlns:a="http://schemas.openxmlformats.org/drawingml/2006/main" spcFirstLastPara="1" wrap="square" lIns="91425" tIns="91425" rIns="91425" bIns="91425" anchor="t">
+          <a:bodyPr spcFirstLastPara="1" wrap="square" lIns="91425" tIns="91425" rIns="91425" bIns="91425" anchor="t">
             <a:normAutofit/>
           </a:bodyPr>
-          <a:lstStyle xmlns:a="http://schemas.openxmlformats.org/drawingml/2006/main">
+          <a:lstStyle>
             <a:lvl1pPr marR="0" algn="l">
               <a:lnSpc>
                 <a:spcPct val="100000"/>
@@ -8068,7 +8096,7 @@
               </a:defRPr>
             </a:lvl9pPr>
           </a:lstStyle>
-          <a:p xmlns:a="http://schemas.openxmlformats.org/drawingml/2006/main">
+          <a:p>
             <a:endParaRPr/>
           </a:p>
         </p:txBody>
@@ -8076,37 +8104,37 @@
       <p:sp>
         <p:nvSpPr>
           <p:cNvPr id="7" name="Google Shape;7;p9">
-            <a:extLst xmlns:a="http://schemas.openxmlformats.org/drawingml/2006/main">
+            <a:extLst>
               <a:ext uri="{FF2B5EF4-FFF2-40B4-BE49-F238E27FC236}">
                 <a16:creationId xmlns:a16="http://schemas.microsoft.com/office/drawing/2014/main" id="{1D953473-91F5-4B2B-9BCE-32C2C2FF8C63}"/>
               </a:ext>
             </a:extLst>
           </p:cNvPr>
           <p:cNvSpPr>
-            <a:spLocks xmlns:a="http://schemas.openxmlformats.org/drawingml/2006/main" noGrp="1"/>
+            <a:spLocks noGrp="1"/>
           </p:cNvSpPr>
           <p:nvPr>
             <p:ph type="body" idx="1"/>
           </p:nvPr>
         </p:nvSpPr>
         <p:spPr>
-          <a:xfrm xmlns:a="http://schemas.openxmlformats.org/drawingml/2006/main">
+          <a:xfrm>
             <a:off x="311700" y="1152475"/>
             <a:ext cx="8520600" cy="3416400"/>
           </a:xfrm>
-          <a:prstGeom xmlns:a="http://schemas.openxmlformats.org/drawingml/2006/main" prst="rect">
+          <a:prstGeom prst="rect">
             <a:avLst/>
           </a:prstGeom>
-          <a:noFill xmlns:a="http://schemas.openxmlformats.org/drawingml/2006/main"/>
-          <a:ln xmlns:a="http://schemas.openxmlformats.org/drawingml/2006/main">
+          <a:noFill/>
+          <a:ln>
             <a:noFill/>
           </a:ln>
         </p:spPr>
         <p:txBody>
-          <a:bodyPr xmlns:a="http://schemas.openxmlformats.org/drawingml/2006/main" spcFirstLastPara="1" wrap="square" lIns="91425" tIns="91425" rIns="91425" bIns="91425" anchor="t">
+          <a:bodyPr spcFirstLastPara="1" wrap="square" lIns="91425" tIns="91425" rIns="91425" bIns="91425" anchor="t">
             <a:normAutofit/>
           </a:bodyPr>
-          <a:lstStyle xmlns:a="http://schemas.openxmlformats.org/drawingml/2006/main">
+          <a:lstStyle>
             <a:lvl1pPr marL="457200" marR="0" indent="-342900" algn="l">
               <a:lnSpc>
                 <a:spcPct val="115000"/>
@@ -8333,7 +8361,7 @@
               </a:defRPr>
             </a:lvl9pPr>
           </a:lstStyle>
-          <a:p xmlns:a="http://schemas.openxmlformats.org/drawingml/2006/main">
+          <a:p>
             <a:endParaRPr/>
           </a:p>
         </p:txBody>
@@ -8341,37 +8369,37 @@
       <p:sp>
         <p:nvSpPr>
           <p:cNvPr id="8" name="Google Shape;8;p9">
-            <a:extLst xmlns:a="http://schemas.openxmlformats.org/drawingml/2006/main">
+            <a:extLst>
               <a:ext uri="{FF2B5EF4-FFF2-40B4-BE49-F238E27FC236}">
                 <a16:creationId xmlns:a16="http://schemas.microsoft.com/office/drawing/2014/main" id="{1F2A89E9-F66D-4226-BBFF-CE34F9C9D1E5}"/>
               </a:ext>
             </a:extLst>
           </p:cNvPr>
           <p:cNvSpPr>
-            <a:spLocks xmlns:a="http://schemas.openxmlformats.org/drawingml/2006/main" noGrp="1"/>
+            <a:spLocks noGrp="1"/>
           </p:cNvSpPr>
           <p:nvPr>
             <p:ph type="sldNum" idx="12"/>
           </p:nvPr>
         </p:nvSpPr>
         <p:spPr>
-          <a:xfrm xmlns:a="http://schemas.openxmlformats.org/drawingml/2006/main">
+          <a:xfrm>
             <a:off x="8472458" y="4663217"/>
             <a:ext cx="548700" cy="393600"/>
           </a:xfrm>
-          <a:prstGeom xmlns:a="http://schemas.openxmlformats.org/drawingml/2006/main" prst="rect">
+          <a:prstGeom prst="rect">
             <a:avLst/>
           </a:prstGeom>
-          <a:noFill xmlns:a="http://schemas.openxmlformats.org/drawingml/2006/main"/>
-          <a:ln xmlns:a="http://schemas.openxmlformats.org/drawingml/2006/main">
+          <a:noFill/>
+          <a:ln>
             <a:noFill/>
           </a:ln>
         </p:spPr>
         <p:txBody>
-          <a:bodyPr xmlns:a="http://schemas.openxmlformats.org/drawingml/2006/main" spcFirstLastPara="1" wrap="square" lIns="91425" tIns="91425" rIns="91425" bIns="91425" anchor="ctr">
+          <a:bodyPr spcFirstLastPara="1" wrap="square" lIns="91425" tIns="91425" rIns="91425" bIns="91425" anchor="ctr">
             <a:normAutofit/>
           </a:bodyPr>
-          <a:lstStyle xmlns:a="http://schemas.openxmlformats.org/drawingml/2006/main">
+          <a:lstStyle>
             <a:lvl1pPr marL="0" marR="0" indent="0" algn="r">
               <a:lnSpc>
                 <a:spcPct val="100000"/>
@@ -8598,7 +8626,7 @@
               </a:defRPr>
             </a:lvl9pPr>
           </a:lstStyle>
-          <a:p xmlns:a="http://schemas.openxmlformats.org/drawingml/2006/main">
+          <a:p>
             <a:pPr marL="0" lvl="0" indent="0" algn="r">
               <a:spcBef>
                 <a:spcPts val="0"/>
@@ -8619,22 +8647,22 @@
   </p:cSld>
   <p:clrMap bg1="lt1" tx1="dk1" bg2="dk2" tx2="lt2" accent1="accent1" accent2="accent2" accent3="accent3" accent4="accent4" accent5="accent5" accent6="accent6" hlink="hlink" folHlink="folHlink"/>
   <p:sldLayoutIdLst>
-    <p:sldLayoutId xmlns:r="http://schemas.openxmlformats.org/officeDocument/2006/relationships" id="2147483649" r:id="R81322e8d0ce24969"/>
-    <p:sldLayoutId xmlns:r="http://schemas.openxmlformats.org/officeDocument/2006/relationships" id="2147483650" r:id="R67416fb11a94477f"/>
-    <p:sldLayoutId xmlns:r="http://schemas.openxmlformats.org/officeDocument/2006/relationships" id="2147483651" r:id="R1c981978412b4f5e"/>
-    <p:sldLayoutId xmlns:r="http://schemas.openxmlformats.org/officeDocument/2006/relationships" id="2147483652" r:id="R04ed90b310bc4df3"/>
-    <p:sldLayoutId xmlns:r="http://schemas.openxmlformats.org/officeDocument/2006/relationships" id="2147483653" r:id="Rc90f9d40bf5e4624"/>
-    <p:sldLayoutId xmlns:r="http://schemas.openxmlformats.org/officeDocument/2006/relationships" id="2147483654" r:id="R9e37d5fad9324eb2"/>
-    <p:sldLayoutId xmlns:r="http://schemas.openxmlformats.org/officeDocument/2006/relationships" id="2147483655" r:id="R2ebcc0373e3d4501"/>
-    <p:sldLayoutId xmlns:r="http://schemas.openxmlformats.org/officeDocument/2006/relationships" id="2147483656" r:id="Rf2dd186d058e4aa6"/>
-    <p:sldLayoutId xmlns:r="http://schemas.openxmlformats.org/officeDocument/2006/relationships" id="2147483657" r:id="R2f3bbe0bbc7a413c"/>
-    <p:sldLayoutId xmlns:r="http://schemas.openxmlformats.org/officeDocument/2006/relationships" id="2147483658" r:id="R24055840a6ff45f9"/>
-    <p:sldLayoutId xmlns:r="http://schemas.openxmlformats.org/officeDocument/2006/relationships" id="2147483659" r:id="R2d798033d40143f0"/>
+    <p:sldLayoutId id="2147483649" r:id="rId1"/>
+    <p:sldLayoutId id="2147483650" r:id="rId2"/>
+    <p:sldLayoutId id="2147483651" r:id="rId3"/>
+    <p:sldLayoutId id="2147483652" r:id="rId4"/>
+    <p:sldLayoutId id="2147483653" r:id="rId5"/>
+    <p:sldLayoutId id="2147483654" r:id="rId6"/>
+    <p:sldLayoutId id="2147483655" r:id="rId7"/>
+    <p:sldLayoutId id="2147483656" r:id="rId8"/>
+    <p:sldLayoutId id="2147483657" r:id="rId9"/>
+    <p:sldLayoutId id="2147483658" r:id="rId10"/>
+    <p:sldLayoutId id="2147483659" r:id="rId11"/>
   </p:sldLayoutIdLst>
   <p:hf sldNum="0" hdr="0" ftr="0" dt="0"/>
   <p:txStyles>
     <p:titleStyle>
-      <a:lvl1pPr xmlns:a="http://schemas.openxmlformats.org/drawingml/2006/main" marR="0" algn="l">
+      <a:lvl1pPr marR="0" algn="l">
         <a:lnSpc>
           <a:spcPct val="100000"/>
         </a:lnSpc>
@@ -8658,7 +8686,7 @@
           <a:cs typeface="Arial"/>
         </a:defRPr>
       </a:lvl1pPr>
-      <a:lvl2pPr xmlns:a="http://schemas.openxmlformats.org/drawingml/2006/main" marR="0" algn="l">
+      <a:lvl2pPr marR="0" algn="l">
         <a:lnSpc>
           <a:spcPct val="100000"/>
         </a:lnSpc>
@@ -8682,7 +8710,7 @@
           <a:cs typeface="Arial"/>
         </a:defRPr>
       </a:lvl2pPr>
-      <a:lvl3pPr xmlns:a="http://schemas.openxmlformats.org/drawingml/2006/main" marR="0" algn="l">
+      <a:lvl3pPr marR="0" algn="l">
         <a:lnSpc>
           <a:spcPct val="100000"/>
         </a:lnSpc>
@@ -8706,7 +8734,7 @@
           <a:cs typeface="Arial"/>
         </a:defRPr>
       </a:lvl3pPr>
-      <a:lvl4pPr xmlns:a="http://schemas.openxmlformats.org/drawingml/2006/main" marR="0" algn="l">
+      <a:lvl4pPr marR="0" algn="l">
         <a:lnSpc>
           <a:spcPct val="100000"/>
         </a:lnSpc>
@@ -8730,7 +8758,7 @@
           <a:cs typeface="Arial"/>
         </a:defRPr>
       </a:lvl4pPr>
-      <a:lvl5pPr xmlns:a="http://schemas.openxmlformats.org/drawingml/2006/main" marR="0" algn="l">
+      <a:lvl5pPr marR="0" algn="l">
         <a:lnSpc>
           <a:spcPct val="100000"/>
         </a:lnSpc>
@@ -8754,7 +8782,7 @@
           <a:cs typeface="Arial"/>
         </a:defRPr>
       </a:lvl5pPr>
-      <a:lvl6pPr xmlns:a="http://schemas.openxmlformats.org/drawingml/2006/main" marR="0" algn="l">
+      <a:lvl6pPr marR="0" algn="l">
         <a:lnSpc>
           <a:spcPct val="100000"/>
         </a:lnSpc>
@@ -8778,7 +8806,7 @@
           <a:cs typeface="Arial"/>
         </a:defRPr>
       </a:lvl6pPr>
-      <a:lvl7pPr xmlns:a="http://schemas.openxmlformats.org/drawingml/2006/main" marR="0" algn="l">
+      <a:lvl7pPr marR="0" algn="l">
         <a:lnSpc>
           <a:spcPct val="100000"/>
         </a:lnSpc>
@@ -8802,7 +8830,7 @@
           <a:cs typeface="Arial"/>
         </a:defRPr>
       </a:lvl7pPr>
-      <a:lvl8pPr xmlns:a="http://schemas.openxmlformats.org/drawingml/2006/main" marR="0" algn="l">
+      <a:lvl8pPr marR="0" algn="l">
         <a:lnSpc>
           <a:spcPct val="100000"/>
         </a:lnSpc>
@@ -8826,7 +8854,7 @@
           <a:cs typeface="Arial"/>
         </a:defRPr>
       </a:lvl8pPr>
-      <a:lvl9pPr xmlns:a="http://schemas.openxmlformats.org/drawingml/2006/main" marR="0" algn="l">
+      <a:lvl9pPr marR="0" algn="l">
         <a:lnSpc>
           <a:spcPct val="100000"/>
         </a:lnSpc>
@@ -8852,7 +8880,7 @@
       </a:lvl9pPr>
     </p:titleStyle>
     <p:bodyStyle>
-      <a:lvl1pPr xmlns:a="http://schemas.openxmlformats.org/drawingml/2006/main" marR="0" algn="l">
+      <a:lvl1pPr marR="0" algn="l">
         <a:lnSpc>
           <a:spcPct val="100000"/>
         </a:lnSpc>
@@ -8876,7 +8904,7 @@
           <a:cs typeface="Arial"/>
         </a:defRPr>
       </a:lvl1pPr>
-      <a:lvl2pPr xmlns:a="http://schemas.openxmlformats.org/drawingml/2006/main" marR="0" algn="l">
+      <a:lvl2pPr marR="0" algn="l">
         <a:lnSpc>
           <a:spcPct val="100000"/>
         </a:lnSpc>
@@ -8900,7 +8928,7 @@
           <a:cs typeface="Arial"/>
         </a:defRPr>
       </a:lvl2pPr>
-      <a:lvl3pPr xmlns:a="http://schemas.openxmlformats.org/drawingml/2006/main" marR="0" algn="l">
+      <a:lvl3pPr marR="0" algn="l">
         <a:lnSpc>
           <a:spcPct val="100000"/>
         </a:lnSpc>
@@ -8924,7 +8952,7 @@
           <a:cs typeface="Arial"/>
         </a:defRPr>
       </a:lvl3pPr>
-      <a:lvl4pPr xmlns:a="http://schemas.openxmlformats.org/drawingml/2006/main" marR="0" algn="l">
+      <a:lvl4pPr marR="0" algn="l">
         <a:lnSpc>
           <a:spcPct val="100000"/>
         </a:lnSpc>
@@ -8948,7 +8976,7 @@
           <a:cs typeface="Arial"/>
         </a:defRPr>
       </a:lvl4pPr>
-      <a:lvl5pPr xmlns:a="http://schemas.openxmlformats.org/drawingml/2006/main" marR="0" algn="l">
+      <a:lvl5pPr marR="0" algn="l">
         <a:lnSpc>
           <a:spcPct val="100000"/>
         </a:lnSpc>
@@ -8972,7 +9000,7 @@
           <a:cs typeface="Arial"/>
         </a:defRPr>
       </a:lvl5pPr>
-      <a:lvl6pPr xmlns:a="http://schemas.openxmlformats.org/drawingml/2006/main" marR="0" algn="l">
+      <a:lvl6pPr marR="0" algn="l">
         <a:lnSpc>
           <a:spcPct val="100000"/>
         </a:lnSpc>
@@ -8996,7 +9024,7 @@
           <a:cs typeface="Arial"/>
         </a:defRPr>
       </a:lvl6pPr>
-      <a:lvl7pPr xmlns:a="http://schemas.openxmlformats.org/drawingml/2006/main" marR="0" algn="l">
+      <a:lvl7pPr marR="0" algn="l">
         <a:lnSpc>
           <a:spcPct val="100000"/>
         </a:lnSpc>
@@ -9020,7 +9048,7 @@
           <a:cs typeface="Arial"/>
         </a:defRPr>
       </a:lvl7pPr>
-      <a:lvl8pPr xmlns:a="http://schemas.openxmlformats.org/drawingml/2006/main" marR="0" algn="l">
+      <a:lvl8pPr marR="0" algn="l">
         <a:lnSpc>
           <a:spcPct val="100000"/>
         </a:lnSpc>
@@ -9044,7 +9072,7 @@
           <a:cs typeface="Arial"/>
         </a:defRPr>
       </a:lvl8pPr>
-      <a:lvl9pPr xmlns:a="http://schemas.openxmlformats.org/drawingml/2006/main" marR="0" algn="l">
+      <a:lvl9pPr marR="0" algn="l">
         <a:lnSpc>
           <a:spcPct val="100000"/>
         </a:lnSpc>
@@ -9070,7 +9098,7 @@
       </a:lvl9pPr>
     </p:bodyStyle>
     <p:otherStyle>
-      <a:lvl1pPr xmlns:a="http://schemas.openxmlformats.org/drawingml/2006/main" marR="0" algn="l">
+      <a:lvl1pPr marR="0" algn="l">
         <a:lnSpc>
           <a:spcPct val="100000"/>
         </a:lnSpc>
@@ -9094,7 +9122,7 @@
           <a:cs typeface="Arial"/>
         </a:defRPr>
       </a:lvl1pPr>
-      <a:lvl2pPr xmlns:a="http://schemas.openxmlformats.org/drawingml/2006/main" marR="0" algn="l">
+      <a:lvl2pPr marR="0" algn="l">
         <a:lnSpc>
           <a:spcPct val="100000"/>
         </a:lnSpc>
@@ -9118,7 +9146,7 @@
           <a:cs typeface="Arial"/>
         </a:defRPr>
       </a:lvl2pPr>
-      <a:lvl3pPr xmlns:a="http://schemas.openxmlformats.org/drawingml/2006/main" marR="0" algn="l">
+      <a:lvl3pPr marR="0" algn="l">
         <a:lnSpc>
           <a:spcPct val="100000"/>
         </a:lnSpc>
@@ -9142,7 +9170,7 @@
           <a:cs typeface="Arial"/>
         </a:defRPr>
       </a:lvl3pPr>
-      <a:lvl4pPr xmlns:a="http://schemas.openxmlformats.org/drawingml/2006/main" marR="0" algn="l">
+      <a:lvl4pPr marR="0" algn="l">
         <a:lnSpc>
           <a:spcPct val="100000"/>
         </a:lnSpc>
@@ -9166,7 +9194,7 @@
           <a:cs typeface="Arial"/>
         </a:defRPr>
       </a:lvl4pPr>
-      <a:lvl5pPr xmlns:a="http://schemas.openxmlformats.org/drawingml/2006/main" marR="0" algn="l">
+      <a:lvl5pPr marR="0" algn="l">
         <a:lnSpc>
           <a:spcPct val="100000"/>
         </a:lnSpc>
@@ -9190,7 +9218,7 @@
           <a:cs typeface="Arial"/>
         </a:defRPr>
       </a:lvl5pPr>
-      <a:lvl6pPr xmlns:a="http://schemas.openxmlformats.org/drawingml/2006/main" marR="0" algn="l">
+      <a:lvl6pPr marR="0" algn="l">
         <a:lnSpc>
           <a:spcPct val="100000"/>
         </a:lnSpc>
@@ -9214,7 +9242,7 @@
           <a:cs typeface="Arial"/>
         </a:defRPr>
       </a:lvl6pPr>
-      <a:lvl7pPr xmlns:a="http://schemas.openxmlformats.org/drawingml/2006/main" marR="0" algn="l">
+      <a:lvl7pPr marR="0" algn="l">
         <a:lnSpc>
           <a:spcPct val="100000"/>
         </a:lnSpc>
@@ -9238,7 +9266,7 @@
           <a:cs typeface="Arial"/>
         </a:defRPr>
       </a:lvl7pPr>
-      <a:lvl8pPr xmlns:a="http://schemas.openxmlformats.org/drawingml/2006/main" marR="0" algn="l">
+      <a:lvl8pPr marR="0" algn="l">
         <a:lnSpc>
           <a:spcPct val="100000"/>
         </a:lnSpc>
@@ -9262,7 +9290,7 @@
           <a:cs typeface="Arial"/>
         </a:defRPr>
       </a:lvl8pPr>
-      <a:lvl9pPr xmlns:a="http://schemas.openxmlformats.org/drawingml/2006/main" marR="0" algn="l">
+      <a:lvl9pPr marR="0" algn="l">
         <a:lnSpc>
           <a:spcPct val="100000"/>
         </a:lnSpc>
@@ -9291,276 +9319,8 @@
 </p:sldMaster>
 </file>
 
-<file path=ppt/slideMasters/theme/theme2.xml><?xml version="1.0" encoding="utf-8"?>
-<a:theme xmlns:a="http://schemas.openxmlformats.org/drawingml/2006/main" name="Simple Light">
-  <a:themeElements>
-    <a:clrScheme name="Simple Light">
-      <a:dk1>
-        <a:srgbClr val="000000"/>
-      </a:dk1>
-      <a:lt1>
-        <a:srgbClr val="FFFFFF"/>
-      </a:lt1>
-      <a:dk2>
-        <a:srgbClr val="595959"/>
-      </a:dk2>
-      <a:lt2>
-        <a:srgbClr val="EEEEEE"/>
-      </a:lt2>
-      <a:accent1>
-        <a:srgbClr val="4285F4"/>
-      </a:accent1>
-      <a:accent2>
-        <a:srgbClr val="212121"/>
-      </a:accent2>
-      <a:accent3>
-        <a:srgbClr val="78909C"/>
-      </a:accent3>
-      <a:accent4>
-        <a:srgbClr val="FFAB40"/>
-      </a:accent4>
-      <a:accent5>
-        <a:srgbClr val="0097A7"/>
-      </a:accent5>
-      <a:accent6>
-        <a:srgbClr val="EEFF41"/>
-      </a:accent6>
-      <a:hlink>
-        <a:srgbClr val="0097A7"/>
-      </a:hlink>
-      <a:folHlink>
-        <a:srgbClr val="0097A7"/>
-      </a:folHlink>
-    </a:clrScheme>
-    <a:fontScheme name="Office">
-      <a:majorFont>
-        <a:latin typeface="Arial"/>
-        <a:ea typeface=""/>
-        <a:cs typeface=""/>
-        <a:font script="Jpan" typeface="ＭＳ Ｐゴシック"/>
-        <a:font script="Hang" typeface="맑은 고딕"/>
-        <a:font script="Hans" typeface="宋体"/>
-        <a:font script="Hant" typeface="新細明體"/>
-        <a:font script="Arab" typeface="Times New Roman"/>
-        <a:font script="Hebr" typeface="Times New Roman"/>
-        <a:font script="Thai" typeface="Angsana New"/>
-        <a:font script="Ethi" typeface="Nyala"/>
-        <a:font script="Beng" typeface="Vrinda"/>
-        <a:font script="Gujr" typeface="Shruti"/>
-        <a:font script="Khmr" typeface="MoolBoran"/>
-        <a:font script="Knda" typeface="Tunga"/>
-        <a:font script="Guru" typeface="Raavi"/>
-        <a:font script="Cans" typeface="Euphemia"/>
-        <a:font script="Cher" typeface="Plantagenet Cherokee"/>
-        <a:font script="Yiii" typeface="Microsoft Yi Baiti"/>
-        <a:font script="Tibt" typeface="Microsoft Himalaya"/>
-        <a:font script="Thaa" typeface="MV Boli"/>
-        <a:font script="Deva" typeface="Mangal"/>
-        <a:font script="Telu" typeface="Gautami"/>
-        <a:font script="Taml" typeface="Latha"/>
-        <a:font script="Syrc" typeface="Estrangelo Edessa"/>
-        <a:font script="Orya" typeface="Kalinga"/>
-        <a:font script="Mlym" typeface="Kartika"/>
-        <a:font script="Laoo" typeface="DokChampa"/>
-        <a:font script="Sinh" typeface="Iskoola Pota"/>
-        <a:font script="Mong" typeface="Mongolian Baiti"/>
-        <a:font script="Viet" typeface="Times New Roman"/>
-        <a:font script="Uigh" typeface="Microsoft Uighur"/>
-        <a:font script="Geor" typeface="Sylfaen"/>
-      </a:majorFont>
-      <a:minorFont>
-        <a:latin typeface="Arial"/>
-        <a:ea typeface=""/>
-        <a:cs typeface=""/>
-        <a:font script="Jpan" typeface="ＭＳ Ｐゴシック"/>
-        <a:font script="Hang" typeface="맑은 고딕"/>
-        <a:font script="Hans" typeface="宋体"/>
-        <a:font script="Hant" typeface="新細明體"/>
-        <a:font script="Arab" typeface="Arial"/>
-        <a:font script="Hebr" typeface="Arial"/>
-        <a:font script="Thai" typeface="Cordia New"/>
-        <a:font script="Ethi" typeface="Nyala"/>
-        <a:font script="Beng" typeface="Vrinda"/>
-        <a:font script="Gujr" typeface="Shruti"/>
-        <a:font script="Khmr" typeface="DaunPenh"/>
-        <a:font script="Knda" typeface="Tunga"/>
-        <a:font script="Guru" typeface="Raavi"/>
-        <a:font script="Cans" typeface="Euphemia"/>
-        <a:font script="Cher" typeface="Plantagenet Cherokee"/>
-        <a:font script="Yiii" typeface="Microsoft Yi Baiti"/>
-        <a:font script="Tibt" typeface="Microsoft Himalaya"/>
-        <a:font script="Thaa" typeface="MV Boli"/>
-        <a:font script="Deva" typeface="Mangal"/>
-        <a:font script="Telu" typeface="Gautami"/>
-        <a:font script="Taml" typeface="Latha"/>
-        <a:font script="Syrc" typeface="Estrangelo Edessa"/>
-        <a:font script="Orya" typeface="Kalinga"/>
-        <a:font script="Mlym" typeface="Kartika"/>
-        <a:font script="Laoo" typeface="DokChampa"/>
-        <a:font script="Sinh" typeface="Iskoola Pota"/>
-        <a:font script="Mong" typeface="Mongolian Baiti"/>
-        <a:font script="Viet" typeface="Arial"/>
-        <a:font script="Uigh" typeface="Microsoft Uighur"/>
-        <a:font script="Geor" typeface="Sylfaen"/>
-      </a:minorFont>
-    </a:fontScheme>
-    <a:fmtScheme name="Simple Light">
-      <a:fillStyleLst>
-        <a:solidFill>
-          <a:schemeClr val="phClr"/>
-        </a:solidFill>
-        <a:gradFill rotWithShape="1">
-          <a:gsLst>
-            <a:gs pos="0">
-              <a:schemeClr val="phClr">
-                <a:tint val="50000"/>
-                <a:satMod val="300000"/>
-              </a:schemeClr>
-            </a:gs>
-            <a:gs pos="35000">
-              <a:schemeClr val="phClr">
-                <a:tint val="37000"/>
-                <a:satMod val="300000"/>
-              </a:schemeClr>
-            </a:gs>
-            <a:gs pos="100000">
-              <a:schemeClr val="phClr">
-                <a:tint val="15000"/>
-                <a:satMod val="350000"/>
-              </a:schemeClr>
-            </a:gs>
-          </a:gsLst>
-          <a:lin ang="16200000" scaled="1"/>
-        </a:gradFill>
-        <a:gradFill rotWithShape="1">
-          <a:gsLst>
-            <a:gs pos="0">
-              <a:schemeClr val="phClr">
-                <a:tint val="100000"/>
-                <a:shade val="100000"/>
-                <a:satMod val="130000"/>
-              </a:schemeClr>
-            </a:gs>
-            <a:gs pos="100000">
-              <a:schemeClr val="phClr">
-                <a:tint val="50000"/>
-                <a:shade val="100000"/>
-                <a:satMod val="350000"/>
-              </a:schemeClr>
-            </a:gs>
-          </a:gsLst>
-          <a:lin ang="16200000" scaled="0"/>
-        </a:gradFill>
-      </a:fillStyleLst>
-      <a:lnStyleLst>
-        <a:ln w="9525">
-          <a:solidFill>
-            <a:schemeClr val="phClr">
-              <a:shade val="95000"/>
-              <a:satMod val="105000"/>
-            </a:schemeClr>
-          </a:solidFill>
-          <a:prstDash val="solid"/>
-        </a:ln>
-        <a:ln w="25400">
-          <a:solidFill>
-            <a:schemeClr val="phClr"/>
-          </a:solidFill>
-          <a:prstDash val="solid"/>
-        </a:ln>
-        <a:ln w="38100">
-          <a:solidFill>
-            <a:schemeClr val="phClr"/>
-          </a:solidFill>
-          <a:prstDash val="solid"/>
-        </a:ln>
-      </a:lnStyleLst>
-      <a:effectStyleLst>
-        <a:effectStyle>
-          <a:effectLst>
-            <a:outerShdw blurRad="40000" dist="20000" dir="5400000" rotWithShape="0">
-              <a:srgbClr val="000000">
-                <a:alpha val="38000"/>
-              </a:srgbClr>
-            </a:outerShdw>
-          </a:effectLst>
-        </a:effectStyle>
-        <a:effectStyle>
-          <a:effectLst>
-            <a:outerShdw blurRad="40000" dist="23000" dir="5400000" rotWithShape="0">
-              <a:srgbClr val="000000">
-                <a:alpha val="35000"/>
-              </a:srgbClr>
-            </a:outerShdw>
-          </a:effectLst>
-        </a:effectStyle>
-        <a:effectStyle>
-          <a:effectLst>
-            <a:outerShdw blurRad="40000" dist="23000" dir="5400000" rotWithShape="0">
-              <a:srgbClr val="000000">
-                <a:alpha val="35000"/>
-              </a:srgbClr>
-            </a:outerShdw>
-          </a:effectLst>
-        </a:effectStyle>
-      </a:effectStyleLst>
-      <a:bgFillStyleLst>
-        <a:solidFill>
-          <a:schemeClr val="phClr"/>
-        </a:solidFill>
-        <a:gradFill rotWithShape="1">
-          <a:gsLst>
-            <a:gs pos="0">
-              <a:schemeClr val="phClr">
-                <a:tint val="40000"/>
-                <a:satMod val="350000"/>
-              </a:schemeClr>
-            </a:gs>
-            <a:gs pos="40000">
-              <a:schemeClr val="phClr">
-                <a:tint val="45000"/>
-                <a:shade val="99000"/>
-                <a:satMod val="350000"/>
-              </a:schemeClr>
-            </a:gs>
-            <a:gs pos="100000">
-              <a:schemeClr val="phClr">
-                <a:shade val="20000"/>
-                <a:satMod val="255000"/>
-              </a:schemeClr>
-            </a:gs>
-          </a:gsLst>
-          <a:path path="circle">
-            <a:fillToRect l="50000" t="-80000" r="50000" b="180000"/>
-          </a:path>
-        </a:gradFill>
-        <a:gradFill rotWithShape="1">
-          <a:gsLst>
-            <a:gs pos="0">
-              <a:schemeClr val="phClr">
-                <a:tint val="80000"/>
-                <a:satMod val="300000"/>
-              </a:schemeClr>
-            </a:gs>
-            <a:gs pos="100000">
-              <a:schemeClr val="phClr">
-                <a:shade val="30000"/>
-                <a:satMod val="200000"/>
-              </a:schemeClr>
-            </a:gs>
-          </a:gsLst>
-          <a:path path="circle">
-            <a:fillToRect l="50000" t="50000" r="50000" b="50000"/>
-          </a:path>
-        </a:gradFill>
-      </a:bgFillStyleLst>
-    </a:fmtScheme>
-  </a:themeElements>
-</a:theme>
-</file>
-
 <file path=ppt/slides/slide1.xml><?xml version="1.0" encoding="utf-8"?>
-<p:sld xmlns:p="http://schemas.openxmlformats.org/presentationml/2006/main">
+<p:sld xmlns:a="http://schemas.openxmlformats.org/drawingml/2006/main" xmlns:r="http://schemas.openxmlformats.org/officeDocument/2006/relationships" xmlns:p="http://schemas.openxmlformats.org/presentationml/2006/main">
   <p:cSld>
     <p:spTree>
       <p:nvGrpSpPr>
@@ -9569,34 +9329,39 @@
         <p:nvPr/>
       </p:nvGrpSpPr>
       <p:grpSpPr>
-        <a:xfrm xmlns:a="http://schemas.openxmlformats.org/drawingml/2006/main"/>
+        <a:xfrm>
+          <a:off x="0" y="0"/>
+          <a:ext cx="0" cy="0"/>
+          <a:chOff x="0" y="0"/>
+          <a:chExt cx="0" cy="0"/>
+        </a:xfrm>
       </p:grpSpPr>
       <p:sp>
         <p:nvSpPr>
           <p:cNvPr id="54" name="Google Shape;54;p1">
-            <a:extLst xmlns:a="http://schemas.openxmlformats.org/drawingml/2006/main">
+            <a:extLst>
               <a:ext uri="{FF2B5EF4-FFF2-40B4-BE49-F238E27FC236}">
                 <a16:creationId xmlns:a16="http://schemas.microsoft.com/office/drawing/2014/main" id="{23A04836-16ED-4E56-91D2-D9F806E57EC0}"/>
               </a:ext>
             </a:extLst>
           </p:cNvPr>
           <p:cNvSpPr>
-            <a:spLocks xmlns:a="http://schemas.openxmlformats.org/drawingml/2006/main" noGrp="1"/>
+            <a:spLocks noGrp="1"/>
           </p:cNvSpPr>
           <p:nvPr/>
         </p:nvSpPr>
         <p:spPr>
-          <a:xfrm xmlns:a="http://schemas.openxmlformats.org/drawingml/2006/main">
+          <a:xfrm>
             <a:off x="0" y="0"/>
             <a:ext cx="9144000" cy="5143500"/>
           </a:xfrm>
-          <a:prstGeom xmlns:a="http://schemas.openxmlformats.org/drawingml/2006/main" prst="rect">
+          <a:prstGeom prst="rect">
             <a:avLst/>
           </a:prstGeom>
-          <a:solidFill xmlns:a="http://schemas.openxmlformats.org/drawingml/2006/main">
+          <a:solidFill>
             <a:srgbClr val="004D40"/>
           </a:solidFill>
-          <a:ln xmlns:a="http://schemas.openxmlformats.org/drawingml/2006/main" w="9525" cmpd="sng">
+          <a:ln w="9525" cmpd="sng">
             <a:solidFill>
               <a:srgbClr val="595959"/>
             </a:solidFill>
@@ -9606,11 +9371,11 @@
           </a:ln>
         </p:spPr>
         <p:txBody>
-          <a:bodyPr xmlns:a="http://schemas.openxmlformats.org/drawingml/2006/main" spcFirstLastPara="1" wrap="square" lIns="91425" tIns="91425" rIns="91425" bIns="91425" anchor="ctr">
+          <a:bodyPr spcFirstLastPara="1" wrap="square" lIns="91425" tIns="91425" rIns="91425" bIns="91425" anchor="ctr">
             <a:noAutofit/>
           </a:bodyPr>
-          <a:lstStyle xmlns:a="http://schemas.openxmlformats.org/drawingml/2006/main"/>
-          <a:p xmlns:a="http://schemas.openxmlformats.org/drawingml/2006/main">
+          <a:lstStyle/>
+          <a:p>
             <a:pPr marL="0" marR="0" lvl="0" indent="0" algn="l">
               <a:lnSpc>
                 <a:spcPct val="100000"/>
@@ -9642,36 +9407,36 @@
       <p:sp>
         <p:nvSpPr>
           <p:cNvPr id="55" name="Google Shape;55;p1">
-            <a:extLst xmlns:a="http://schemas.openxmlformats.org/drawingml/2006/main">
+            <a:extLst>
               <a:ext uri="{FF2B5EF4-FFF2-40B4-BE49-F238E27FC236}">
                 <a16:creationId xmlns:a16="http://schemas.microsoft.com/office/drawing/2014/main" id="{6C85B01F-18BB-4305-92D1-2A612FE570D3}"/>
               </a:ext>
             </a:extLst>
           </p:cNvPr>
           <p:cNvSpPr>
-            <a:spLocks xmlns:a="http://schemas.openxmlformats.org/drawingml/2006/main" noGrp="1"/>
+            <a:spLocks noGrp="1"/>
           </p:cNvSpPr>
           <p:nvPr/>
         </p:nvSpPr>
         <p:spPr>
-          <a:xfrm xmlns:a="http://schemas.openxmlformats.org/drawingml/2006/main">
+          <a:xfrm>
             <a:off x="652150" y="1851250"/>
             <a:ext cx="7983300" cy="894000"/>
           </a:xfrm>
-          <a:prstGeom xmlns:a="http://schemas.openxmlformats.org/drawingml/2006/main" prst="rect">
+          <a:prstGeom prst="rect">
             <a:avLst/>
           </a:prstGeom>
-          <a:noFill xmlns:a="http://schemas.openxmlformats.org/drawingml/2006/main"/>
-          <a:ln xmlns:a="http://schemas.openxmlformats.org/drawingml/2006/main">
+          <a:noFill/>
+          <a:ln>
             <a:noFill/>
           </a:ln>
         </p:spPr>
         <p:txBody>
-          <a:bodyPr xmlns:a="http://schemas.openxmlformats.org/drawingml/2006/main" spcFirstLastPara="1" wrap="square" lIns="91425" tIns="91425" rIns="91425" bIns="91425" anchor="b">
+          <a:bodyPr spcFirstLastPara="1" wrap="square" lIns="91425" tIns="91425" rIns="91425" bIns="91425" anchor="b">
             <a:normAutofit fontScale="50947" lnSpcReduction="10000"/>
           </a:bodyPr>
-          <a:lstStyle xmlns:a="http://schemas.openxmlformats.org/drawingml/2006/main"/>
-          <a:p xmlns:a="http://schemas.openxmlformats.org/drawingml/2006/main">
+          <a:lstStyle/>
+          <a:p>
             <a:pPr marL="0" marR="0" lvl="0" indent="0" algn="ctr">
               <a:lnSpc>
                 <a:spcPct val="100000"/>
@@ -9700,50 +9465,42 @@
               </a:rPr>
               <a:t>BottleNeck — décisions ventes, stocks &amp; marge</a:t>
             </a:r>
-            <a:endParaRPr sz="5200" b="0" i="0" u="none" cap="none">
-              <a:solidFill>
-                <a:srgbClr val="F3F3F3"/>
-              </a:solidFill>
-              <a:latin typeface="Montserrat"/>
-              <a:ea typeface="Montserrat"/>
-              <a:cs typeface="Montserrat"/>
-            </a:endParaRPr>
           </a:p>
         </p:txBody>
       </p:sp>
       <p:sp>
         <p:nvSpPr>
           <p:cNvPr id="56" name="Google Shape;56;p1">
-            <a:extLst xmlns:a="http://schemas.openxmlformats.org/drawingml/2006/main">
+            <a:extLst>
               <a:ext uri="{FF2B5EF4-FFF2-40B4-BE49-F238E27FC236}">
                 <a16:creationId xmlns:a16="http://schemas.microsoft.com/office/drawing/2014/main" id="{15E400E4-32AA-40DC-8107-E46D8CD4745A}"/>
               </a:ext>
             </a:extLst>
           </p:cNvPr>
           <p:cNvSpPr>
-            <a:spLocks xmlns:a="http://schemas.openxmlformats.org/drawingml/2006/main" noGrp="1"/>
+            <a:spLocks noGrp="1"/>
           </p:cNvSpPr>
           <p:nvPr/>
         </p:nvSpPr>
         <p:spPr>
-          <a:xfrm xmlns:a="http://schemas.openxmlformats.org/drawingml/2006/main">
+          <a:xfrm>
             <a:off x="4968964" y="3582148"/>
             <a:ext cx="3807680" cy="534150"/>
           </a:xfrm>
-          <a:prstGeom xmlns:a="http://schemas.openxmlformats.org/drawingml/2006/main" prst="rect">
+          <a:prstGeom prst="rect">
             <a:avLst/>
           </a:prstGeom>
-          <a:noFill xmlns:a="http://schemas.openxmlformats.org/drawingml/2006/main"/>
-          <a:ln xmlns:a="http://schemas.openxmlformats.org/drawingml/2006/main">
+          <a:noFill/>
+          <a:ln>
             <a:noFill/>
           </a:ln>
         </p:spPr>
         <p:txBody>
-          <a:bodyPr xmlns:a="http://schemas.openxmlformats.org/drawingml/2006/main" spcFirstLastPara="1" wrap="square" lIns="91425" tIns="91425" rIns="91425" bIns="91425" anchor="t">
-            <a:normAutofit fontScale="100000"/>
+          <a:bodyPr spcFirstLastPara="1" wrap="square" lIns="91425" tIns="91425" rIns="91425" bIns="91425" anchor="t">
+            <a:normAutofit/>
           </a:bodyPr>
-          <a:lstStyle xmlns:a="http://schemas.openxmlformats.org/drawingml/2006/main"/>
-          <a:p xmlns:a="http://schemas.openxmlformats.org/drawingml/2006/main">
+          <a:lstStyle/>
+          <a:p>
             <a:r>
               <a:rPr>
                 <a:solidFill>
@@ -9758,82 +9515,111 @@
       <p:sp>
         <p:nvSpPr>
           <p:cNvPr id="57" name="Google Shape;57;p1">
-            <a:extLst xmlns:a="http://schemas.openxmlformats.org/drawingml/2006/main">
+            <a:extLst>
               <a:ext uri="{FF2B5EF4-FFF2-40B4-BE49-F238E27FC236}">
                 <a16:creationId xmlns:a16="http://schemas.microsoft.com/office/drawing/2014/main" id="{BBC34D89-DF31-426B-9032-173ABB3BD3C7}"/>
               </a:ext>
             </a:extLst>
           </p:cNvPr>
           <p:cNvSpPr>
-            <a:spLocks xmlns:a="http://schemas.openxmlformats.org/drawingml/2006/main" noGrp="1"/>
+            <a:spLocks noGrp="1"/>
           </p:cNvSpPr>
           <p:nvPr/>
         </p:nvSpPr>
         <p:spPr>
-          <a:xfrm xmlns:a="http://schemas.openxmlformats.org/drawingml/2006/main">
+          <a:xfrm>
             <a:off x="4968964" y="3975103"/>
             <a:ext cx="3807680" cy="534150"/>
           </a:xfrm>
-          <a:prstGeom xmlns:a="http://schemas.openxmlformats.org/drawingml/2006/main" prst="rect">
+          <a:prstGeom prst="rect">
             <a:avLst/>
           </a:prstGeom>
-          <a:noFill xmlns:a="http://schemas.openxmlformats.org/drawingml/2006/main"/>
-          <a:ln xmlns:a="http://schemas.openxmlformats.org/drawingml/2006/main">
+          <a:noFill/>
+          <a:ln>
             <a:noFill/>
           </a:ln>
         </p:spPr>
         <p:txBody>
-          <a:bodyPr xmlns:a="http://schemas.openxmlformats.org/drawingml/2006/main" spcFirstLastPara="1" wrap="square" lIns="91425" tIns="91425" rIns="91425" bIns="91425" anchor="t">
-            <a:normAutofit fontScale="100000"/>
+          <a:bodyPr spcFirstLastPara="1" wrap="square" lIns="91425" tIns="91425" rIns="91425" bIns="91425" anchor="t">
+            <a:normAutofit/>
           </a:bodyPr>
-          <a:lstStyle xmlns:a="http://schemas.openxmlformats.org/drawingml/2006/main"/>
-          <a:p xmlns:a="http://schemas.openxmlformats.org/drawingml/2006/main">
+          <a:lstStyle/>
+          <a:p>
             <a:r>
-              <a:rPr>
+              <a:rPr dirty="0">
                 <a:solidFill>
                   <a:schemeClr val="bg1"/>
                 </a:solidFill>
               </a:rPr>
-              <a:t>Ventes d’octobre · Stock au 31 octobre</a:t>
+              <a:t>Ventes </a:t>
             </a:r>
+            <a:r>
+              <a:rPr dirty="0" err="1">
+                <a:solidFill>
+                  <a:schemeClr val="bg1"/>
+                </a:solidFill>
+              </a:rPr>
+              <a:t>d’octobre</a:t>
+            </a:r>
+            <a:r>
+              <a:rPr dirty="0">
+                <a:solidFill>
+                  <a:schemeClr val="bg1"/>
+                </a:solidFill>
+              </a:rPr>
+              <a:t> · Stock au 31 </a:t>
+            </a:r>
+            <a:r>
+              <a:rPr dirty="0" err="1">
+                <a:solidFill>
+                  <a:schemeClr val="bg1"/>
+                </a:solidFill>
+              </a:rPr>
+              <a:t>octobre</a:t>
+            </a:r>
+            <a:endParaRPr dirty="0">
+              <a:solidFill>
+                <a:schemeClr val="bg1"/>
+              </a:solidFill>
+            </a:endParaRPr>
           </a:p>
         </p:txBody>
       </p:sp>
       <p:sp>
         <p:nvSpPr>
           <p:cNvPr id="58" name="Google Shape;58;p1">
-            <a:extLst xmlns:a="http://schemas.openxmlformats.org/drawingml/2006/main">
+            <a:extLst>
               <a:ext uri="{FF2B5EF4-FFF2-40B4-BE49-F238E27FC236}">
                 <a16:creationId xmlns:a16="http://schemas.microsoft.com/office/drawing/2014/main" id="{7078213F-B024-45FA-82D6-4C6CD4F9F4B1}"/>
               </a:ext>
             </a:extLst>
           </p:cNvPr>
           <p:cNvSpPr>
-            <a:spLocks xmlns:a="http://schemas.openxmlformats.org/drawingml/2006/main" noGrp="1"/>
+            <a:spLocks noGrp="1"/>
           </p:cNvSpPr>
           <p:nvPr/>
         </p:nvSpPr>
         <p:spPr>
-          <a:xfrm xmlns:a="http://schemas.openxmlformats.org/drawingml/2006/main">
-            <a:off x="4968964" y="4368058"/>
+          <a:xfrm>
+            <a:off x="4968964" y="4593883"/>
             <a:ext cx="3807680" cy="534150"/>
           </a:xfrm>
-          <a:prstGeom xmlns:a="http://schemas.openxmlformats.org/drawingml/2006/main" prst="rect">
+          <a:prstGeom prst="rect">
             <a:avLst/>
           </a:prstGeom>
-          <a:noFill xmlns:a="http://schemas.openxmlformats.org/drawingml/2006/main"/>
-          <a:ln xmlns:a="http://schemas.openxmlformats.org/drawingml/2006/main">
+          <a:noFill/>
+          <a:ln>
             <a:noFill/>
           </a:ln>
         </p:spPr>
         <p:txBody>
-          <a:bodyPr xmlns:a="http://schemas.openxmlformats.org/drawingml/2006/main" spcFirstLastPara="1" wrap="square" lIns="91425" tIns="91425" rIns="91425" bIns="91425" anchor="t">
-            <a:normAutofit fontScale="100000"/>
+          <a:bodyPr spcFirstLastPara="1" wrap="square" lIns="91425" tIns="91425" rIns="91425" bIns="91425" anchor="t">
+            <a:normAutofit/>
           </a:bodyPr>
-          <a:lstStyle xmlns:a="http://schemas.openxmlformats.org/drawingml/2006/main"/>
-          <a:p xmlns:a="http://schemas.openxmlformats.org/drawingml/2006/main">
+          <a:lstStyle/>
+          <a:p>
             <a:r>
-              <a:rPr>
+              <a:rPr dirty="0">
                 <a:solidFill>
                   <a:schemeClr val="bg1"/>
                 </a:solidFill>
@@ -9850,11 +9636,14 @@
       </p:ext>
     </p:extLst>
   </p:cSld>
+  <p:clrMapOvr>
+    <a:masterClrMapping/>
+  </p:clrMapOvr>
 </p:sld>
 </file>
 
 <file path=ppt/slides/slide10.xml><?xml version="1.0" encoding="utf-8"?>
-<p:sld xmlns:p="http://schemas.openxmlformats.org/presentationml/2006/main">
+<p:sld xmlns:a="http://schemas.openxmlformats.org/drawingml/2006/main" xmlns:r="http://schemas.openxmlformats.org/officeDocument/2006/relationships" xmlns:p="http://schemas.openxmlformats.org/presentationml/2006/main">
   <p:cSld>
     <p:spTree>
       <p:nvGrpSpPr>
@@ -9863,29 +9652,34 @@
         <p:nvPr/>
       </p:nvGrpSpPr>
       <p:grpSpPr>
-        <a:xfrm xmlns:a="http://schemas.openxmlformats.org/drawingml/2006/main"/>
+        <a:xfrm>
+          <a:off x="0" y="0"/>
+          <a:ext cx="0" cy="0"/>
+          <a:chOff x="0" y="0"/>
+          <a:chExt cx="0" cy="0"/>
+        </a:xfrm>
       </p:grpSpPr>
       <p:sp>
         <p:nvSpPr>
           <p:cNvPr id="2" name="Title 1">
-            <a:extLst xmlns:a="http://schemas.openxmlformats.org/drawingml/2006/main">
+            <a:extLst>
               <a:ext uri="{FF2B5EF4-FFF2-40B4-BE49-F238E27FC236}">
                 <a16:creationId xmlns:a16="http://schemas.microsoft.com/office/drawing/2014/main" id="{BE63A07F-374C-411B-A593-D8DC22A5F47D}"/>
               </a:ext>
             </a:extLst>
           </p:cNvPr>
           <p:cNvSpPr>
-            <a:spLocks xmlns:a="http://schemas.openxmlformats.org/drawingml/2006/main" noGrp="1"/>
+            <a:spLocks noGrp="1"/>
           </p:cNvSpPr>
           <p:nvPr>
-            <p:ph type="title" idx="0"/>
+            <p:ph type="title"/>
           </p:nvPr>
         </p:nvSpPr>
         <p:spPr/>
         <p:txBody>
-          <a:bodyPr xmlns:a="http://schemas.openxmlformats.org/drawingml/2006/main"/>
-          <a:lstStyle xmlns:a="http://schemas.openxmlformats.org/drawingml/2006/main"/>
-          <a:p xmlns:a="http://schemas.openxmlformats.org/drawingml/2006/main">
+          <a:bodyPr/>
+          <a:lstStyle/>
+          <a:p>
             <a:r>
               <a:t>La marge est saine, sauf un coût à confirmer</a:t>
             </a:r>
@@ -9895,14 +9689,14 @@
       <p:sp>
         <p:nvSpPr>
           <p:cNvPr id="3" name="Text Placeholder 2">
-            <a:extLst xmlns:a="http://schemas.openxmlformats.org/drawingml/2006/main">
+            <a:extLst>
               <a:ext uri="{FF2B5EF4-FFF2-40B4-BE49-F238E27FC236}">
                 <a16:creationId xmlns:a16="http://schemas.microsoft.com/office/drawing/2014/main" id="{A10C1B46-E606-4A2C-8FA3-4E44AA5982F5}"/>
               </a:ext>
             </a:extLst>
           </p:cNvPr>
           <p:cNvSpPr>
-            <a:spLocks xmlns:a="http://schemas.openxmlformats.org/drawingml/2006/main" noGrp="1"/>
+            <a:spLocks noGrp="1"/>
           </p:cNvSpPr>
           <p:nvPr>
             <p:ph type="body" idx="1"/>
@@ -9910,9 +9704,9 @@
         </p:nvSpPr>
         <p:spPr/>
         <p:txBody>
-          <a:bodyPr xmlns:a="http://schemas.openxmlformats.org/drawingml/2006/main"/>
-          <a:lstStyle xmlns:a="http://schemas.openxmlformats.org/drawingml/2006/main"/>
-          <a:p xmlns:a="http://schemas.openxmlformats.org/drawingml/2006/main">
+          <a:bodyPr/>
+          <a:lstStyle/>
+          <a:p>
             <a:pPr>
               <a:buNone/>
               <a:defRPr sz="1800"/>
@@ -9922,7 +9716,7 @@
               <a:t>44 661 € HT de marge brute ; taux de marque pondéré 37,3 %.</a:t>
             </a:r>
           </a:p>
-          <a:p xmlns:a="http://schemas.openxmlformats.org/drawingml/2006/main">
+          <a:p>
             <a:pPr>
               <a:buNone/>
               <a:defRPr sz="1800"/>
@@ -9936,46 +9730,46 @@
       </p:sp>
       <p:pic>
         <p:nvPicPr>
-          <p:cNvPr id="10" name=""/>
+          <p:cNvPr id="10" name="Image 9"/>
           <p:cNvPicPr>
-            <a:picLocks xmlns:a="http://schemas.openxmlformats.org/drawingml/2006/main" noChangeAspect="1"/>
+            <a:picLocks noChangeAspect="1"/>
           </p:cNvPicPr>
           <p:nvPr/>
         </p:nvPicPr>
         <p:blipFill>
-          <a:blip xmlns:r="http://schemas.openxmlformats.org/officeDocument/2006/relationships" xmlns:a="http://schemas.openxmlformats.org/drawingml/2006/main" r:embed="Ra9222c2e96e9486c"/>
-          <a:srcRect xmlns:a="http://schemas.openxmlformats.org/drawingml/2006/main" l="0" t="0" r="0" b="0"/>
-          <a:stretch xmlns:a="http://schemas.openxmlformats.org/drawingml/2006/main"/>
+          <a:blip r:embed="rId3"/>
+          <a:srcRect/>
+          <a:stretch/>
         </p:blipFill>
         <p:spPr>
-          <a:xfrm xmlns:a="http://schemas.openxmlformats.org/drawingml/2006/main" flipH="0" flipV="0">
+          <a:xfrm>
             <a:off x="333375" y="2905125"/>
             <a:ext cx="4000500" cy="2000250"/>
           </a:xfrm>
-          <a:prstGeom xmlns:a="http://schemas.openxmlformats.org/drawingml/2006/main" prst="rect">
+          <a:prstGeom prst="rect">
             <a:avLst/>
           </a:prstGeom>
         </p:spPr>
       </p:pic>
       <p:pic>
         <p:nvPicPr>
-          <p:cNvPr id="11" name=""/>
+          <p:cNvPr id="11" name="Image 10"/>
           <p:cNvPicPr>
-            <a:picLocks xmlns:a="http://schemas.openxmlformats.org/drawingml/2006/main" noChangeAspect="1"/>
+            <a:picLocks noChangeAspect="1"/>
           </p:cNvPicPr>
           <p:nvPr/>
         </p:nvPicPr>
         <p:blipFill>
-          <a:blip xmlns:r="http://schemas.openxmlformats.org/officeDocument/2006/relationships" xmlns:a="http://schemas.openxmlformats.org/drawingml/2006/main" r:embed="Rc1fd4caa80fc4948"/>
-          <a:srcRect xmlns:a="http://schemas.openxmlformats.org/drawingml/2006/main" l="0" t="0" r="0" b="0"/>
-          <a:stretch xmlns:a="http://schemas.openxmlformats.org/drawingml/2006/main"/>
+          <a:blip r:embed="rId4"/>
+          <a:srcRect/>
+          <a:stretch/>
         </p:blipFill>
         <p:spPr>
-          <a:xfrm xmlns:a="http://schemas.openxmlformats.org/drawingml/2006/main" flipH="0" flipV="0">
+          <a:xfrm>
             <a:off x="4762500" y="1381125"/>
             <a:ext cx="3714750" cy="2238375"/>
           </a:xfrm>
-          <a:prstGeom xmlns:a="http://schemas.openxmlformats.org/drawingml/2006/main" prst="rect">
+          <a:prstGeom prst="rect">
             <a:avLst/>
           </a:prstGeom>
         </p:spPr>
@@ -9987,11 +9781,14 @@
       </p:ext>
     </p:extLst>
   </p:cSld>
+  <p:clrMapOvr>
+    <a:masterClrMapping/>
+  </p:clrMapOvr>
 </p:sld>
 </file>
 
 <file path=ppt/slides/slide11.xml><?xml version="1.0" encoding="utf-8"?>
-<p:sld xmlns:p="http://schemas.openxmlformats.org/presentationml/2006/main">
+<p:sld xmlns:a="http://schemas.openxmlformats.org/drawingml/2006/main" xmlns:r="http://schemas.openxmlformats.org/officeDocument/2006/relationships" xmlns:p="http://schemas.openxmlformats.org/presentationml/2006/main">
   <p:cSld>
     <p:spTree>
       <p:nvGrpSpPr>
@@ -10000,29 +9797,34 @@
         <p:nvPr/>
       </p:nvGrpSpPr>
       <p:grpSpPr>
-        <a:xfrm xmlns:a="http://schemas.openxmlformats.org/drawingml/2006/main"/>
+        <a:xfrm>
+          <a:off x="0" y="0"/>
+          <a:ext cx="0" cy="0"/>
+          <a:chOff x="0" y="0"/>
+          <a:chExt cx="0" cy="0"/>
+        </a:xfrm>
       </p:grpSpPr>
       <p:sp>
         <p:nvSpPr>
           <p:cNvPr id="2" name="Title 1">
-            <a:extLst xmlns:a="http://schemas.openxmlformats.org/drawingml/2006/main">
+            <a:extLst>
               <a:ext uri="{FF2B5EF4-FFF2-40B4-BE49-F238E27FC236}">
                 <a16:creationId xmlns:a16="http://schemas.microsoft.com/office/drawing/2014/main" id="{7767515A-BC83-41F5-8E42-D1AB66B89CFF}"/>
               </a:ext>
             </a:extLst>
           </p:cNvPr>
           <p:cNvSpPr>
-            <a:spLocks xmlns:a="http://schemas.openxmlformats.org/drawingml/2006/main" noGrp="1"/>
+            <a:spLocks noGrp="1"/>
           </p:cNvSpPr>
           <p:nvPr>
-            <p:ph type="title" idx="0"/>
+            <p:ph type="title"/>
           </p:nvPr>
         </p:nvSpPr>
         <p:spPr/>
         <p:txBody>
-          <a:bodyPr xmlns:a="http://schemas.openxmlformats.org/drawingml/2006/main"/>
-          <a:lstStyle xmlns:a="http://schemas.openxmlformats.org/drawingml/2006/main"/>
-          <a:p xmlns:a="http://schemas.openxmlformats.org/drawingml/2006/main">
+          <a:bodyPr/>
+          <a:lstStyle/>
+          <a:p>
             <a:r>
               <a:rPr sz="3000"/>
               <a:t>Prix–volumes : association, pas causalité</a:t>
@@ -10033,14 +9835,14 @@
       <p:sp>
         <p:nvSpPr>
           <p:cNvPr id="3" name="Text Placeholder 2">
-            <a:extLst xmlns:a="http://schemas.openxmlformats.org/drawingml/2006/main">
+            <a:extLst>
               <a:ext uri="{FF2B5EF4-FFF2-40B4-BE49-F238E27FC236}">
                 <a16:creationId xmlns:a16="http://schemas.microsoft.com/office/drawing/2014/main" id="{882A233F-AD1D-4346-B0D5-F8BAF7348DD4}"/>
               </a:ext>
             </a:extLst>
           </p:cNvPr>
           <p:cNvSpPr>
-            <a:spLocks xmlns:a="http://schemas.openxmlformats.org/drawingml/2006/main" noGrp="1"/>
+            <a:spLocks noGrp="1"/>
           </p:cNvSpPr>
           <p:nvPr>
             <p:ph type="body" idx="1"/>
@@ -10048,9 +9850,9 @@
         </p:nvSpPr>
         <p:spPr/>
         <p:txBody>
-          <a:bodyPr xmlns:a="http://schemas.openxmlformats.org/drawingml/2006/main"/>
-          <a:lstStyle xmlns:a="http://schemas.openxmlformats.org/drawingml/2006/main"/>
-          <a:p xmlns:a="http://schemas.openxmlformats.org/drawingml/2006/main">
+          <a:bodyPr/>
+          <a:lstStyle/>
+          <a:p>
             <a:pPr>
               <a:buNone/>
               <a:defRPr sz="1800"/>
@@ -10060,7 +9862,7 @@
               <a:t>Spearman ρ = −0,70 sur octobre.</a:t>
             </a:r>
           </a:p>
-          <a:p xmlns:a="http://schemas.openxmlformats.org/drawingml/2006/main">
+          <a:p>
             <a:pPr>
               <a:buNone/>
               <a:defRPr sz="1800"/>
@@ -10074,23 +9876,23 @@
       </p:sp>
       <p:pic>
         <p:nvPicPr>
-          <p:cNvPr id="7" name=""/>
+          <p:cNvPr id="7" name="Image 6"/>
           <p:cNvPicPr>
-            <a:picLocks xmlns:a="http://schemas.openxmlformats.org/drawingml/2006/main" noChangeAspect="1"/>
+            <a:picLocks noChangeAspect="1"/>
           </p:cNvPicPr>
           <p:nvPr/>
         </p:nvPicPr>
         <p:blipFill>
-          <a:blip xmlns:r="http://schemas.openxmlformats.org/officeDocument/2006/relationships" xmlns:a="http://schemas.openxmlformats.org/drawingml/2006/main" r:embed="Rad0a0ee676a74df1"/>
-          <a:srcRect xmlns:a="http://schemas.openxmlformats.org/drawingml/2006/main" l="0" t="0" r="0" b="0"/>
-          <a:stretch xmlns:a="http://schemas.openxmlformats.org/drawingml/2006/main"/>
+          <a:blip r:embed="rId3"/>
+          <a:srcRect/>
+          <a:stretch/>
         </p:blipFill>
         <p:spPr>
-          <a:xfrm xmlns:a="http://schemas.openxmlformats.org/drawingml/2006/main" flipH="0" flipV="0">
+          <a:xfrm>
             <a:off x="952500" y="2095500"/>
             <a:ext cx="7239000" cy="2714625"/>
           </a:xfrm>
-          <a:prstGeom xmlns:a="http://schemas.openxmlformats.org/drawingml/2006/main" prst="rect">
+          <a:prstGeom prst="rect">
             <a:avLst/>
           </a:prstGeom>
         </p:spPr>
@@ -10102,11 +9904,14 @@
       </p:ext>
     </p:extLst>
   </p:cSld>
+  <p:clrMapOvr>
+    <a:masterClrMapping/>
+  </p:clrMapOvr>
 </p:sld>
 </file>
 
 <file path=ppt/slides/slide12.xml><?xml version="1.0" encoding="utf-8"?>
-<p:sld xmlns:p="http://schemas.openxmlformats.org/presentationml/2006/main">
+<p:sld xmlns:a="http://schemas.openxmlformats.org/drawingml/2006/main" xmlns:r="http://schemas.openxmlformats.org/officeDocument/2006/relationships" xmlns:p="http://schemas.openxmlformats.org/presentationml/2006/main">
   <p:cSld>
     <p:spTree>
       <p:nvGrpSpPr>
@@ -10115,34 +9920,39 @@
         <p:nvPr/>
       </p:nvGrpSpPr>
       <p:grpSpPr>
-        <a:xfrm xmlns:a="http://schemas.openxmlformats.org/drawingml/2006/main"/>
+        <a:xfrm>
+          <a:off x="0" y="0"/>
+          <a:ext cx="0" cy="0"/>
+          <a:chOff x="0" y="0"/>
+          <a:chExt cx="0" cy="0"/>
+        </a:xfrm>
       </p:grpSpPr>
       <p:sp>
         <p:nvSpPr>
           <p:cNvPr id="95" name="Google Shape;95;g13f9e8f1567_0_0">
-            <a:extLst xmlns:a="http://schemas.openxmlformats.org/drawingml/2006/main">
+            <a:extLst>
               <a:ext uri="{FF2B5EF4-FFF2-40B4-BE49-F238E27FC236}">
                 <a16:creationId xmlns:a16="http://schemas.microsoft.com/office/drawing/2014/main" id="{CF16D420-20FD-4222-B1D2-B06A18E7035A}"/>
               </a:ext>
             </a:extLst>
           </p:cNvPr>
           <p:cNvSpPr>
-            <a:spLocks xmlns:a="http://schemas.openxmlformats.org/drawingml/2006/main" noGrp="1"/>
+            <a:spLocks noGrp="1"/>
           </p:cNvSpPr>
           <p:nvPr/>
         </p:nvSpPr>
         <p:spPr>
-          <a:xfrm xmlns:a="http://schemas.openxmlformats.org/drawingml/2006/main">
+          <a:xfrm>
             <a:off x="0" y="0"/>
             <a:ext cx="9144000" cy="1390200"/>
           </a:xfrm>
-          <a:prstGeom xmlns:a="http://schemas.openxmlformats.org/drawingml/2006/main" prst="rect">
+          <a:prstGeom prst="rect">
             <a:avLst/>
           </a:prstGeom>
-          <a:solidFill xmlns:a="http://schemas.openxmlformats.org/drawingml/2006/main">
+          <a:solidFill>
             <a:srgbClr val="004D40"/>
           </a:solidFill>
-          <a:ln xmlns:a="http://schemas.openxmlformats.org/drawingml/2006/main" w="9525" cmpd="sng">
+          <a:ln w="9525" cmpd="sng">
             <a:solidFill>
               <a:srgbClr val="FFFFFF"/>
             </a:solidFill>
@@ -10152,11 +9962,11 @@
           </a:ln>
         </p:spPr>
         <p:txBody>
-          <a:bodyPr xmlns:a="http://schemas.openxmlformats.org/drawingml/2006/main" spcFirstLastPara="1" wrap="square" lIns="91425" tIns="91425" rIns="91425" bIns="91425" anchor="ctr">
+          <a:bodyPr spcFirstLastPara="1" wrap="square" lIns="91425" tIns="91425" rIns="91425" bIns="91425" anchor="ctr">
             <a:noAutofit/>
           </a:bodyPr>
-          <a:lstStyle xmlns:a="http://schemas.openxmlformats.org/drawingml/2006/main"/>
-          <a:p xmlns:a="http://schemas.openxmlformats.org/drawingml/2006/main">
+          <a:lstStyle/>
+          <a:p>
             <a:pPr marL="0" marR="0" lvl="0" indent="0" algn="l">
               <a:lnSpc>
                 <a:spcPct val="100000"/>
@@ -10188,36 +9998,36 @@
       <p:sp>
         <p:nvSpPr>
           <p:cNvPr id="96" name="Google Shape;96;g13f9e8f1567_0_0">
-            <a:extLst xmlns:a="http://schemas.openxmlformats.org/drawingml/2006/main">
+            <a:extLst>
               <a:ext uri="{FF2B5EF4-FFF2-40B4-BE49-F238E27FC236}">
                 <a16:creationId xmlns:a16="http://schemas.microsoft.com/office/drawing/2014/main" id="{B8E96EAB-6E7A-48B7-803B-5CC6A87565AC}"/>
               </a:ext>
             </a:extLst>
           </p:cNvPr>
           <p:cNvSpPr>
-            <a:spLocks xmlns:a="http://schemas.openxmlformats.org/drawingml/2006/main" noGrp="1"/>
+            <a:spLocks noGrp="1"/>
           </p:cNvSpPr>
           <p:nvPr/>
         </p:nvSpPr>
         <p:spPr>
-          <a:xfrm xmlns:a="http://schemas.openxmlformats.org/drawingml/2006/main">
+          <a:xfrm>
             <a:off x="895525" y="337250"/>
             <a:ext cx="8520600" cy="572700"/>
           </a:xfrm>
-          <a:prstGeom xmlns:a="http://schemas.openxmlformats.org/drawingml/2006/main" prst="rect">
+          <a:prstGeom prst="rect">
             <a:avLst/>
           </a:prstGeom>
-          <a:noFill xmlns:a="http://schemas.openxmlformats.org/drawingml/2006/main"/>
-          <a:ln xmlns:a="http://schemas.openxmlformats.org/drawingml/2006/main">
+          <a:noFill/>
+          <a:ln>
             <a:noFill/>
           </a:ln>
         </p:spPr>
         <p:txBody>
-          <a:bodyPr xmlns:a="http://schemas.openxmlformats.org/drawingml/2006/main" spcFirstLastPara="1" wrap="square" lIns="91425" tIns="91425" rIns="91425" bIns="91425" anchor="t">
-            <a:normAutofit fontScale="100000"/>
+          <a:bodyPr spcFirstLastPara="1" wrap="square" lIns="91425" tIns="91425" rIns="91425" bIns="91425" anchor="t">
+            <a:normAutofit/>
           </a:bodyPr>
-          <a:lstStyle xmlns:a="http://schemas.openxmlformats.org/drawingml/2006/main"/>
-          <a:p xmlns:a="http://schemas.openxmlformats.org/drawingml/2006/main">
+          <a:lstStyle/>
+          <a:p>
             <a:pPr marL="0" marR="0" lvl="0" indent="0" algn="l">
               <a:lnSpc>
                 <a:spcPct val="100000"/>
@@ -10253,38 +10063,38 @@
       <p:sp>
         <p:nvSpPr>
           <p:cNvPr id="97" name="Google Shape;97;g13f9e8f1567_0_0">
-            <a:extLst xmlns:a="http://schemas.openxmlformats.org/drawingml/2006/main">
+            <a:extLst>
               <a:ext uri="{FF2B5EF4-FFF2-40B4-BE49-F238E27FC236}">
                 <a16:creationId xmlns:a16="http://schemas.microsoft.com/office/drawing/2014/main" id="{A796B365-DC90-44EC-97EB-574D4F12A7B6}"/>
               </a:ext>
             </a:extLst>
           </p:cNvPr>
           <p:cNvSpPr>
-            <a:spLocks xmlns:a="http://schemas.openxmlformats.org/drawingml/2006/main" noGrp="1"/>
+            <a:spLocks noGrp="1"/>
           </p:cNvSpPr>
           <p:nvPr/>
         </p:nvSpPr>
         <p:spPr>
-          <a:xfrm xmlns:a="http://schemas.openxmlformats.org/drawingml/2006/main">
+          <a:xfrm>
             <a:off x="1012175" y="993350"/>
             <a:ext cx="452700" cy="50400"/>
           </a:xfrm>
-          <a:prstGeom xmlns:a="http://schemas.openxmlformats.org/drawingml/2006/main" prst="rect">
+          <a:prstGeom prst="rect">
             <a:avLst/>
           </a:prstGeom>
-          <a:solidFill xmlns:a="http://schemas.openxmlformats.org/drawingml/2006/main">
+          <a:solidFill>
             <a:srgbClr val="F3F3F3"/>
           </a:solidFill>
-          <a:ln xmlns:a="http://schemas.openxmlformats.org/drawingml/2006/main">
+          <a:ln>
             <a:noFill/>
           </a:ln>
         </p:spPr>
         <p:txBody>
-          <a:bodyPr xmlns:a="http://schemas.openxmlformats.org/drawingml/2006/main" spcFirstLastPara="1" wrap="square" lIns="91425" tIns="91425" rIns="91425" bIns="91425" anchor="ctr">
+          <a:bodyPr spcFirstLastPara="1" wrap="square" lIns="91425" tIns="91425" rIns="91425" bIns="91425" anchor="ctr">
             <a:noAutofit/>
           </a:bodyPr>
-          <a:lstStyle xmlns:a="http://schemas.openxmlformats.org/drawingml/2006/main"/>
-          <a:p xmlns:a="http://schemas.openxmlformats.org/drawingml/2006/main">
+          <a:lstStyle/>
+          <a:p>
             <a:pPr marL="0" marR="0" lvl="0" indent="0" algn="l">
               <a:lnSpc>
                 <a:spcPct val="100000"/>
@@ -10316,38 +10126,38 @@
       <p:sp>
         <p:nvSpPr>
           <p:cNvPr id="98" name="Google Shape;98;g13f9e8f1567_0_0">
-            <a:extLst xmlns:a="http://schemas.openxmlformats.org/drawingml/2006/main">
+            <a:extLst>
               <a:ext uri="{FF2B5EF4-FFF2-40B4-BE49-F238E27FC236}">
                 <a16:creationId xmlns:a16="http://schemas.microsoft.com/office/drawing/2014/main" id="{62836F5E-2184-4A55-B991-18EBB5FF963A}"/>
               </a:ext>
             </a:extLst>
           </p:cNvPr>
           <p:cNvSpPr>
-            <a:spLocks xmlns:a="http://schemas.openxmlformats.org/drawingml/2006/main" noGrp="1"/>
+            <a:spLocks noGrp="1"/>
           </p:cNvSpPr>
           <p:nvPr>
             <p:ph type="body" idx="1"/>
           </p:nvPr>
         </p:nvSpPr>
         <p:spPr>
-          <a:xfrm xmlns:a="http://schemas.openxmlformats.org/drawingml/2006/main">
+          <a:xfrm>
             <a:off x="557274" y="1528600"/>
             <a:ext cx="8316000" cy="3416400"/>
           </a:xfrm>
-          <a:prstGeom xmlns:a="http://schemas.openxmlformats.org/drawingml/2006/main" prst="rect">
+          <a:prstGeom prst="rect">
             <a:avLst/>
           </a:prstGeom>
-          <a:noFill xmlns:a="http://schemas.openxmlformats.org/drawingml/2006/main"/>
-          <a:ln xmlns:a="http://schemas.openxmlformats.org/drawingml/2006/main">
+          <a:noFill/>
+          <a:ln>
             <a:noFill/>
           </a:ln>
         </p:spPr>
         <p:txBody>
-          <a:bodyPr xmlns:a="http://schemas.openxmlformats.org/drawingml/2006/main" spcFirstLastPara="1" wrap="square" lIns="91425" tIns="91425" rIns="91425" bIns="91425" anchor="t">
-            <a:normAutofit fontScale="100000"/>
+          <a:bodyPr spcFirstLastPara="1" wrap="square" lIns="91425" tIns="91425" rIns="91425" bIns="91425" anchor="t">
+            <a:normAutofit/>
           </a:bodyPr>
-          <a:lstStyle xmlns:a="http://schemas.openxmlformats.org/drawingml/2006/main"/>
-          <a:p xmlns:a="http://schemas.openxmlformats.org/drawingml/2006/main">
+          <a:lstStyle/>
+          <a:p>
             <a:pPr marL="0" indent="0" algn="l">
               <a:lnSpc>
                 <a:spcPct val="115000"/>
@@ -10374,7 +10184,7 @@
               <a:cs typeface="Montserrat"/>
             </a:endParaRPr>
           </a:p>
-          <a:p xmlns:a="http://schemas.openxmlformats.org/drawingml/2006/main">
+          <a:p>
             <a:pPr>
               <a:buNone/>
               <a:defRPr sz="1800"/>
@@ -10384,7 +10194,7 @@
               <a:t>D+14 · Achats — revoir 24 surstocks et confirmer le coût 4355.</a:t>
             </a:r>
           </a:p>
-          <a:p xmlns:a="http://schemas.openxmlformats.org/drawingml/2006/main">
+          <a:p>
             <a:pPr>
               <a:buNone/>
               <a:defRPr sz="1800"/>
@@ -10394,7 +10204,7 @@
               <a:t>D+14 · E-commerce — traiter 22 stocks nuls et statuts croisés.</a:t>
             </a:r>
           </a:p>
-          <a:p xmlns:a="http://schemas.openxmlformats.org/drawingml/2006/main">
+          <a:p>
             <a:pPr>
               <a:buNone/>
               <a:defRPr sz="1800"/>
@@ -10413,11 +10223,14 @@
       </p:ext>
     </p:extLst>
   </p:cSld>
+  <p:clrMapOvr>
+    <a:masterClrMapping/>
+  </p:clrMapOvr>
 </p:sld>
 </file>
 
 <file path=ppt/slides/slide2.xml><?xml version="1.0" encoding="utf-8"?>
-<p:sld xmlns:p="http://schemas.openxmlformats.org/presentationml/2006/main">
+<p:sld xmlns:a="http://schemas.openxmlformats.org/drawingml/2006/main" xmlns:r="http://schemas.openxmlformats.org/officeDocument/2006/relationships" xmlns:p="http://schemas.openxmlformats.org/presentationml/2006/main">
   <p:cSld>
     <p:spTree>
       <p:nvGrpSpPr>
@@ -10426,34 +10239,39 @@
         <p:nvPr/>
       </p:nvGrpSpPr>
       <p:grpSpPr>
-        <a:xfrm xmlns:a="http://schemas.openxmlformats.org/drawingml/2006/main"/>
+        <a:xfrm>
+          <a:off x="0" y="0"/>
+          <a:ext cx="0" cy="0"/>
+          <a:chOff x="0" y="0"/>
+          <a:chExt cx="0" cy="0"/>
+        </a:xfrm>
       </p:grpSpPr>
       <p:sp>
         <p:nvSpPr>
           <p:cNvPr id="95" name="Google Shape;95;g13f9e8f1567_0_0">
-            <a:extLst xmlns:a="http://schemas.openxmlformats.org/drawingml/2006/main">
+            <a:extLst>
               <a:ext uri="{FF2B5EF4-FFF2-40B4-BE49-F238E27FC236}">
                 <a16:creationId xmlns:a16="http://schemas.microsoft.com/office/drawing/2014/main" id="{CF16D420-20FD-4222-B1D2-B06A18E7035A}"/>
               </a:ext>
             </a:extLst>
           </p:cNvPr>
           <p:cNvSpPr>
-            <a:spLocks xmlns:a="http://schemas.openxmlformats.org/drawingml/2006/main" noGrp="1"/>
+            <a:spLocks noGrp="1"/>
           </p:cNvSpPr>
           <p:nvPr/>
         </p:nvSpPr>
         <p:spPr>
-          <a:xfrm xmlns:a="http://schemas.openxmlformats.org/drawingml/2006/main">
+          <a:xfrm>
             <a:off x="0" y="0"/>
             <a:ext cx="9144000" cy="1390200"/>
           </a:xfrm>
-          <a:prstGeom xmlns:a="http://schemas.openxmlformats.org/drawingml/2006/main" prst="rect">
+          <a:prstGeom prst="rect">
             <a:avLst/>
           </a:prstGeom>
-          <a:solidFill xmlns:a="http://schemas.openxmlformats.org/drawingml/2006/main">
+          <a:solidFill>
             <a:srgbClr val="004D40"/>
           </a:solidFill>
-          <a:ln xmlns:a="http://schemas.openxmlformats.org/drawingml/2006/main" w="9525" cmpd="sng">
+          <a:ln w="9525" cmpd="sng">
             <a:solidFill>
               <a:srgbClr val="FFFFFF"/>
             </a:solidFill>
@@ -10463,11 +10281,11 @@
           </a:ln>
         </p:spPr>
         <p:txBody>
-          <a:bodyPr xmlns:a="http://schemas.openxmlformats.org/drawingml/2006/main" spcFirstLastPara="1" wrap="square" lIns="91425" tIns="91425" rIns="91425" bIns="91425" anchor="ctr">
+          <a:bodyPr spcFirstLastPara="1" wrap="square" lIns="91425" tIns="91425" rIns="91425" bIns="91425" anchor="ctr">
             <a:noAutofit/>
           </a:bodyPr>
-          <a:lstStyle xmlns:a="http://schemas.openxmlformats.org/drawingml/2006/main"/>
-          <a:p xmlns:a="http://schemas.openxmlformats.org/drawingml/2006/main">
+          <a:lstStyle/>
+          <a:p>
             <a:pPr marL="0" marR="0" lvl="0" indent="0" algn="l">
               <a:lnSpc>
                 <a:spcPct val="100000"/>
@@ -10499,36 +10317,36 @@
       <p:sp>
         <p:nvSpPr>
           <p:cNvPr id="96" name="Google Shape;96;g13f9e8f1567_0_0">
-            <a:extLst xmlns:a="http://schemas.openxmlformats.org/drawingml/2006/main">
+            <a:extLst>
               <a:ext uri="{FF2B5EF4-FFF2-40B4-BE49-F238E27FC236}">
                 <a16:creationId xmlns:a16="http://schemas.microsoft.com/office/drawing/2014/main" id="{B8E96EAB-6E7A-48B7-803B-5CC6A87565AC}"/>
               </a:ext>
             </a:extLst>
           </p:cNvPr>
           <p:cNvSpPr>
-            <a:spLocks xmlns:a="http://schemas.openxmlformats.org/drawingml/2006/main" noGrp="1"/>
+            <a:spLocks noGrp="1"/>
           </p:cNvSpPr>
           <p:nvPr/>
         </p:nvSpPr>
         <p:spPr>
-          <a:xfrm xmlns:a="http://schemas.openxmlformats.org/drawingml/2006/main">
+          <a:xfrm>
             <a:off x="895525" y="337250"/>
             <a:ext cx="8520600" cy="572700"/>
           </a:xfrm>
-          <a:prstGeom xmlns:a="http://schemas.openxmlformats.org/drawingml/2006/main" prst="rect">
+          <a:prstGeom prst="rect">
             <a:avLst/>
           </a:prstGeom>
-          <a:noFill xmlns:a="http://schemas.openxmlformats.org/drawingml/2006/main"/>
-          <a:ln xmlns:a="http://schemas.openxmlformats.org/drawingml/2006/main">
+          <a:noFill/>
+          <a:ln>
             <a:noFill/>
           </a:ln>
         </p:spPr>
         <p:txBody>
-          <a:bodyPr xmlns:a="http://schemas.openxmlformats.org/drawingml/2006/main" spcFirstLastPara="1" wrap="square" lIns="91425" tIns="91425" rIns="91425" bIns="91425" anchor="t">
-            <a:normAutofit fontScale="100000"/>
+          <a:bodyPr spcFirstLastPara="1" wrap="square" lIns="91425" tIns="91425" rIns="91425" bIns="91425" anchor="t">
+            <a:normAutofit/>
           </a:bodyPr>
-          <a:lstStyle xmlns:a="http://schemas.openxmlformats.org/drawingml/2006/main"/>
-          <a:p xmlns:a="http://schemas.openxmlformats.org/drawingml/2006/main">
+          <a:lstStyle/>
+          <a:p>
             <a:pPr marL="0" marR="0" lvl="0" indent="0" algn="l">
               <a:lnSpc>
                 <a:spcPct val="100000"/>
@@ -10564,38 +10382,38 @@
       <p:sp>
         <p:nvSpPr>
           <p:cNvPr id="97" name="Google Shape;97;g13f9e8f1567_0_0">
-            <a:extLst xmlns:a="http://schemas.openxmlformats.org/drawingml/2006/main">
+            <a:extLst>
               <a:ext uri="{FF2B5EF4-FFF2-40B4-BE49-F238E27FC236}">
                 <a16:creationId xmlns:a16="http://schemas.microsoft.com/office/drawing/2014/main" id="{A796B365-DC90-44EC-97EB-574D4F12A7B6}"/>
               </a:ext>
             </a:extLst>
           </p:cNvPr>
           <p:cNvSpPr>
-            <a:spLocks xmlns:a="http://schemas.openxmlformats.org/drawingml/2006/main" noGrp="1"/>
+            <a:spLocks noGrp="1"/>
           </p:cNvSpPr>
           <p:nvPr/>
         </p:nvSpPr>
         <p:spPr>
-          <a:xfrm xmlns:a="http://schemas.openxmlformats.org/drawingml/2006/main">
+          <a:xfrm>
             <a:off x="1012175" y="993350"/>
             <a:ext cx="452700" cy="50400"/>
           </a:xfrm>
-          <a:prstGeom xmlns:a="http://schemas.openxmlformats.org/drawingml/2006/main" prst="rect">
+          <a:prstGeom prst="rect">
             <a:avLst/>
           </a:prstGeom>
-          <a:solidFill xmlns:a="http://schemas.openxmlformats.org/drawingml/2006/main">
+          <a:solidFill>
             <a:srgbClr val="F3F3F3"/>
           </a:solidFill>
-          <a:ln xmlns:a="http://schemas.openxmlformats.org/drawingml/2006/main">
+          <a:ln>
             <a:noFill/>
           </a:ln>
         </p:spPr>
         <p:txBody>
-          <a:bodyPr xmlns:a="http://schemas.openxmlformats.org/drawingml/2006/main" spcFirstLastPara="1" wrap="square" lIns="91425" tIns="91425" rIns="91425" bIns="91425" anchor="ctr">
+          <a:bodyPr spcFirstLastPara="1" wrap="square" lIns="91425" tIns="91425" rIns="91425" bIns="91425" anchor="ctr">
             <a:noAutofit/>
           </a:bodyPr>
-          <a:lstStyle xmlns:a="http://schemas.openxmlformats.org/drawingml/2006/main"/>
-          <a:p xmlns:a="http://schemas.openxmlformats.org/drawingml/2006/main">
+          <a:lstStyle/>
+          <a:p>
             <a:pPr marL="0" marR="0" lvl="0" indent="0" algn="l">
               <a:lnSpc>
                 <a:spcPct val="100000"/>
@@ -10627,38 +10445,38 @@
       <p:sp>
         <p:nvSpPr>
           <p:cNvPr id="98" name="Google Shape;98;g13f9e8f1567_0_0">
-            <a:extLst xmlns:a="http://schemas.openxmlformats.org/drawingml/2006/main">
+            <a:extLst>
               <a:ext uri="{FF2B5EF4-FFF2-40B4-BE49-F238E27FC236}">
                 <a16:creationId xmlns:a16="http://schemas.microsoft.com/office/drawing/2014/main" id="{62836F5E-2184-4A55-B991-18EBB5FF963A}"/>
               </a:ext>
             </a:extLst>
           </p:cNvPr>
           <p:cNvSpPr>
-            <a:spLocks xmlns:a="http://schemas.openxmlformats.org/drawingml/2006/main" noGrp="1"/>
+            <a:spLocks noGrp="1"/>
           </p:cNvSpPr>
           <p:nvPr>
             <p:ph type="body" idx="1"/>
           </p:nvPr>
         </p:nvSpPr>
         <p:spPr>
-          <a:xfrm xmlns:a="http://schemas.openxmlformats.org/drawingml/2006/main">
+          <a:xfrm>
             <a:off x="557274" y="1528600"/>
             <a:ext cx="8316000" cy="3416400"/>
           </a:xfrm>
-          <a:prstGeom xmlns:a="http://schemas.openxmlformats.org/drawingml/2006/main" prst="rect">
+          <a:prstGeom prst="rect">
             <a:avLst/>
           </a:prstGeom>
-          <a:noFill xmlns:a="http://schemas.openxmlformats.org/drawingml/2006/main"/>
-          <a:ln xmlns:a="http://schemas.openxmlformats.org/drawingml/2006/main">
+          <a:noFill/>
+          <a:ln>
             <a:noFill/>
           </a:ln>
         </p:spPr>
         <p:txBody>
-          <a:bodyPr xmlns:a="http://schemas.openxmlformats.org/drawingml/2006/main" spcFirstLastPara="1" wrap="square" lIns="91425" tIns="91425" rIns="91425" bIns="91425" anchor="t">
-            <a:normAutofit fontScale="100000"/>
+          <a:bodyPr spcFirstLastPara="1" wrap="square" lIns="91425" tIns="91425" rIns="91425" bIns="91425" anchor="t">
+            <a:normAutofit/>
           </a:bodyPr>
-          <a:lstStyle xmlns:a="http://schemas.openxmlformats.org/drawingml/2006/main"/>
-          <a:p xmlns:a="http://schemas.openxmlformats.org/drawingml/2006/main">
+          <a:lstStyle/>
+          <a:p>
             <a:pPr marL="0" indent="0" algn="l">
               <a:lnSpc>
                 <a:spcPct val="115000"/>
@@ -10685,7 +10503,7 @@
               <a:cs typeface="Montserrat"/>
             </a:endParaRPr>
           </a:p>
-          <a:p xmlns:a="http://schemas.openxmlformats.org/drawingml/2006/main">
+          <a:p>
             <a:pPr>
               <a:buNone/>
               <a:defRPr sz="1800"/>
@@ -10695,7 +10513,7 @@
               <a:t>2. Revoir 24 surstocks et 14 959 € sans vente observée.</a:t>
             </a:r>
           </a:p>
-          <a:p xmlns:a="http://schemas.openxmlformats.org/drawingml/2006/main">
+          <a:p>
             <a:pPr>
               <a:buNone/>
               <a:defRPr sz="1800"/>
@@ -10714,11 +10532,14 @@
       </p:ext>
     </p:extLst>
   </p:cSld>
+  <p:clrMapOvr>
+    <a:masterClrMapping/>
+  </p:clrMapOvr>
 </p:sld>
 </file>
 
 <file path=ppt/slides/slide3.xml><?xml version="1.0" encoding="utf-8"?>
-<p:sld xmlns:p="http://schemas.openxmlformats.org/presentationml/2006/main">
+<p:sld xmlns:a="http://schemas.openxmlformats.org/drawingml/2006/main" xmlns:r="http://schemas.openxmlformats.org/officeDocument/2006/relationships" xmlns:p="http://schemas.openxmlformats.org/presentationml/2006/main">
   <p:cSld>
     <p:spTree>
       <p:nvGrpSpPr>
@@ -10727,29 +10548,34 @@
         <p:nvPr/>
       </p:nvGrpSpPr>
       <p:grpSpPr>
-        <a:xfrm xmlns:a="http://schemas.openxmlformats.org/drawingml/2006/main"/>
+        <a:xfrm>
+          <a:off x="0" y="0"/>
+          <a:ext cx="0" cy="0"/>
+          <a:chOff x="0" y="0"/>
+          <a:chExt cx="0" cy="0"/>
+        </a:xfrm>
       </p:grpSpPr>
       <p:sp>
         <p:nvSpPr>
           <p:cNvPr id="2" name="Title 1">
-            <a:extLst xmlns:a="http://schemas.openxmlformats.org/drawingml/2006/main">
+            <a:extLst>
               <a:ext uri="{FF2B5EF4-FFF2-40B4-BE49-F238E27FC236}">
                 <a16:creationId xmlns:a16="http://schemas.microsoft.com/office/drawing/2014/main" id="{FCE6ECEE-3FD1-4D24-8D52-6AB007C21B21}"/>
               </a:ext>
             </a:extLst>
           </p:cNvPr>
           <p:cNvSpPr>
-            <a:spLocks xmlns:a="http://schemas.openxmlformats.org/drawingml/2006/main" noGrp="1"/>
+            <a:spLocks noGrp="1"/>
           </p:cNvSpPr>
           <p:nvPr>
-            <p:ph type="title" idx="0"/>
+            <p:ph type="title"/>
           </p:nvPr>
         </p:nvSpPr>
         <p:spPr/>
         <p:txBody>
-          <a:bodyPr xmlns:a="http://schemas.openxmlformats.org/drawingml/2006/main"/>
-          <a:lstStyle xmlns:a="http://schemas.openxmlformats.org/drawingml/2006/main"/>
-          <a:p xmlns:a="http://schemas.openxmlformats.org/drawingml/2006/main">
+          <a:bodyPr/>
+          <a:lstStyle/>
+          <a:p>
             <a:r>
               <a:rPr sz="3000"/>
               <a:t>714 produits rapprochés en cardinalité 1–1</a:t>
@@ -10760,14 +10586,14 @@
       <p:sp>
         <p:nvSpPr>
           <p:cNvPr id="3" name="Text Placeholder 2">
-            <a:extLst xmlns:a="http://schemas.openxmlformats.org/drawingml/2006/main">
+            <a:extLst>
               <a:ext uri="{FF2B5EF4-FFF2-40B4-BE49-F238E27FC236}">
                 <a16:creationId xmlns:a16="http://schemas.microsoft.com/office/drawing/2014/main" id="{D211DC70-C9A2-4F71-9441-B0B5A0865D1F}"/>
               </a:ext>
             </a:extLst>
           </p:cNvPr>
           <p:cNvSpPr>
-            <a:spLocks xmlns:a="http://schemas.openxmlformats.org/drawingml/2006/main" noGrp="1"/>
+            <a:spLocks noGrp="1"/>
           </p:cNvSpPr>
           <p:nvPr>
             <p:ph type="body" idx="1"/>
@@ -10775,9 +10601,9 @@
         </p:nvSpPr>
         <p:spPr/>
         <p:txBody>
-          <a:bodyPr xmlns:a="http://schemas.openxmlformats.org/drawingml/2006/main"/>
-          <a:lstStyle xmlns:a="http://schemas.openxmlformats.org/drawingml/2006/main"/>
-          <a:p xmlns:a="http://schemas.openxmlformats.org/drawingml/2006/main">
+          <a:bodyPr/>
+          <a:lstStyle/>
+          <a:p>
             <a:pPr>
               <a:buNone/>
               <a:defRPr sz="1800"/>
@@ -10787,7 +10613,7 @@
               <a:t>825 ERP → 734 identifiants Web → 714 produits appariés.</a:t>
             </a:r>
           </a:p>
-          <a:p xmlns:a="http://schemas.openxmlformats.org/drawingml/2006/main">
+          <a:p>
             <a:pPr>
               <a:buNone/>
               <a:defRPr sz="1800"/>
@@ -10797,7 +10623,7 @@
               <a:t>111 références ERP hors périmètre Web : 91 sans ID, 20 liens absents.</a:t>
             </a:r>
           </a:p>
-          <a:p xmlns:a="http://schemas.openxmlformats.org/drawingml/2006/main">
+          <a:p>
             <a:pPr>
               <a:buNone/>
               <a:defRPr sz="1800"/>
@@ -10811,23 +10637,23 @@
       </p:sp>
       <p:pic>
         <p:nvPicPr>
-          <p:cNvPr id="7" name=""/>
+          <p:cNvPr id="7" name="Image 6"/>
           <p:cNvPicPr>
-            <a:picLocks xmlns:a="http://schemas.openxmlformats.org/drawingml/2006/main" noChangeAspect="1"/>
+            <a:picLocks noChangeAspect="1"/>
           </p:cNvPicPr>
           <p:nvPr/>
         </p:nvPicPr>
         <p:blipFill>
-          <a:blip xmlns:r="http://schemas.openxmlformats.org/officeDocument/2006/relationships" xmlns:a="http://schemas.openxmlformats.org/drawingml/2006/main" r:embed="R980b4ed9ec8f438c"/>
-          <a:srcRect xmlns:a="http://schemas.openxmlformats.org/drawingml/2006/main" l="0" t="0" r="0" b="0"/>
-          <a:stretch xmlns:a="http://schemas.openxmlformats.org/drawingml/2006/main"/>
+          <a:blip r:embed="rId3"/>
+          <a:srcRect/>
+          <a:stretch/>
         </p:blipFill>
         <p:spPr>
-          <a:xfrm xmlns:a="http://schemas.openxmlformats.org/drawingml/2006/main" flipH="0" flipV="0">
+          <a:xfrm>
             <a:off x="1143000" y="2381250"/>
             <a:ext cx="6858000" cy="2381250"/>
           </a:xfrm>
-          <a:prstGeom xmlns:a="http://schemas.openxmlformats.org/drawingml/2006/main" prst="rect">
+          <a:prstGeom prst="rect">
             <a:avLst/>
           </a:prstGeom>
         </p:spPr>
@@ -10839,11 +10665,14 @@
       </p:ext>
     </p:extLst>
   </p:cSld>
+  <p:clrMapOvr>
+    <a:masterClrMapping/>
+  </p:clrMapOvr>
 </p:sld>
 </file>
 
 <file path=ppt/slides/slide4.xml><?xml version="1.0" encoding="utf-8"?>
-<p:sld xmlns:p="http://schemas.openxmlformats.org/presentationml/2006/main">
+<p:sld xmlns:a="http://schemas.openxmlformats.org/drawingml/2006/main" xmlns:r="http://schemas.openxmlformats.org/officeDocument/2006/relationships" xmlns:p="http://schemas.openxmlformats.org/presentationml/2006/main">
   <p:cSld>
     <p:spTree>
       <p:nvGrpSpPr>
@@ -10852,29 +10681,34 @@
         <p:nvPr/>
       </p:nvGrpSpPr>
       <p:grpSpPr>
-        <a:xfrm xmlns:a="http://schemas.openxmlformats.org/drawingml/2006/main"/>
+        <a:xfrm>
+          <a:off x="0" y="0"/>
+          <a:ext cx="0" cy="0"/>
+          <a:chOff x="0" y="0"/>
+          <a:chExt cx="0" cy="0"/>
+        </a:xfrm>
       </p:grpSpPr>
       <p:sp>
         <p:nvSpPr>
           <p:cNvPr id="2" name="Title 1">
-            <a:extLst xmlns:a="http://schemas.openxmlformats.org/drawingml/2006/main">
+            <a:extLst>
               <a:ext uri="{FF2B5EF4-FFF2-40B4-BE49-F238E27FC236}">
                 <a16:creationId xmlns:a16="http://schemas.microsoft.com/office/drawing/2014/main" id="{BCD97DD6-DDF0-4EF4-94B5-702B2DDE5F34}"/>
               </a:ext>
             </a:extLst>
           </p:cNvPr>
           <p:cNvSpPr>
-            <a:spLocks xmlns:a="http://schemas.openxmlformats.org/drawingml/2006/main" noGrp="1"/>
+            <a:spLocks noGrp="1"/>
           </p:cNvSpPr>
           <p:nvPr>
-            <p:ph type="title" idx="0"/>
+            <p:ph type="title"/>
           </p:nvPr>
         </p:nvSpPr>
         <p:spPr/>
         <p:txBody>
-          <a:bodyPr xmlns:a="http://schemas.openxmlformats.org/drawingml/2006/main"/>
-          <a:lstStyle xmlns:a="http://schemas.openxmlformats.org/drawingml/2006/main"/>
-          <a:p xmlns:a="http://schemas.openxmlformats.org/drawingml/2006/main">
+          <a:bodyPr/>
+          <a:lstStyle/>
+          <a:p>
             <a:r>
               <a:rPr sz="3000"/>
               <a:t>Octobre en quatre chiffres</a:t>
@@ -10885,14 +10719,14 @@
       <p:sp>
         <p:nvSpPr>
           <p:cNvPr id="3" name="Text Placeholder 2">
-            <a:extLst xmlns:a="http://schemas.openxmlformats.org/drawingml/2006/main">
+            <a:extLst>
               <a:ext uri="{FF2B5EF4-FFF2-40B4-BE49-F238E27FC236}">
                 <a16:creationId xmlns:a16="http://schemas.microsoft.com/office/drawing/2014/main" id="{604B28AE-F743-497B-BE2E-64650E6812EE}"/>
               </a:ext>
             </a:extLst>
           </p:cNvPr>
           <p:cNvSpPr>
-            <a:spLocks xmlns:a="http://schemas.openxmlformats.org/drawingml/2006/main" noGrp="1"/>
+            <a:spLocks noGrp="1"/>
           </p:cNvSpPr>
           <p:nvPr>
             <p:ph type="body" idx="1"/>
@@ -10900,9 +10734,9 @@
         </p:nvSpPr>
         <p:spPr/>
         <p:txBody>
-          <a:bodyPr xmlns:a="http://schemas.openxmlformats.org/drawingml/2006/main"/>
-          <a:lstStyle xmlns:a="http://schemas.openxmlformats.org/drawingml/2006/main"/>
-          <a:p xmlns:a="http://schemas.openxmlformats.org/drawingml/2006/main">
+          <a:bodyPr/>
+          <a:lstStyle/>
+          <a:p>
             <a:pPr>
               <a:buNone/>
               <a:defRPr sz="1800"/>
@@ -10912,7 +10746,7 @@
               <a:t>143 680 € de CA TTC | 5 751 unités vendues</a:t>
             </a:r>
           </a:p>
-          <a:p xmlns:a="http://schemas.openxmlformats.org/drawingml/2006/main">
+          <a:p>
             <a:pPr>
               <a:buNone/>
               <a:defRPr sz="1800"/>
@@ -10922,7 +10756,7 @@
               <a:t>44 661 € de marge brute HT | 37,3 % de taux de marque pondéré</a:t>
             </a:r>
           </a:p>
-          <a:p xmlns:a="http://schemas.openxmlformats.org/drawingml/2006/main">
+          <a:p>
             <a:pPr>
               <a:buNone/>
               <a:defRPr sz="1800"/>
@@ -10932,7 +10766,7 @@
               <a:t>277 306 € de stock apparié au coût HT, brut signé</a:t>
             </a:r>
           </a:p>
-          <a:p xmlns:a="http://schemas.openxmlformats.org/drawingml/2006/main">
+          <a:p>
             <a:pPr>
               <a:buNone/>
               <a:defRPr sz="1800"/>
@@ -10951,11 +10785,14 @@
       </p:ext>
     </p:extLst>
   </p:cSld>
+  <p:clrMapOvr>
+    <a:masterClrMapping/>
+  </p:clrMapOvr>
 </p:sld>
 </file>
 
 <file path=ppt/slides/slide5.xml><?xml version="1.0" encoding="utf-8"?>
-<p:sld xmlns:p="http://schemas.openxmlformats.org/presentationml/2006/main">
+<p:sld xmlns:a="http://schemas.openxmlformats.org/drawingml/2006/main" xmlns:r="http://schemas.openxmlformats.org/officeDocument/2006/relationships" xmlns:p="http://schemas.openxmlformats.org/presentationml/2006/main">
   <p:cSld>
     <p:spTree>
       <p:nvGrpSpPr>
@@ -10964,29 +10801,34 @@
         <p:nvPr/>
       </p:nvGrpSpPr>
       <p:grpSpPr>
-        <a:xfrm xmlns:a="http://schemas.openxmlformats.org/drawingml/2006/main"/>
+        <a:xfrm>
+          <a:off x="0" y="0"/>
+          <a:ext cx="0" cy="0"/>
+          <a:chOff x="0" y="0"/>
+          <a:chExt cx="0" cy="0"/>
+        </a:xfrm>
       </p:grpSpPr>
       <p:sp>
         <p:nvSpPr>
           <p:cNvPr id="2" name="Title 1">
-            <a:extLst xmlns:a="http://schemas.openxmlformats.org/drawingml/2006/main">
+            <a:extLst>
               <a:ext uri="{FF2B5EF4-FFF2-40B4-BE49-F238E27FC236}">
                 <a16:creationId xmlns:a16="http://schemas.microsoft.com/office/drawing/2014/main" id="{183067D8-2D52-47D3-8D6A-210610A726FE}"/>
               </a:ext>
             </a:extLst>
           </p:cNvPr>
           <p:cNvSpPr>
-            <a:spLocks xmlns:a="http://schemas.openxmlformats.org/drawingml/2006/main" noGrp="1"/>
+            <a:spLocks noGrp="1"/>
           </p:cNvSpPr>
           <p:nvPr>
-            <p:ph type="title" idx="0"/>
+            <p:ph type="title"/>
           </p:nvPr>
         </p:nvSpPr>
         <p:spPr/>
         <p:txBody>
-          <a:bodyPr xmlns:a="http://schemas.openxmlformats.org/drawingml/2006/main"/>
-          <a:lstStyle xmlns:a="http://schemas.openxmlformats.org/drawingml/2006/main"/>
-          <a:p xmlns:a="http://schemas.openxmlformats.org/drawingml/2006/main">
+          <a:bodyPr/>
+          <a:lstStyle/>
+          <a:p>
             <a:r>
               <a:rPr sz="3000"/>
               <a:t>Top 10 : seulement 6,9 % du CA</a:t>
@@ -10997,14 +10839,14 @@
       <p:sp>
         <p:nvSpPr>
           <p:cNvPr id="3" name="Text Placeholder 2">
-            <a:extLst xmlns:a="http://schemas.openxmlformats.org/drawingml/2006/main">
+            <a:extLst>
               <a:ext uri="{FF2B5EF4-FFF2-40B4-BE49-F238E27FC236}">
                 <a16:creationId xmlns:a16="http://schemas.microsoft.com/office/drawing/2014/main" id="{6BAA486B-E94B-4D91-B28D-3BE2369153ED}"/>
               </a:ext>
             </a:extLst>
           </p:cNvPr>
           <p:cNvSpPr>
-            <a:spLocks xmlns:a="http://schemas.openxmlformats.org/drawingml/2006/main" noGrp="1"/>
+            <a:spLocks noGrp="1"/>
           </p:cNvSpPr>
           <p:nvPr>
             <p:ph type="body" idx="1"/>
@@ -11012,9 +10854,9 @@
         </p:nvSpPr>
         <p:spPr/>
         <p:txBody>
-          <a:bodyPr xmlns:a="http://schemas.openxmlformats.org/drawingml/2006/main"/>
-          <a:lstStyle xmlns:a="http://schemas.openxmlformats.org/drawingml/2006/main"/>
-          <a:p xmlns:a="http://schemas.openxmlformats.org/drawingml/2006/main">
+          <a:bodyPr/>
+          <a:lstStyle/>
+          <a:p>
             <a:pPr>
               <a:buNone/>
               <a:defRPr sz="1800"/>
@@ -11024,7 +10866,7 @@
               <a:t>La meilleure référence pèse 1,7 % du CA.</a:t>
             </a:r>
           </a:p>
-          <a:p xmlns:a="http://schemas.openxmlformats.org/drawingml/2006/main">
+          <a:p>
             <a:pPr>
               <a:buNone/>
               <a:defRPr sz="1800"/>
@@ -11038,23 +10880,23 @@
       </p:sp>
       <p:pic>
         <p:nvPicPr>
-          <p:cNvPr id="7" name=""/>
+          <p:cNvPr id="7" name="Image 6"/>
           <p:cNvPicPr>
-            <a:picLocks xmlns:a="http://schemas.openxmlformats.org/drawingml/2006/main" noChangeAspect="1"/>
+            <a:picLocks noChangeAspect="1"/>
           </p:cNvPicPr>
           <p:nvPr/>
         </p:nvPicPr>
         <p:blipFill>
-          <a:blip xmlns:r="http://schemas.openxmlformats.org/officeDocument/2006/relationships" xmlns:a="http://schemas.openxmlformats.org/drawingml/2006/main" r:embed="Rc31725a7ab724adc"/>
-          <a:srcRect xmlns:a="http://schemas.openxmlformats.org/drawingml/2006/main" l="0" t="0" r="0" b="0"/>
-          <a:stretch xmlns:a="http://schemas.openxmlformats.org/drawingml/2006/main"/>
+          <a:blip r:embed="rId3"/>
+          <a:srcRect/>
+          <a:stretch/>
         </p:blipFill>
         <p:spPr>
-          <a:xfrm xmlns:a="http://schemas.openxmlformats.org/drawingml/2006/main" flipH="0" flipV="0">
+          <a:xfrm>
             <a:off x="857250" y="1952625"/>
             <a:ext cx="7429500" cy="2905125"/>
           </a:xfrm>
-          <a:prstGeom xmlns:a="http://schemas.openxmlformats.org/drawingml/2006/main" prst="rect">
+          <a:prstGeom prst="rect">
             <a:avLst/>
           </a:prstGeom>
         </p:spPr>
@@ -11066,11 +10908,14 @@
       </p:ext>
     </p:extLst>
   </p:cSld>
+  <p:clrMapOvr>
+    <a:masterClrMapping/>
+  </p:clrMapOvr>
 </p:sld>
 </file>
 
 <file path=ppt/slides/slide6.xml><?xml version="1.0" encoding="utf-8"?>
-<p:sld xmlns:p="http://schemas.openxmlformats.org/presentationml/2006/main">
+<p:sld xmlns:a="http://schemas.openxmlformats.org/drawingml/2006/main" xmlns:r="http://schemas.openxmlformats.org/officeDocument/2006/relationships" xmlns:p="http://schemas.openxmlformats.org/presentationml/2006/main">
   <p:cSld>
     <p:spTree>
       <p:nvGrpSpPr>
@@ -11079,29 +10924,34 @@
         <p:nvPr/>
       </p:nvGrpSpPr>
       <p:grpSpPr>
-        <a:xfrm xmlns:a="http://schemas.openxmlformats.org/drawingml/2006/main"/>
+        <a:xfrm>
+          <a:off x="0" y="0"/>
+          <a:ext cx="0" cy="0"/>
+          <a:chOff x="0" y="0"/>
+          <a:chExt cx="0" cy="0"/>
+        </a:xfrm>
       </p:grpSpPr>
       <p:sp>
         <p:nvSpPr>
           <p:cNvPr id="2" name="Title 1">
-            <a:extLst xmlns:a="http://schemas.openxmlformats.org/drawingml/2006/main">
+            <a:extLst>
               <a:ext uri="{FF2B5EF4-FFF2-40B4-BE49-F238E27FC236}">
                 <a16:creationId xmlns:a16="http://schemas.microsoft.com/office/drawing/2014/main" id="{69B52FCE-1500-490B-BF0B-BBA07404F3E8}"/>
               </a:ext>
             </a:extLst>
           </p:cNvPr>
           <p:cNvSpPr>
-            <a:spLocks xmlns:a="http://schemas.openxmlformats.org/drawingml/2006/main" noGrp="1"/>
+            <a:spLocks noGrp="1"/>
           </p:cNvSpPr>
           <p:nvPr>
-            <p:ph type="title" idx="0"/>
+            <p:ph type="title"/>
           </p:nvPr>
         </p:nvSpPr>
         <p:spPr/>
         <p:txBody>
-          <a:bodyPr xmlns:a="http://schemas.openxmlformats.org/drawingml/2006/main"/>
-          <a:lstStyle xmlns:a="http://schemas.openxmlformats.org/drawingml/2006/main"/>
-          <a:p xmlns:a="http://schemas.openxmlformats.org/drawingml/2006/main">
+          <a:bodyPr/>
+          <a:lstStyle/>
+          <a:p>
             <a:r>
               <a:rPr sz="3000"/>
               <a:t>Atteindre 80 % du CA exige 435 références</a:t>
@@ -11112,14 +10962,14 @@
       <p:sp>
         <p:nvSpPr>
           <p:cNvPr id="3" name="Text Placeholder 2">
-            <a:extLst xmlns:a="http://schemas.openxmlformats.org/drawingml/2006/main">
+            <a:extLst>
               <a:ext uri="{FF2B5EF4-FFF2-40B4-BE49-F238E27FC236}">
                 <a16:creationId xmlns:a16="http://schemas.microsoft.com/office/drawing/2014/main" id="{EC67DF43-7A85-4C7B-8576-288D9EC671A8}"/>
               </a:ext>
             </a:extLst>
           </p:cNvPr>
           <p:cNvSpPr>
-            <a:spLocks xmlns:a="http://schemas.openxmlformats.org/drawingml/2006/main" noGrp="1"/>
+            <a:spLocks noGrp="1"/>
           </p:cNvSpPr>
           <p:nvPr>
             <p:ph type="body" idx="1"/>
@@ -11127,9 +10977,9 @@
         </p:nvSpPr>
         <p:spPr/>
         <p:txBody>
-          <a:bodyPr xmlns:a="http://schemas.openxmlformats.org/drawingml/2006/main"/>
-          <a:lstStyle xmlns:a="http://schemas.openxmlformats.org/drawingml/2006/main"/>
-          <a:p xmlns:a="http://schemas.openxmlformats.org/drawingml/2006/main">
+          <a:bodyPr/>
+          <a:lstStyle/>
+          <a:p>
             <a:pPr>
               <a:buNone/>
               <a:defRPr sz="1800"/>
@@ -11139,7 +10989,7 @@
               <a:t>Soit 60,9 % du catalogue rapproché.</a:t>
             </a:r>
           </a:p>
-          <a:p xmlns:a="http://schemas.openxmlformats.org/drawingml/2006/main">
+          <a:p>
             <a:pPr>
               <a:buNone/>
               <a:defRPr sz="1800"/>
@@ -11153,23 +11003,23 @@
       </p:sp>
       <p:pic>
         <p:nvPicPr>
-          <p:cNvPr id="7" name=""/>
+          <p:cNvPr id="7" name="Image 6"/>
           <p:cNvPicPr>
-            <a:picLocks xmlns:a="http://schemas.openxmlformats.org/drawingml/2006/main" noChangeAspect="1"/>
+            <a:picLocks noChangeAspect="1"/>
           </p:cNvPicPr>
           <p:nvPr/>
         </p:nvPicPr>
         <p:blipFill>
-          <a:blip xmlns:r="http://schemas.openxmlformats.org/officeDocument/2006/relationships" xmlns:a="http://schemas.openxmlformats.org/drawingml/2006/main" r:embed="Ree757bb7c09c4173"/>
-          <a:srcRect xmlns:a="http://schemas.openxmlformats.org/drawingml/2006/main" l="0" t="0" r="0" b="0"/>
-          <a:stretch xmlns:a="http://schemas.openxmlformats.org/drawingml/2006/main"/>
+          <a:blip r:embed="rId3"/>
+          <a:srcRect/>
+          <a:stretch/>
         </p:blipFill>
         <p:spPr>
-          <a:xfrm xmlns:a="http://schemas.openxmlformats.org/drawingml/2006/main" flipH="0" flipV="0">
+          <a:xfrm>
             <a:off x="1047750" y="2095500"/>
             <a:ext cx="7048500" cy="2762250"/>
           </a:xfrm>
-          <a:prstGeom xmlns:a="http://schemas.openxmlformats.org/drawingml/2006/main" prst="rect">
+          <a:prstGeom prst="rect">
             <a:avLst/>
           </a:prstGeom>
         </p:spPr>
@@ -11181,11 +11031,14 @@
       </p:ext>
     </p:extLst>
   </p:cSld>
+  <p:clrMapOvr>
+    <a:masterClrMapping/>
+  </p:clrMapOvr>
 </p:sld>
 </file>
 
 <file path=ppt/slides/slide7.xml><?xml version="1.0" encoding="utf-8"?>
-<p:sld xmlns:p="http://schemas.openxmlformats.org/presentationml/2006/main">
+<p:sld xmlns:a="http://schemas.openxmlformats.org/drawingml/2006/main" xmlns:r="http://schemas.openxmlformats.org/officeDocument/2006/relationships" xmlns:p="http://schemas.openxmlformats.org/presentationml/2006/main">
   <p:cSld>
     <p:spTree>
       <p:nvGrpSpPr>
@@ -11194,29 +11047,34 @@
         <p:nvPr/>
       </p:nvGrpSpPr>
       <p:grpSpPr>
-        <a:xfrm xmlns:a="http://schemas.openxmlformats.org/drawingml/2006/main"/>
+        <a:xfrm>
+          <a:off x="0" y="0"/>
+          <a:ext cx="0" cy="0"/>
+          <a:chOff x="0" y="0"/>
+          <a:chExt cx="0" cy="0"/>
+        </a:xfrm>
       </p:grpSpPr>
       <p:sp>
         <p:nvSpPr>
           <p:cNvPr id="2" name="Title 1">
-            <a:extLst xmlns:a="http://schemas.openxmlformats.org/drawingml/2006/main">
+            <a:extLst>
               <a:ext uri="{FF2B5EF4-FFF2-40B4-BE49-F238E27FC236}">
                 <a16:creationId xmlns:a16="http://schemas.microsoft.com/office/drawing/2014/main" id="{BE63A07F-374C-411B-A593-D8DC22A5F47D}"/>
               </a:ext>
             </a:extLst>
           </p:cNvPr>
           <p:cNvSpPr>
-            <a:spLocks xmlns:a="http://schemas.openxmlformats.org/drawingml/2006/main" noGrp="1"/>
+            <a:spLocks noGrp="1"/>
           </p:cNvSpPr>
           <p:nvPr>
-            <p:ph type="title" idx="0"/>
+            <p:ph type="title"/>
           </p:nvPr>
         </p:nvSpPr>
         <p:spPr/>
         <p:txBody>
-          <a:bodyPr xmlns:a="http://schemas.openxmlformats.org/drawingml/2006/main"/>
-          <a:lstStyle xmlns:a="http://schemas.openxmlformats.org/drawingml/2006/main"/>
-          <a:p xmlns:a="http://schemas.openxmlformats.org/drawingml/2006/main">
+          <a:bodyPr/>
+          <a:lstStyle/>
+          <a:p>
             <a:r>
               <a:t>33 prix atypiques sont à revoir, pas à corriger</a:t>
             </a:r>
@@ -11226,14 +11084,14 @@
       <p:sp>
         <p:nvSpPr>
           <p:cNvPr id="3" name="Text Placeholder 2">
-            <a:extLst xmlns:a="http://schemas.openxmlformats.org/drawingml/2006/main">
+            <a:extLst>
               <a:ext uri="{FF2B5EF4-FFF2-40B4-BE49-F238E27FC236}">
                 <a16:creationId xmlns:a16="http://schemas.microsoft.com/office/drawing/2014/main" id="{A10C1B46-E606-4A2C-8FA3-4E44AA5982F5}"/>
               </a:ext>
             </a:extLst>
           </p:cNvPr>
           <p:cNvSpPr>
-            <a:spLocks xmlns:a="http://schemas.openxmlformats.org/drawingml/2006/main" noGrp="1"/>
+            <a:spLocks noGrp="1"/>
           </p:cNvSpPr>
           <p:nvPr>
             <p:ph type="body" idx="1"/>
@@ -11241,9 +11099,9 @@
         </p:nvSpPr>
         <p:spPr/>
         <p:txBody>
-          <a:bodyPr xmlns:a="http://schemas.openxmlformats.org/drawingml/2006/main"/>
-          <a:lstStyle xmlns:a="http://schemas.openxmlformats.org/drawingml/2006/main"/>
-          <a:p xmlns:a="http://schemas.openxmlformats.org/drawingml/2006/main">
+          <a:bodyPr/>
+          <a:lstStyle/>
+          <a:p>
             <a:pPr>
               <a:buNone/>
               <a:defRPr sz="1800"/>
@@ -11253,7 +11111,7 @@
               <a:t>Test MAD : rappel 100 %, alertes 4,6 %, Jaccard 0,91.</a:t>
             </a:r>
           </a:p>
-          <a:p xmlns:a="http://schemas.openxmlformats.org/drawingml/2006/main">
+          <a:p>
             <a:pPr>
               <a:buNone/>
               <a:defRPr sz="1800"/>
@@ -11267,46 +11125,46 @@
       </p:sp>
       <p:pic>
         <p:nvPicPr>
-          <p:cNvPr id="10" name=""/>
+          <p:cNvPr id="10" name="Image 9"/>
           <p:cNvPicPr>
-            <a:picLocks xmlns:a="http://schemas.openxmlformats.org/drawingml/2006/main" noChangeAspect="1"/>
+            <a:picLocks noChangeAspect="1"/>
           </p:cNvPicPr>
           <p:nvPr/>
         </p:nvPicPr>
         <p:blipFill>
-          <a:blip xmlns:r="http://schemas.openxmlformats.org/officeDocument/2006/relationships" xmlns:a="http://schemas.openxmlformats.org/drawingml/2006/main" r:embed="Raab43519dda0446b"/>
-          <a:srcRect xmlns:a="http://schemas.openxmlformats.org/drawingml/2006/main" l="0" t="0" r="0" b="0"/>
-          <a:stretch xmlns:a="http://schemas.openxmlformats.org/drawingml/2006/main"/>
+          <a:blip r:embed="rId3"/>
+          <a:srcRect/>
+          <a:stretch/>
         </p:blipFill>
         <p:spPr>
-          <a:xfrm xmlns:a="http://schemas.openxmlformats.org/drawingml/2006/main" flipH="0" flipV="0">
+          <a:xfrm>
             <a:off x="333375" y="2952750"/>
             <a:ext cx="3952875" cy="1952625"/>
           </a:xfrm>
-          <a:prstGeom xmlns:a="http://schemas.openxmlformats.org/drawingml/2006/main" prst="rect">
+          <a:prstGeom prst="rect">
             <a:avLst/>
           </a:prstGeom>
         </p:spPr>
       </p:pic>
       <p:pic>
         <p:nvPicPr>
-          <p:cNvPr id="11" name=""/>
+          <p:cNvPr id="11" name="Image 10"/>
           <p:cNvPicPr>
-            <a:picLocks xmlns:a="http://schemas.openxmlformats.org/drawingml/2006/main" noChangeAspect="1"/>
+            <a:picLocks noChangeAspect="1"/>
           </p:cNvPicPr>
           <p:nvPr/>
         </p:nvPicPr>
         <p:blipFill>
-          <a:blip xmlns:r="http://schemas.openxmlformats.org/officeDocument/2006/relationships" xmlns:a="http://schemas.openxmlformats.org/drawingml/2006/main" r:embed="R513799a475e0401d"/>
-          <a:srcRect xmlns:a="http://schemas.openxmlformats.org/drawingml/2006/main" l="0" t="0" r="0" b="0"/>
-          <a:stretch xmlns:a="http://schemas.openxmlformats.org/drawingml/2006/main"/>
+          <a:blip r:embed="rId4"/>
+          <a:srcRect/>
+          <a:stretch/>
         </p:blipFill>
         <p:spPr>
-          <a:xfrm xmlns:a="http://schemas.openxmlformats.org/drawingml/2006/main" flipH="0" flipV="0">
+          <a:xfrm>
             <a:off x="4762500" y="1381125"/>
             <a:ext cx="3714750" cy="2238375"/>
           </a:xfrm>
-          <a:prstGeom xmlns:a="http://schemas.openxmlformats.org/drawingml/2006/main" prst="rect">
+          <a:prstGeom prst="rect">
             <a:avLst/>
           </a:prstGeom>
         </p:spPr>
@@ -11318,11 +11176,14 @@
       </p:ext>
     </p:extLst>
   </p:cSld>
+  <p:clrMapOvr>
+    <a:masterClrMapping/>
+  </p:clrMapOvr>
 </p:sld>
 </file>
 
 <file path=ppt/slides/slide8.xml><?xml version="1.0" encoding="utf-8"?>
-<p:sld xmlns:p="http://schemas.openxmlformats.org/presentationml/2006/main">
+<p:sld xmlns:a="http://schemas.openxmlformats.org/drawingml/2006/main" xmlns:r="http://schemas.openxmlformats.org/officeDocument/2006/relationships" xmlns:p="http://schemas.openxmlformats.org/presentationml/2006/main">
   <p:cSld>
     <p:spTree>
       <p:nvGrpSpPr>
@@ -11331,29 +11192,34 @@
         <p:nvPr/>
       </p:nvGrpSpPr>
       <p:grpSpPr>
-        <a:xfrm xmlns:a="http://schemas.openxmlformats.org/drawingml/2006/main"/>
+        <a:xfrm>
+          <a:off x="0" y="0"/>
+          <a:ext cx="0" cy="0"/>
+          <a:chOff x="0" y="0"/>
+          <a:chExt cx="0" cy="0"/>
+        </a:xfrm>
       </p:grpSpPr>
       <p:sp>
         <p:nvSpPr>
           <p:cNvPr id="2" name="Title 1">
-            <a:extLst xmlns:a="http://schemas.openxmlformats.org/drawingml/2006/main">
+            <a:extLst>
               <a:ext uri="{FF2B5EF4-FFF2-40B4-BE49-F238E27FC236}">
                 <a16:creationId xmlns:a16="http://schemas.microsoft.com/office/drawing/2014/main" id="{44C12B43-33E9-46AF-8E14-C7C0B89A3172}"/>
               </a:ext>
             </a:extLst>
           </p:cNvPr>
           <p:cNvSpPr>
-            <a:spLocks xmlns:a="http://schemas.openxmlformats.org/drawingml/2006/main" noGrp="1"/>
+            <a:spLocks noGrp="1"/>
           </p:cNvSpPr>
           <p:nvPr>
-            <p:ph type="title" idx="0"/>
+            <p:ph type="title"/>
           </p:nvPr>
         </p:nvSpPr>
         <p:spPr/>
         <p:txBody>
-          <a:bodyPr xmlns:a="http://schemas.openxmlformats.org/drawingml/2006/main"/>
-          <a:lstStyle xmlns:a="http://schemas.openxmlformats.org/drawingml/2006/main"/>
-          <a:p xmlns:a="http://schemas.openxmlformats.org/drawingml/2006/main">
+          <a:bodyPr/>
+          <a:lstStyle/>
+          <a:p>
             <a:r>
               <a:rPr sz="3000"/>
               <a:t>95 012 € de stock à plus de 12 mois</a:t>
@@ -11364,14 +11230,14 @@
       <p:sp>
         <p:nvSpPr>
           <p:cNvPr id="3" name="Text Placeholder 2">
-            <a:extLst xmlns:a="http://schemas.openxmlformats.org/drawingml/2006/main">
+            <a:extLst>
               <a:ext uri="{FF2B5EF4-FFF2-40B4-BE49-F238E27FC236}">
                 <a16:creationId xmlns:a16="http://schemas.microsoft.com/office/drawing/2014/main" id="{67C7970D-FF1A-4BBD-89B0-0FD0A91DEB91}"/>
               </a:ext>
             </a:extLst>
           </p:cNvPr>
           <p:cNvSpPr>
-            <a:spLocks xmlns:a="http://schemas.openxmlformats.org/drawingml/2006/main" noGrp="1"/>
+            <a:spLocks noGrp="1"/>
           </p:cNvSpPr>
           <p:nvPr>
             <p:ph type="body" idx="1"/>
@@ -11379,9 +11245,9 @@
         </p:nvSpPr>
         <p:spPr/>
         <p:txBody>
-          <a:bodyPr xmlns:a="http://schemas.openxmlformats.org/drawingml/2006/main"/>
-          <a:lstStyle xmlns:a="http://schemas.openxmlformats.org/drawingml/2006/main"/>
-          <a:p xmlns:a="http://schemas.openxmlformats.org/drawingml/2006/main">
+          <a:bodyPr/>
+          <a:lstStyle/>
+          <a:p>
             <a:pPr>
               <a:buNone/>
               <a:defRPr sz="1800"/>
@@ -11391,7 +11257,7 @@
               <a:t>24 références ; 34,3 % de la valeur au coût du stock apparié.</a:t>
             </a:r>
           </a:p>
-          <a:p xmlns:a="http://schemas.openxmlformats.org/drawingml/2006/main">
+          <a:p>
             <a:pPr>
               <a:buNone/>
               <a:defRPr sz="1800"/>
@@ -11405,23 +11271,23 @@
       </p:sp>
       <p:pic>
         <p:nvPicPr>
-          <p:cNvPr id="7" name=""/>
+          <p:cNvPr id="7" name="Image 6"/>
           <p:cNvPicPr>
-            <a:picLocks xmlns:a="http://schemas.openxmlformats.org/drawingml/2006/main" noChangeAspect="1"/>
+            <a:picLocks noChangeAspect="1"/>
           </p:cNvPicPr>
           <p:nvPr/>
         </p:nvPicPr>
         <p:blipFill>
-          <a:blip xmlns:r="http://schemas.openxmlformats.org/officeDocument/2006/relationships" xmlns:a="http://schemas.openxmlformats.org/drawingml/2006/main" r:embed="R27f2960be4614e9b"/>
-          <a:srcRect xmlns:a="http://schemas.openxmlformats.org/drawingml/2006/main" l="0" t="0" r="0" b="0"/>
-          <a:stretch xmlns:a="http://schemas.openxmlformats.org/drawingml/2006/main"/>
+          <a:blip r:embed="rId3"/>
+          <a:srcRect/>
+          <a:stretch/>
         </p:blipFill>
         <p:spPr>
-          <a:xfrm xmlns:a="http://schemas.openxmlformats.org/drawingml/2006/main" flipH="0" flipV="0">
+          <a:xfrm>
             <a:off x="1095375" y="2095500"/>
             <a:ext cx="6953250" cy="2762250"/>
           </a:xfrm>
-          <a:prstGeom xmlns:a="http://schemas.openxmlformats.org/drawingml/2006/main" prst="rect">
+          <a:prstGeom prst="rect">
             <a:avLst/>
           </a:prstGeom>
         </p:spPr>
@@ -11433,11 +11299,14 @@
       </p:ext>
     </p:extLst>
   </p:cSld>
+  <p:clrMapOvr>
+    <a:masterClrMapping/>
+  </p:clrMapOvr>
 </p:sld>
 </file>
 
 <file path=ppt/slides/slide9.xml><?xml version="1.0" encoding="utf-8"?>
-<p:sld xmlns:p="http://schemas.openxmlformats.org/presentationml/2006/main">
+<p:sld xmlns:a="http://schemas.openxmlformats.org/drawingml/2006/main" xmlns:r="http://schemas.openxmlformats.org/officeDocument/2006/relationships" xmlns:p="http://schemas.openxmlformats.org/presentationml/2006/main">
   <p:cSld>
     <p:spTree>
       <p:nvGrpSpPr>
@@ -11446,29 +11315,34 @@
         <p:nvPr/>
       </p:nvGrpSpPr>
       <p:grpSpPr>
-        <a:xfrm xmlns:a="http://schemas.openxmlformats.org/drawingml/2006/main"/>
+        <a:xfrm>
+          <a:off x="0" y="0"/>
+          <a:ext cx="0" cy="0"/>
+          <a:chOff x="0" y="0"/>
+          <a:chExt cx="0" cy="0"/>
+        </a:xfrm>
       </p:grpSpPr>
       <p:sp>
         <p:nvSpPr>
           <p:cNvPr id="2" name="Title 1">
-            <a:extLst xmlns:a="http://schemas.openxmlformats.org/drawingml/2006/main">
+            <a:extLst>
               <a:ext uri="{FF2B5EF4-FFF2-40B4-BE49-F238E27FC236}">
                 <a16:creationId xmlns:a16="http://schemas.microsoft.com/office/drawing/2014/main" id="{5293BD07-04B8-4A11-8381-F8CCAF3404F1}"/>
               </a:ext>
             </a:extLst>
           </p:cNvPr>
           <p:cNvSpPr>
-            <a:spLocks xmlns:a="http://schemas.openxmlformats.org/drawingml/2006/main" noGrp="1"/>
+            <a:spLocks noGrp="1"/>
           </p:cNvSpPr>
           <p:nvPr>
-            <p:ph type="title" idx="0"/>
+            <p:ph type="title"/>
           </p:nvPr>
         </p:nvSpPr>
         <p:spPr/>
         <p:txBody>
-          <a:bodyPr xmlns:a="http://schemas.openxmlformats.org/drawingml/2006/main"/>
-          <a:lstStyle xmlns:a="http://schemas.openxmlformats.org/drawingml/2006/main"/>
-          <a:p xmlns:a="http://schemas.openxmlformats.org/drawingml/2006/main">
+          <a:bodyPr/>
+          <a:lstStyle/>
+          <a:p>
             <a:r>
               <a:rPr sz="3000"/>
               <a:t>14 959 € de stock n’ont aucune vente observée</a:t>
@@ -11479,14 +11353,14 @@
       <p:sp>
         <p:nvSpPr>
           <p:cNvPr id="3" name="Text Placeholder 2">
-            <a:extLst xmlns:a="http://schemas.openxmlformats.org/drawingml/2006/main">
+            <a:extLst>
               <a:ext uri="{FF2B5EF4-FFF2-40B4-BE49-F238E27FC236}">
                 <a16:creationId xmlns:a16="http://schemas.microsoft.com/office/drawing/2014/main" id="{1A169780-E1CA-46E6-88D1-95A7DB6C06BB}"/>
               </a:ext>
             </a:extLst>
           </p:cNvPr>
           <p:cNvSpPr>
-            <a:spLocks xmlns:a="http://schemas.openxmlformats.org/drawingml/2006/main" noGrp="1"/>
+            <a:spLocks noGrp="1"/>
           </p:cNvSpPr>
           <p:nvPr>
             <p:ph type="body" idx="1"/>
@@ -11494,9 +11368,9 @@
         </p:nvSpPr>
         <p:spPr/>
         <p:txBody>
-          <a:bodyPr xmlns:a="http://schemas.openxmlformats.org/drawingml/2006/main"/>
-          <a:lstStyle xmlns:a="http://schemas.openxmlformats.org/drawingml/2006/main"/>
-          <a:p xmlns:a="http://schemas.openxmlformats.org/drawingml/2006/main">
+          <a:bodyPr/>
+          <a:lstStyle/>
+          <a:p>
             <a:pPr>
               <a:buNone/>
               <a:defRPr sz="1800"/>
@@ -11506,7 +11380,7 @@
               <a:t>3 références concentrent ce risque au coût d’achat HT.</a:t>
             </a:r>
           </a:p>
-          <a:p xmlns:a="http://schemas.openxmlformats.org/drawingml/2006/main">
+          <a:p>
             <a:pPr>
               <a:buNone/>
               <a:defRPr sz="1800"/>
@@ -11520,23 +11394,23 @@
       </p:sp>
       <p:pic>
         <p:nvPicPr>
-          <p:cNvPr id="7" name=""/>
+          <p:cNvPr id="7" name="Image 6"/>
           <p:cNvPicPr>
-            <a:picLocks xmlns:a="http://schemas.openxmlformats.org/drawingml/2006/main" noChangeAspect="1"/>
+            <a:picLocks noChangeAspect="1"/>
           </p:cNvPicPr>
           <p:nvPr/>
         </p:nvPicPr>
         <p:blipFill>
-          <a:blip xmlns:r="http://schemas.openxmlformats.org/officeDocument/2006/relationships" xmlns:a="http://schemas.openxmlformats.org/drawingml/2006/main" r:embed="Ra2da58f1eac3461e"/>
-          <a:srcRect xmlns:a="http://schemas.openxmlformats.org/drawingml/2006/main" l="0" t="0" r="0" b="0"/>
-          <a:stretch xmlns:a="http://schemas.openxmlformats.org/drawingml/2006/main"/>
+          <a:blip r:embed="rId3"/>
+          <a:srcRect/>
+          <a:stretch/>
         </p:blipFill>
         <p:spPr>
-          <a:xfrm xmlns:a="http://schemas.openxmlformats.org/drawingml/2006/main" flipH="0" flipV="0">
+          <a:xfrm>
             <a:off x="666750" y="2524125"/>
             <a:ext cx="7810500" cy="2238375"/>
           </a:xfrm>
-          <a:prstGeom xmlns:a="http://schemas.openxmlformats.org/drawingml/2006/main" prst="rect">
+          <a:prstGeom prst="rect">
             <a:avLst/>
           </a:prstGeom>
         </p:spPr>
@@ -11548,6 +11422,9 @@
       </p:ext>
     </p:extLst>
   </p:cSld>
+  <p:clrMapOvr>
+    <a:masterClrMapping/>
+  </p:clrMapOvr>
 </p:sld>
 </file>
 
@@ -11816,5 +11693,277 @@
       </a:bgFillStyleLst>
     </a:fmtScheme>
   </a:themeElements>
+  <a:objectDefaults/>
+  <a:extraClrSchemeLst/>
+</a:theme>
+</file>
+
+<file path=ppt/theme/theme2.xml><?xml version="1.0" encoding="utf-8"?>
+<a:theme xmlns:a="http://schemas.openxmlformats.org/drawingml/2006/main" name="Simple Light">
+  <a:themeElements>
+    <a:clrScheme name="Simple Light">
+      <a:dk1>
+        <a:srgbClr val="000000"/>
+      </a:dk1>
+      <a:lt1>
+        <a:srgbClr val="FFFFFF"/>
+      </a:lt1>
+      <a:dk2>
+        <a:srgbClr val="595959"/>
+      </a:dk2>
+      <a:lt2>
+        <a:srgbClr val="EEEEEE"/>
+      </a:lt2>
+      <a:accent1>
+        <a:srgbClr val="4285F4"/>
+      </a:accent1>
+      <a:accent2>
+        <a:srgbClr val="212121"/>
+      </a:accent2>
+      <a:accent3>
+        <a:srgbClr val="78909C"/>
+      </a:accent3>
+      <a:accent4>
+        <a:srgbClr val="FFAB40"/>
+      </a:accent4>
+      <a:accent5>
+        <a:srgbClr val="0097A7"/>
+      </a:accent5>
+      <a:accent6>
+        <a:srgbClr val="EEFF41"/>
+      </a:accent6>
+      <a:hlink>
+        <a:srgbClr val="0097A7"/>
+      </a:hlink>
+      <a:folHlink>
+        <a:srgbClr val="0097A7"/>
+      </a:folHlink>
+    </a:clrScheme>
+    <a:fontScheme name="Office">
+      <a:majorFont>
+        <a:latin typeface="Arial"/>
+        <a:ea typeface=""/>
+        <a:cs typeface=""/>
+        <a:font script="Jpan" typeface="ＭＳ Ｐゴシック"/>
+        <a:font script="Hang" typeface="맑은 고딕"/>
+        <a:font script="Hans" typeface="宋体"/>
+        <a:font script="Hant" typeface="新細明體"/>
+        <a:font script="Arab" typeface="Times New Roman"/>
+        <a:font script="Hebr" typeface="Times New Roman"/>
+        <a:font script="Thai" typeface="Angsana New"/>
+        <a:font script="Ethi" typeface="Nyala"/>
+        <a:font script="Beng" typeface="Vrinda"/>
+        <a:font script="Gujr" typeface="Shruti"/>
+        <a:font script="Khmr" typeface="MoolBoran"/>
+        <a:font script="Knda" typeface="Tunga"/>
+        <a:font script="Guru" typeface="Raavi"/>
+        <a:font script="Cans" typeface="Euphemia"/>
+        <a:font script="Cher" typeface="Plantagenet Cherokee"/>
+        <a:font script="Yiii" typeface="Microsoft Yi Baiti"/>
+        <a:font script="Tibt" typeface="Microsoft Himalaya"/>
+        <a:font script="Thaa" typeface="MV Boli"/>
+        <a:font script="Deva" typeface="Mangal"/>
+        <a:font script="Telu" typeface="Gautami"/>
+        <a:font script="Taml" typeface="Latha"/>
+        <a:font script="Syrc" typeface="Estrangelo Edessa"/>
+        <a:font script="Orya" typeface="Kalinga"/>
+        <a:font script="Mlym" typeface="Kartika"/>
+        <a:font script="Laoo" typeface="DokChampa"/>
+        <a:font script="Sinh" typeface="Iskoola Pota"/>
+        <a:font script="Mong" typeface="Mongolian Baiti"/>
+        <a:font script="Viet" typeface="Times New Roman"/>
+        <a:font script="Uigh" typeface="Microsoft Uighur"/>
+        <a:font script="Geor" typeface="Sylfaen"/>
+      </a:majorFont>
+      <a:minorFont>
+        <a:latin typeface="Arial"/>
+        <a:ea typeface=""/>
+        <a:cs typeface=""/>
+        <a:font script="Jpan" typeface="ＭＳ Ｐゴシック"/>
+        <a:font script="Hang" typeface="맑은 고딕"/>
+        <a:font script="Hans" typeface="宋体"/>
+        <a:font script="Hant" typeface="新細明體"/>
+        <a:font script="Arab" typeface="Arial"/>
+        <a:font script="Hebr" typeface="Arial"/>
+        <a:font script="Thai" typeface="Cordia New"/>
+        <a:font script="Ethi" typeface="Nyala"/>
+        <a:font script="Beng" typeface="Vrinda"/>
+        <a:font script="Gujr" typeface="Shruti"/>
+        <a:font script="Khmr" typeface="DaunPenh"/>
+        <a:font script="Knda" typeface="Tunga"/>
+        <a:font script="Guru" typeface="Raavi"/>
+        <a:font script="Cans" typeface="Euphemia"/>
+        <a:font script="Cher" typeface="Plantagenet Cherokee"/>
+        <a:font script="Yiii" typeface="Microsoft Yi Baiti"/>
+        <a:font script="Tibt" typeface="Microsoft Himalaya"/>
+        <a:font script="Thaa" typeface="MV Boli"/>
+        <a:font script="Deva" typeface="Mangal"/>
+        <a:font script="Telu" typeface="Gautami"/>
+        <a:font script="Taml" typeface="Latha"/>
+        <a:font script="Syrc" typeface="Estrangelo Edessa"/>
+        <a:font script="Orya" typeface="Kalinga"/>
+        <a:font script="Mlym" typeface="Kartika"/>
+        <a:font script="Laoo" typeface="DokChampa"/>
+        <a:font script="Sinh" typeface="Iskoola Pota"/>
+        <a:font script="Mong" typeface="Mongolian Baiti"/>
+        <a:font script="Viet" typeface="Arial"/>
+        <a:font script="Uigh" typeface="Microsoft Uighur"/>
+        <a:font script="Geor" typeface="Sylfaen"/>
+      </a:minorFont>
+    </a:fontScheme>
+    <a:fmtScheme name="Simple Light">
+      <a:fillStyleLst>
+        <a:solidFill>
+          <a:schemeClr val="phClr"/>
+        </a:solidFill>
+        <a:gradFill rotWithShape="1">
+          <a:gsLst>
+            <a:gs pos="0">
+              <a:schemeClr val="phClr">
+                <a:tint val="50000"/>
+                <a:satMod val="300000"/>
+              </a:schemeClr>
+            </a:gs>
+            <a:gs pos="35000">
+              <a:schemeClr val="phClr">
+                <a:tint val="37000"/>
+                <a:satMod val="300000"/>
+              </a:schemeClr>
+            </a:gs>
+            <a:gs pos="100000">
+              <a:schemeClr val="phClr">
+                <a:tint val="15000"/>
+                <a:satMod val="350000"/>
+              </a:schemeClr>
+            </a:gs>
+          </a:gsLst>
+          <a:lin ang="16200000" scaled="1"/>
+        </a:gradFill>
+        <a:gradFill rotWithShape="1">
+          <a:gsLst>
+            <a:gs pos="0">
+              <a:schemeClr val="phClr">
+                <a:tint val="100000"/>
+                <a:shade val="100000"/>
+                <a:satMod val="130000"/>
+              </a:schemeClr>
+            </a:gs>
+            <a:gs pos="100000">
+              <a:schemeClr val="phClr">
+                <a:tint val="50000"/>
+                <a:shade val="100000"/>
+                <a:satMod val="350000"/>
+              </a:schemeClr>
+            </a:gs>
+          </a:gsLst>
+          <a:lin ang="16200000" scaled="0"/>
+        </a:gradFill>
+      </a:fillStyleLst>
+      <a:lnStyleLst>
+        <a:ln w="9525">
+          <a:solidFill>
+            <a:schemeClr val="phClr">
+              <a:shade val="95000"/>
+              <a:satMod val="105000"/>
+            </a:schemeClr>
+          </a:solidFill>
+          <a:prstDash val="solid"/>
+        </a:ln>
+        <a:ln w="25400">
+          <a:solidFill>
+            <a:schemeClr val="phClr"/>
+          </a:solidFill>
+          <a:prstDash val="solid"/>
+        </a:ln>
+        <a:ln w="38100">
+          <a:solidFill>
+            <a:schemeClr val="phClr"/>
+          </a:solidFill>
+          <a:prstDash val="solid"/>
+        </a:ln>
+      </a:lnStyleLst>
+      <a:effectStyleLst>
+        <a:effectStyle>
+          <a:effectLst>
+            <a:outerShdw blurRad="40000" dist="20000" dir="5400000" rotWithShape="0">
+              <a:srgbClr val="000000">
+                <a:alpha val="38000"/>
+              </a:srgbClr>
+            </a:outerShdw>
+          </a:effectLst>
+        </a:effectStyle>
+        <a:effectStyle>
+          <a:effectLst>
+            <a:outerShdw blurRad="40000" dist="23000" dir="5400000" rotWithShape="0">
+              <a:srgbClr val="000000">
+                <a:alpha val="35000"/>
+              </a:srgbClr>
+            </a:outerShdw>
+          </a:effectLst>
+        </a:effectStyle>
+        <a:effectStyle>
+          <a:effectLst>
+            <a:outerShdw blurRad="40000" dist="23000" dir="5400000" rotWithShape="0">
+              <a:srgbClr val="000000">
+                <a:alpha val="35000"/>
+              </a:srgbClr>
+            </a:outerShdw>
+          </a:effectLst>
+        </a:effectStyle>
+      </a:effectStyleLst>
+      <a:bgFillStyleLst>
+        <a:solidFill>
+          <a:schemeClr val="phClr"/>
+        </a:solidFill>
+        <a:gradFill rotWithShape="1">
+          <a:gsLst>
+            <a:gs pos="0">
+              <a:schemeClr val="phClr">
+                <a:tint val="40000"/>
+                <a:satMod val="350000"/>
+              </a:schemeClr>
+            </a:gs>
+            <a:gs pos="40000">
+              <a:schemeClr val="phClr">
+                <a:tint val="45000"/>
+                <a:shade val="99000"/>
+                <a:satMod val="350000"/>
+              </a:schemeClr>
+            </a:gs>
+            <a:gs pos="100000">
+              <a:schemeClr val="phClr">
+                <a:shade val="20000"/>
+                <a:satMod val="255000"/>
+              </a:schemeClr>
+            </a:gs>
+          </a:gsLst>
+          <a:path path="circle">
+            <a:fillToRect l="50000" t="-80000" r="50000" b="180000"/>
+          </a:path>
+        </a:gradFill>
+        <a:gradFill rotWithShape="1">
+          <a:gsLst>
+            <a:gs pos="0">
+              <a:schemeClr val="phClr">
+                <a:tint val="80000"/>
+                <a:satMod val="300000"/>
+              </a:schemeClr>
+            </a:gs>
+            <a:gs pos="100000">
+              <a:schemeClr val="phClr">
+                <a:shade val="30000"/>
+                <a:satMod val="200000"/>
+              </a:schemeClr>
+            </a:gs>
+          </a:gsLst>
+          <a:path path="circle">
+            <a:fillToRect l="50000" t="50000" r="50000" b="50000"/>
+          </a:path>
+        </a:gradFill>
+      </a:bgFillStyleLst>
+    </a:fmtScheme>
+  </a:themeElements>
+  <a:objectDefaults/>
+  <a:extraClrSchemeLst/>
 </a:theme>
 </file>